--- a/all-letters-kasrah/16-waw.pptx
+++ b/all-letters-kasrah/16-waw.pptx
@@ -3154,6 +3154,25 @@
                                         </p:tgtEl>
                                       </p:cBhvr>
                                     </p:animEffect>
+                                    <p:audio>
+                                      <p:cMediaNode vol="80000">
+                                        <p:cTn id="1001" display="0">
+                                          <p:stCondLst>
+                                            <p:cond delay="0"/>
+                                          </p:stCondLst>
+                                          <p:endCondLst>
+                                            <p:cond evt="onStopAudio" delay="0">
+                                              <p:tgtEl>
+                                                <p:sldTgt/>
+                                              </p:tgtEl>
+                                            </p:cond>
+                                          </p:endCondLst>
+                                        </p:cTn>
+                                        <p:tgtEl>
+                                          <p:sndTgt r:embed="rIdSnd1" name="pop.wav"/>
+                                        </p:tgtEl>
+                                      </p:cMediaNode>
+                                    </p:audio>
                                   </p:childTnLst>
                                 </p:cTn>
                               </p:par>
@@ -3207,6 +3226,25 @@
                                         </p:tgtEl>
                                       </p:cBhvr>
                                     </p:animEffect>
+                                    <p:audio>
+                                      <p:cMediaNode vol="80000">
+                                        <p:cTn id="1002" display="0">
+                                          <p:stCondLst>
+                                            <p:cond delay="0"/>
+                                          </p:stCondLst>
+                                          <p:endCondLst>
+                                            <p:cond evt="onStopAudio" delay="0">
+                                              <p:tgtEl>
+                                                <p:sldTgt/>
+                                              </p:tgtEl>
+                                            </p:cond>
+                                          </p:endCondLst>
+                                        </p:cTn>
+                                        <p:tgtEl>
+                                          <p:sndTgt r:embed="rIdSnd2" name="ding.wav"/>
+                                        </p:tgtEl>
+                                      </p:cMediaNode>
+                                    </p:audio>
                                   </p:childTnLst>
                                 </p:cTn>
                               </p:par>
@@ -4026,6 +4064,25 @@
                                         </p:tgtEl>
                                       </p:cBhvr>
                                     </p:animEffect>
+                                    <p:audio>
+                                      <p:cMediaNode vol="80000">
+                                        <p:cTn id="1001" display="0">
+                                          <p:stCondLst>
+                                            <p:cond delay="0"/>
+                                          </p:stCondLst>
+                                          <p:endCondLst>
+                                            <p:cond evt="onStopAudio" delay="0">
+                                              <p:tgtEl>
+                                                <p:sldTgt/>
+                                              </p:tgtEl>
+                                            </p:cond>
+                                          </p:endCondLst>
+                                        </p:cTn>
+                                        <p:tgtEl>
+                                          <p:sndTgt r:embed="rIdSnd1" name="pop.wav"/>
+                                        </p:tgtEl>
+                                      </p:cMediaNode>
+                                    </p:audio>
                                   </p:childTnLst>
                                 </p:cTn>
                               </p:par>
@@ -4079,6 +4136,25 @@
                                         </p:tgtEl>
                                       </p:cBhvr>
                                     </p:animEffect>
+                                    <p:audio>
+                                      <p:cMediaNode vol="80000">
+                                        <p:cTn id="1002" display="0">
+                                          <p:stCondLst>
+                                            <p:cond delay="0"/>
+                                          </p:stCondLst>
+                                          <p:endCondLst>
+                                            <p:cond evt="onStopAudio" delay="0">
+                                              <p:tgtEl>
+                                                <p:sldTgt/>
+                                              </p:tgtEl>
+                                            </p:cond>
+                                          </p:endCondLst>
+                                        </p:cTn>
+                                        <p:tgtEl>
+                                          <p:sndTgt r:embed="rIdSnd2" name="ding.wav"/>
+                                        </p:tgtEl>
+                                      </p:cMediaNode>
+                                    </p:audio>
                                   </p:childTnLst>
                                 </p:cTn>
                               </p:par>
@@ -4132,6 +4208,25 @@
                                         </p:tgtEl>
                                       </p:cBhvr>
                                     </p:animEffect>
+                                    <p:audio>
+                                      <p:cMediaNode vol="80000">
+                                        <p:cTn id="1003" display="0">
+                                          <p:stCondLst>
+                                            <p:cond delay="0"/>
+                                          </p:stCondLst>
+                                          <p:endCondLst>
+                                            <p:cond evt="onStopAudio" delay="0">
+                                              <p:tgtEl>
+                                                <p:sldTgt/>
+                                              </p:tgtEl>
+                                            </p:cond>
+                                          </p:endCondLst>
+                                        </p:cTn>
+                                        <p:tgtEl>
+                                          <p:sndTgt r:embed="rIdSnd3" name="tick.wav"/>
+                                        </p:tgtEl>
+                                      </p:cMediaNode>
+                                    </p:audio>
                                   </p:childTnLst>
                                 </p:cTn>
                               </p:par>
@@ -4185,6 +4280,25 @@
                                         </p:tgtEl>
                                       </p:cBhvr>
                                     </p:animEffect>
+                                    <p:audio>
+                                      <p:cMediaNode vol="80000">
+                                        <p:cTn id="1004" display="0">
+                                          <p:stCondLst>
+                                            <p:cond delay="0"/>
+                                          </p:stCondLst>
+                                          <p:endCondLst>
+                                            <p:cond evt="onStopAudio" delay="0">
+                                              <p:tgtEl>
+                                                <p:sldTgt/>
+                                              </p:tgtEl>
+                                            </p:cond>
+                                          </p:endCondLst>
+                                        </p:cTn>
+                                        <p:tgtEl>
+                                          <p:sndTgt r:embed="rIdSnd1" name="pop.wav"/>
+                                        </p:tgtEl>
+                                      </p:cMediaNode>
+                                    </p:audio>
                                   </p:childTnLst>
                                 </p:cTn>
                               </p:par>
@@ -4238,6 +4352,25 @@
                                         </p:tgtEl>
                                       </p:cBhvr>
                                     </p:animEffect>
+                                    <p:audio>
+                                      <p:cMediaNode vol="80000">
+                                        <p:cTn id="1005" display="0">
+                                          <p:stCondLst>
+                                            <p:cond delay="0"/>
+                                          </p:stCondLst>
+                                          <p:endCondLst>
+                                            <p:cond evt="onStopAudio" delay="0">
+                                              <p:tgtEl>
+                                                <p:sldTgt/>
+                                              </p:tgtEl>
+                                            </p:cond>
+                                          </p:endCondLst>
+                                        </p:cTn>
+                                        <p:tgtEl>
+                                          <p:sndTgt r:embed="rIdSnd2" name="ding.wav"/>
+                                        </p:tgtEl>
+                                      </p:cMediaNode>
+                                    </p:audio>
                                   </p:childTnLst>
                                 </p:cTn>
                               </p:par>
@@ -4291,6 +4424,25 @@
                                         </p:tgtEl>
                                       </p:cBhvr>
                                     </p:animEffect>
+                                    <p:audio>
+                                      <p:cMediaNode vol="80000">
+                                        <p:cTn id="1006" display="0">
+                                          <p:stCondLst>
+                                            <p:cond delay="0"/>
+                                          </p:stCondLst>
+                                          <p:endCondLst>
+                                            <p:cond evt="onStopAudio" delay="0">
+                                              <p:tgtEl>
+                                                <p:sldTgt/>
+                                              </p:tgtEl>
+                                            </p:cond>
+                                          </p:endCondLst>
+                                        </p:cTn>
+                                        <p:tgtEl>
+                                          <p:sndTgt r:embed="rIdSnd3" name="tick.wav"/>
+                                        </p:tgtEl>
+                                      </p:cMediaNode>
+                                    </p:audio>
                                   </p:childTnLst>
                                 </p:cTn>
                               </p:par>
@@ -4344,6 +4496,25 @@
                                         </p:tgtEl>
                                       </p:cBhvr>
                                     </p:animEffect>
+                                    <p:audio>
+                                      <p:cMediaNode vol="80000">
+                                        <p:cTn id="1007" display="0">
+                                          <p:stCondLst>
+                                            <p:cond delay="0"/>
+                                          </p:stCondLst>
+                                          <p:endCondLst>
+                                            <p:cond evt="onStopAudio" delay="0">
+                                              <p:tgtEl>
+                                                <p:sldTgt/>
+                                              </p:tgtEl>
+                                            </p:cond>
+                                          </p:endCondLst>
+                                        </p:cTn>
+                                        <p:tgtEl>
+                                          <p:sndTgt r:embed="rIdSnd1" name="pop.wav"/>
+                                        </p:tgtEl>
+                                      </p:cMediaNode>
+                                    </p:audio>
                                   </p:childTnLst>
                                 </p:cTn>
                               </p:par>
@@ -4397,6 +4568,25 @@
                                         </p:tgtEl>
                                       </p:cBhvr>
                                     </p:animEffect>
+                                    <p:audio>
+                                      <p:cMediaNode vol="80000">
+                                        <p:cTn id="1008" display="0">
+                                          <p:stCondLst>
+                                            <p:cond delay="0"/>
+                                          </p:stCondLst>
+                                          <p:endCondLst>
+                                            <p:cond evt="onStopAudio" delay="0">
+                                              <p:tgtEl>
+                                                <p:sldTgt/>
+                                              </p:tgtEl>
+                                            </p:cond>
+                                          </p:endCondLst>
+                                        </p:cTn>
+                                        <p:tgtEl>
+                                          <p:sndTgt r:embed="rIdSnd2" name="ding.wav"/>
+                                        </p:tgtEl>
+                                      </p:cMediaNode>
+                                    </p:audio>
                                   </p:childTnLst>
                                 </p:cTn>
                               </p:par>
@@ -4450,6 +4640,25 @@
                                         </p:tgtEl>
                                       </p:cBhvr>
                                     </p:animEffect>
+                                    <p:audio>
+                                      <p:cMediaNode vol="80000">
+                                        <p:cTn id="1009" display="0">
+                                          <p:stCondLst>
+                                            <p:cond delay="0"/>
+                                          </p:stCondLst>
+                                          <p:endCondLst>
+                                            <p:cond evt="onStopAudio" delay="0">
+                                              <p:tgtEl>
+                                                <p:sldTgt/>
+                                              </p:tgtEl>
+                                            </p:cond>
+                                          </p:endCondLst>
+                                        </p:cTn>
+                                        <p:tgtEl>
+                                          <p:sndTgt r:embed="rIdSnd3" name="tick.wav"/>
+                                        </p:tgtEl>
+                                      </p:cMediaNode>
+                                    </p:audio>
                                   </p:childTnLst>
                                 </p:cTn>
                               </p:par>
@@ -4503,6 +4712,25 @@
                                         </p:tgtEl>
                                       </p:cBhvr>
                                     </p:animEffect>
+                                    <p:audio>
+                                      <p:cMediaNode vol="80000">
+                                        <p:cTn id="1010" display="0">
+                                          <p:stCondLst>
+                                            <p:cond delay="0"/>
+                                          </p:stCondLst>
+                                          <p:endCondLst>
+                                            <p:cond evt="onStopAudio" delay="0">
+                                              <p:tgtEl>
+                                                <p:sldTgt/>
+                                              </p:tgtEl>
+                                            </p:cond>
+                                          </p:endCondLst>
+                                        </p:cTn>
+                                        <p:tgtEl>
+                                          <p:sndTgt r:embed="rIdSnd4" name="win.wav"/>
+                                        </p:tgtEl>
+                                      </p:cMediaNode>
+                                    </p:audio>
                                   </p:childTnLst>
                                 </p:cTn>
                               </p:par>
@@ -5330,6 +5558,25 @@
                                         </p:tgtEl>
                                       </p:cBhvr>
                                     </p:animEffect>
+                                    <p:audio>
+                                      <p:cMediaNode vol="80000">
+                                        <p:cTn id="1001" display="0">
+                                          <p:stCondLst>
+                                            <p:cond delay="0"/>
+                                          </p:stCondLst>
+                                          <p:endCondLst>
+                                            <p:cond evt="onStopAudio" delay="0">
+                                              <p:tgtEl>
+                                                <p:sldTgt/>
+                                              </p:tgtEl>
+                                            </p:cond>
+                                          </p:endCondLst>
+                                        </p:cTn>
+                                        <p:tgtEl>
+                                          <p:sndTgt r:embed="rIdSnd1" name="pop.wav"/>
+                                        </p:tgtEl>
+                                      </p:cMediaNode>
+                                    </p:audio>
                                   </p:childTnLst>
                                 </p:cTn>
                               </p:par>
@@ -5383,6 +5630,25 @@
                                         </p:tgtEl>
                                       </p:cBhvr>
                                     </p:animEffect>
+                                    <p:audio>
+                                      <p:cMediaNode vol="80000">
+                                        <p:cTn id="1002" display="0">
+                                          <p:stCondLst>
+                                            <p:cond delay="0"/>
+                                          </p:stCondLst>
+                                          <p:endCondLst>
+                                            <p:cond evt="onStopAudio" delay="0">
+                                              <p:tgtEl>
+                                                <p:sldTgt/>
+                                              </p:tgtEl>
+                                            </p:cond>
+                                          </p:endCondLst>
+                                        </p:cTn>
+                                        <p:tgtEl>
+                                          <p:sndTgt r:embed="rIdSnd2" name="ding.wav"/>
+                                        </p:tgtEl>
+                                      </p:cMediaNode>
+                                    </p:audio>
                                   </p:childTnLst>
                                 </p:cTn>
                               </p:par>
@@ -5436,6 +5702,25 @@
                                         </p:tgtEl>
                                       </p:cBhvr>
                                     </p:animEffect>
+                                    <p:audio>
+                                      <p:cMediaNode vol="80000">
+                                        <p:cTn id="1003" display="0">
+                                          <p:stCondLst>
+                                            <p:cond delay="0"/>
+                                          </p:stCondLst>
+                                          <p:endCondLst>
+                                            <p:cond evt="onStopAudio" delay="0">
+                                              <p:tgtEl>
+                                                <p:sldTgt/>
+                                              </p:tgtEl>
+                                            </p:cond>
+                                          </p:endCondLst>
+                                        </p:cTn>
+                                        <p:tgtEl>
+                                          <p:sndTgt r:embed="rIdSnd3" name="tick.wav"/>
+                                        </p:tgtEl>
+                                      </p:cMediaNode>
+                                    </p:audio>
                                   </p:childTnLst>
                                 </p:cTn>
                               </p:par>
@@ -5489,6 +5774,25 @@
                                         </p:tgtEl>
                                       </p:cBhvr>
                                     </p:animEffect>
+                                    <p:audio>
+                                      <p:cMediaNode vol="80000">
+                                        <p:cTn id="1004" display="0">
+                                          <p:stCondLst>
+                                            <p:cond delay="0"/>
+                                          </p:stCondLst>
+                                          <p:endCondLst>
+                                            <p:cond evt="onStopAudio" delay="0">
+                                              <p:tgtEl>
+                                                <p:sldTgt/>
+                                              </p:tgtEl>
+                                            </p:cond>
+                                          </p:endCondLst>
+                                        </p:cTn>
+                                        <p:tgtEl>
+                                          <p:sndTgt r:embed="rIdSnd1" name="pop.wav"/>
+                                        </p:tgtEl>
+                                      </p:cMediaNode>
+                                    </p:audio>
                                   </p:childTnLst>
                                 </p:cTn>
                               </p:par>
@@ -5542,6 +5846,25 @@
                                         </p:tgtEl>
                                       </p:cBhvr>
                                     </p:animEffect>
+                                    <p:audio>
+                                      <p:cMediaNode vol="80000">
+                                        <p:cTn id="1005" display="0">
+                                          <p:stCondLst>
+                                            <p:cond delay="0"/>
+                                          </p:stCondLst>
+                                          <p:endCondLst>
+                                            <p:cond evt="onStopAudio" delay="0">
+                                              <p:tgtEl>
+                                                <p:sldTgt/>
+                                              </p:tgtEl>
+                                            </p:cond>
+                                          </p:endCondLst>
+                                        </p:cTn>
+                                        <p:tgtEl>
+                                          <p:sndTgt r:embed="rIdSnd2" name="ding.wav"/>
+                                        </p:tgtEl>
+                                      </p:cMediaNode>
+                                    </p:audio>
                                   </p:childTnLst>
                                 </p:cTn>
                               </p:par>
@@ -5595,6 +5918,25 @@
                                         </p:tgtEl>
                                       </p:cBhvr>
                                     </p:animEffect>
+                                    <p:audio>
+                                      <p:cMediaNode vol="80000">
+                                        <p:cTn id="1006" display="0">
+                                          <p:stCondLst>
+                                            <p:cond delay="0"/>
+                                          </p:stCondLst>
+                                          <p:endCondLst>
+                                            <p:cond evt="onStopAudio" delay="0">
+                                              <p:tgtEl>
+                                                <p:sldTgt/>
+                                              </p:tgtEl>
+                                            </p:cond>
+                                          </p:endCondLst>
+                                        </p:cTn>
+                                        <p:tgtEl>
+                                          <p:sndTgt r:embed="rIdSnd3" name="tick.wav"/>
+                                        </p:tgtEl>
+                                      </p:cMediaNode>
+                                    </p:audio>
                                   </p:childTnLst>
                                 </p:cTn>
                               </p:par>
@@ -5648,6 +5990,25 @@
                                         </p:tgtEl>
                                       </p:cBhvr>
                                     </p:animEffect>
+                                    <p:audio>
+                                      <p:cMediaNode vol="80000">
+                                        <p:cTn id="1007" display="0">
+                                          <p:stCondLst>
+                                            <p:cond delay="0"/>
+                                          </p:stCondLst>
+                                          <p:endCondLst>
+                                            <p:cond evt="onStopAudio" delay="0">
+                                              <p:tgtEl>
+                                                <p:sldTgt/>
+                                              </p:tgtEl>
+                                            </p:cond>
+                                          </p:endCondLst>
+                                        </p:cTn>
+                                        <p:tgtEl>
+                                          <p:sndTgt r:embed="rIdSnd1" name="pop.wav"/>
+                                        </p:tgtEl>
+                                      </p:cMediaNode>
+                                    </p:audio>
                                   </p:childTnLst>
                                 </p:cTn>
                               </p:par>
@@ -5701,6 +6062,25 @@
                                         </p:tgtEl>
                                       </p:cBhvr>
                                     </p:animEffect>
+                                    <p:audio>
+                                      <p:cMediaNode vol="80000">
+                                        <p:cTn id="1008" display="0">
+                                          <p:stCondLst>
+                                            <p:cond delay="0"/>
+                                          </p:stCondLst>
+                                          <p:endCondLst>
+                                            <p:cond evt="onStopAudio" delay="0">
+                                              <p:tgtEl>
+                                                <p:sldTgt/>
+                                              </p:tgtEl>
+                                            </p:cond>
+                                          </p:endCondLst>
+                                        </p:cTn>
+                                        <p:tgtEl>
+                                          <p:sndTgt r:embed="rIdSnd2" name="ding.wav"/>
+                                        </p:tgtEl>
+                                      </p:cMediaNode>
+                                    </p:audio>
                                   </p:childTnLst>
                                 </p:cTn>
                               </p:par>
@@ -5754,6 +6134,25 @@
                                         </p:tgtEl>
                                       </p:cBhvr>
                                     </p:animEffect>
+                                    <p:audio>
+                                      <p:cMediaNode vol="80000">
+                                        <p:cTn id="1009" display="0">
+                                          <p:stCondLst>
+                                            <p:cond delay="0"/>
+                                          </p:stCondLst>
+                                          <p:endCondLst>
+                                            <p:cond evt="onStopAudio" delay="0">
+                                              <p:tgtEl>
+                                                <p:sldTgt/>
+                                              </p:tgtEl>
+                                            </p:cond>
+                                          </p:endCondLst>
+                                        </p:cTn>
+                                        <p:tgtEl>
+                                          <p:sndTgt r:embed="rIdSnd3" name="tick.wav"/>
+                                        </p:tgtEl>
+                                      </p:cMediaNode>
+                                    </p:audio>
                                   </p:childTnLst>
                                 </p:cTn>
                               </p:par>
@@ -5807,6 +6206,25 @@
                                         </p:tgtEl>
                                       </p:cBhvr>
                                     </p:animEffect>
+                                    <p:audio>
+                                      <p:cMediaNode vol="80000">
+                                        <p:cTn id="1010" display="0">
+                                          <p:stCondLst>
+                                            <p:cond delay="0"/>
+                                          </p:stCondLst>
+                                          <p:endCondLst>
+                                            <p:cond evt="onStopAudio" delay="0">
+                                              <p:tgtEl>
+                                                <p:sldTgt/>
+                                              </p:tgtEl>
+                                            </p:cond>
+                                          </p:endCondLst>
+                                        </p:cTn>
+                                        <p:tgtEl>
+                                          <p:sndTgt r:embed="rIdSnd4" name="win.wav"/>
+                                        </p:tgtEl>
+                                      </p:cMediaNode>
+                                    </p:audio>
                                   </p:childTnLst>
                                 </p:cTn>
                               </p:par>
@@ -6634,6 +7052,25 @@
                                         </p:tgtEl>
                                       </p:cBhvr>
                                     </p:animEffect>
+                                    <p:audio>
+                                      <p:cMediaNode vol="80000">
+                                        <p:cTn id="1001" display="0">
+                                          <p:stCondLst>
+                                            <p:cond delay="0"/>
+                                          </p:stCondLst>
+                                          <p:endCondLst>
+                                            <p:cond evt="onStopAudio" delay="0">
+                                              <p:tgtEl>
+                                                <p:sldTgt/>
+                                              </p:tgtEl>
+                                            </p:cond>
+                                          </p:endCondLst>
+                                        </p:cTn>
+                                        <p:tgtEl>
+                                          <p:sndTgt r:embed="rIdSnd1" name="pop.wav"/>
+                                        </p:tgtEl>
+                                      </p:cMediaNode>
+                                    </p:audio>
                                   </p:childTnLst>
                                 </p:cTn>
                               </p:par>
@@ -6687,6 +7124,25 @@
                                         </p:tgtEl>
                                       </p:cBhvr>
                                     </p:animEffect>
+                                    <p:audio>
+                                      <p:cMediaNode vol="80000">
+                                        <p:cTn id="1002" display="0">
+                                          <p:stCondLst>
+                                            <p:cond delay="0"/>
+                                          </p:stCondLst>
+                                          <p:endCondLst>
+                                            <p:cond evt="onStopAudio" delay="0">
+                                              <p:tgtEl>
+                                                <p:sldTgt/>
+                                              </p:tgtEl>
+                                            </p:cond>
+                                          </p:endCondLst>
+                                        </p:cTn>
+                                        <p:tgtEl>
+                                          <p:sndTgt r:embed="rIdSnd2" name="ding.wav"/>
+                                        </p:tgtEl>
+                                      </p:cMediaNode>
+                                    </p:audio>
                                   </p:childTnLst>
                                 </p:cTn>
                               </p:par>
@@ -6740,6 +7196,25 @@
                                         </p:tgtEl>
                                       </p:cBhvr>
                                     </p:animEffect>
+                                    <p:audio>
+                                      <p:cMediaNode vol="80000">
+                                        <p:cTn id="1003" display="0">
+                                          <p:stCondLst>
+                                            <p:cond delay="0"/>
+                                          </p:stCondLst>
+                                          <p:endCondLst>
+                                            <p:cond evt="onStopAudio" delay="0">
+                                              <p:tgtEl>
+                                                <p:sldTgt/>
+                                              </p:tgtEl>
+                                            </p:cond>
+                                          </p:endCondLst>
+                                        </p:cTn>
+                                        <p:tgtEl>
+                                          <p:sndTgt r:embed="rIdSnd3" name="tick.wav"/>
+                                        </p:tgtEl>
+                                      </p:cMediaNode>
+                                    </p:audio>
                                   </p:childTnLst>
                                 </p:cTn>
                               </p:par>
@@ -6793,6 +7268,25 @@
                                         </p:tgtEl>
                                       </p:cBhvr>
                                     </p:animEffect>
+                                    <p:audio>
+                                      <p:cMediaNode vol="80000">
+                                        <p:cTn id="1004" display="0">
+                                          <p:stCondLst>
+                                            <p:cond delay="0"/>
+                                          </p:stCondLst>
+                                          <p:endCondLst>
+                                            <p:cond evt="onStopAudio" delay="0">
+                                              <p:tgtEl>
+                                                <p:sldTgt/>
+                                              </p:tgtEl>
+                                            </p:cond>
+                                          </p:endCondLst>
+                                        </p:cTn>
+                                        <p:tgtEl>
+                                          <p:sndTgt r:embed="rIdSnd1" name="pop.wav"/>
+                                        </p:tgtEl>
+                                      </p:cMediaNode>
+                                    </p:audio>
                                   </p:childTnLst>
                                 </p:cTn>
                               </p:par>
@@ -6846,6 +7340,25 @@
                                         </p:tgtEl>
                                       </p:cBhvr>
                                     </p:animEffect>
+                                    <p:audio>
+                                      <p:cMediaNode vol="80000">
+                                        <p:cTn id="1005" display="0">
+                                          <p:stCondLst>
+                                            <p:cond delay="0"/>
+                                          </p:stCondLst>
+                                          <p:endCondLst>
+                                            <p:cond evt="onStopAudio" delay="0">
+                                              <p:tgtEl>
+                                                <p:sldTgt/>
+                                              </p:tgtEl>
+                                            </p:cond>
+                                          </p:endCondLst>
+                                        </p:cTn>
+                                        <p:tgtEl>
+                                          <p:sndTgt r:embed="rIdSnd2" name="ding.wav"/>
+                                        </p:tgtEl>
+                                      </p:cMediaNode>
+                                    </p:audio>
                                   </p:childTnLst>
                                 </p:cTn>
                               </p:par>
@@ -6899,6 +7412,25 @@
                                         </p:tgtEl>
                                       </p:cBhvr>
                                     </p:animEffect>
+                                    <p:audio>
+                                      <p:cMediaNode vol="80000">
+                                        <p:cTn id="1006" display="0">
+                                          <p:stCondLst>
+                                            <p:cond delay="0"/>
+                                          </p:stCondLst>
+                                          <p:endCondLst>
+                                            <p:cond evt="onStopAudio" delay="0">
+                                              <p:tgtEl>
+                                                <p:sldTgt/>
+                                              </p:tgtEl>
+                                            </p:cond>
+                                          </p:endCondLst>
+                                        </p:cTn>
+                                        <p:tgtEl>
+                                          <p:sndTgt r:embed="rIdSnd3" name="tick.wav"/>
+                                        </p:tgtEl>
+                                      </p:cMediaNode>
+                                    </p:audio>
                                   </p:childTnLst>
                                 </p:cTn>
                               </p:par>
@@ -6952,6 +7484,25 @@
                                         </p:tgtEl>
                                       </p:cBhvr>
                                     </p:animEffect>
+                                    <p:audio>
+                                      <p:cMediaNode vol="80000">
+                                        <p:cTn id="1007" display="0">
+                                          <p:stCondLst>
+                                            <p:cond delay="0"/>
+                                          </p:stCondLst>
+                                          <p:endCondLst>
+                                            <p:cond evt="onStopAudio" delay="0">
+                                              <p:tgtEl>
+                                                <p:sldTgt/>
+                                              </p:tgtEl>
+                                            </p:cond>
+                                          </p:endCondLst>
+                                        </p:cTn>
+                                        <p:tgtEl>
+                                          <p:sndTgt r:embed="rIdSnd1" name="pop.wav"/>
+                                        </p:tgtEl>
+                                      </p:cMediaNode>
+                                    </p:audio>
                                   </p:childTnLst>
                                 </p:cTn>
                               </p:par>
@@ -7005,6 +7556,25 @@
                                         </p:tgtEl>
                                       </p:cBhvr>
                                     </p:animEffect>
+                                    <p:audio>
+                                      <p:cMediaNode vol="80000">
+                                        <p:cTn id="1008" display="0">
+                                          <p:stCondLst>
+                                            <p:cond delay="0"/>
+                                          </p:stCondLst>
+                                          <p:endCondLst>
+                                            <p:cond evt="onStopAudio" delay="0">
+                                              <p:tgtEl>
+                                                <p:sldTgt/>
+                                              </p:tgtEl>
+                                            </p:cond>
+                                          </p:endCondLst>
+                                        </p:cTn>
+                                        <p:tgtEl>
+                                          <p:sndTgt r:embed="rIdSnd2" name="ding.wav"/>
+                                        </p:tgtEl>
+                                      </p:cMediaNode>
+                                    </p:audio>
                                   </p:childTnLst>
                                 </p:cTn>
                               </p:par>
@@ -7058,6 +7628,25 @@
                                         </p:tgtEl>
                                       </p:cBhvr>
                                     </p:animEffect>
+                                    <p:audio>
+                                      <p:cMediaNode vol="80000">
+                                        <p:cTn id="1009" display="0">
+                                          <p:stCondLst>
+                                            <p:cond delay="0"/>
+                                          </p:stCondLst>
+                                          <p:endCondLst>
+                                            <p:cond evt="onStopAudio" delay="0">
+                                              <p:tgtEl>
+                                                <p:sldTgt/>
+                                              </p:tgtEl>
+                                            </p:cond>
+                                          </p:endCondLst>
+                                        </p:cTn>
+                                        <p:tgtEl>
+                                          <p:sndTgt r:embed="rIdSnd3" name="tick.wav"/>
+                                        </p:tgtEl>
+                                      </p:cMediaNode>
+                                    </p:audio>
                                   </p:childTnLst>
                                 </p:cTn>
                               </p:par>
@@ -7111,6 +7700,25 @@
                                         </p:tgtEl>
                                       </p:cBhvr>
                                     </p:animEffect>
+                                    <p:audio>
+                                      <p:cMediaNode vol="80000">
+                                        <p:cTn id="1010" display="0">
+                                          <p:stCondLst>
+                                            <p:cond delay="0"/>
+                                          </p:stCondLst>
+                                          <p:endCondLst>
+                                            <p:cond evt="onStopAudio" delay="0">
+                                              <p:tgtEl>
+                                                <p:sldTgt/>
+                                              </p:tgtEl>
+                                            </p:cond>
+                                          </p:endCondLst>
+                                        </p:cTn>
+                                        <p:tgtEl>
+                                          <p:sndTgt r:embed="rIdSnd4" name="win.wav"/>
+                                        </p:tgtEl>
+                                      </p:cMediaNode>
+                                    </p:audio>
                                   </p:childTnLst>
                                 </p:cTn>
                               </p:par>
@@ -7938,6 +8546,25 @@
                                         </p:tgtEl>
                                       </p:cBhvr>
                                     </p:animEffect>
+                                    <p:audio>
+                                      <p:cMediaNode vol="80000">
+                                        <p:cTn id="1001" display="0">
+                                          <p:stCondLst>
+                                            <p:cond delay="0"/>
+                                          </p:stCondLst>
+                                          <p:endCondLst>
+                                            <p:cond evt="onStopAudio" delay="0">
+                                              <p:tgtEl>
+                                                <p:sldTgt/>
+                                              </p:tgtEl>
+                                            </p:cond>
+                                          </p:endCondLst>
+                                        </p:cTn>
+                                        <p:tgtEl>
+                                          <p:sndTgt r:embed="rIdSnd1" name="pop.wav"/>
+                                        </p:tgtEl>
+                                      </p:cMediaNode>
+                                    </p:audio>
                                   </p:childTnLst>
                                 </p:cTn>
                               </p:par>
@@ -7991,6 +8618,25 @@
                                         </p:tgtEl>
                                       </p:cBhvr>
                                     </p:animEffect>
+                                    <p:audio>
+                                      <p:cMediaNode vol="80000">
+                                        <p:cTn id="1002" display="0">
+                                          <p:stCondLst>
+                                            <p:cond delay="0"/>
+                                          </p:stCondLst>
+                                          <p:endCondLst>
+                                            <p:cond evt="onStopAudio" delay="0">
+                                              <p:tgtEl>
+                                                <p:sldTgt/>
+                                              </p:tgtEl>
+                                            </p:cond>
+                                          </p:endCondLst>
+                                        </p:cTn>
+                                        <p:tgtEl>
+                                          <p:sndTgt r:embed="rIdSnd2" name="ding.wav"/>
+                                        </p:tgtEl>
+                                      </p:cMediaNode>
+                                    </p:audio>
                                   </p:childTnLst>
                                 </p:cTn>
                               </p:par>
@@ -8044,6 +8690,25 @@
                                         </p:tgtEl>
                                       </p:cBhvr>
                                     </p:animEffect>
+                                    <p:audio>
+                                      <p:cMediaNode vol="80000">
+                                        <p:cTn id="1003" display="0">
+                                          <p:stCondLst>
+                                            <p:cond delay="0"/>
+                                          </p:stCondLst>
+                                          <p:endCondLst>
+                                            <p:cond evt="onStopAudio" delay="0">
+                                              <p:tgtEl>
+                                                <p:sldTgt/>
+                                              </p:tgtEl>
+                                            </p:cond>
+                                          </p:endCondLst>
+                                        </p:cTn>
+                                        <p:tgtEl>
+                                          <p:sndTgt r:embed="rIdSnd3" name="tick.wav"/>
+                                        </p:tgtEl>
+                                      </p:cMediaNode>
+                                    </p:audio>
                                   </p:childTnLst>
                                 </p:cTn>
                               </p:par>
@@ -8097,6 +8762,25 @@
                                         </p:tgtEl>
                                       </p:cBhvr>
                                     </p:animEffect>
+                                    <p:audio>
+                                      <p:cMediaNode vol="80000">
+                                        <p:cTn id="1004" display="0">
+                                          <p:stCondLst>
+                                            <p:cond delay="0"/>
+                                          </p:stCondLst>
+                                          <p:endCondLst>
+                                            <p:cond evt="onStopAudio" delay="0">
+                                              <p:tgtEl>
+                                                <p:sldTgt/>
+                                              </p:tgtEl>
+                                            </p:cond>
+                                          </p:endCondLst>
+                                        </p:cTn>
+                                        <p:tgtEl>
+                                          <p:sndTgt r:embed="rIdSnd1" name="pop.wav"/>
+                                        </p:tgtEl>
+                                      </p:cMediaNode>
+                                    </p:audio>
                                   </p:childTnLst>
                                 </p:cTn>
                               </p:par>
@@ -8150,6 +8834,25 @@
                                         </p:tgtEl>
                                       </p:cBhvr>
                                     </p:animEffect>
+                                    <p:audio>
+                                      <p:cMediaNode vol="80000">
+                                        <p:cTn id="1005" display="0">
+                                          <p:stCondLst>
+                                            <p:cond delay="0"/>
+                                          </p:stCondLst>
+                                          <p:endCondLst>
+                                            <p:cond evt="onStopAudio" delay="0">
+                                              <p:tgtEl>
+                                                <p:sldTgt/>
+                                              </p:tgtEl>
+                                            </p:cond>
+                                          </p:endCondLst>
+                                        </p:cTn>
+                                        <p:tgtEl>
+                                          <p:sndTgt r:embed="rIdSnd2" name="ding.wav"/>
+                                        </p:tgtEl>
+                                      </p:cMediaNode>
+                                    </p:audio>
                                   </p:childTnLst>
                                 </p:cTn>
                               </p:par>
@@ -8203,6 +8906,25 @@
                                         </p:tgtEl>
                                       </p:cBhvr>
                                     </p:animEffect>
+                                    <p:audio>
+                                      <p:cMediaNode vol="80000">
+                                        <p:cTn id="1006" display="0">
+                                          <p:stCondLst>
+                                            <p:cond delay="0"/>
+                                          </p:stCondLst>
+                                          <p:endCondLst>
+                                            <p:cond evt="onStopAudio" delay="0">
+                                              <p:tgtEl>
+                                                <p:sldTgt/>
+                                              </p:tgtEl>
+                                            </p:cond>
+                                          </p:endCondLst>
+                                        </p:cTn>
+                                        <p:tgtEl>
+                                          <p:sndTgt r:embed="rIdSnd3" name="tick.wav"/>
+                                        </p:tgtEl>
+                                      </p:cMediaNode>
+                                    </p:audio>
                                   </p:childTnLst>
                                 </p:cTn>
                               </p:par>
@@ -8256,6 +8978,25 @@
                                         </p:tgtEl>
                                       </p:cBhvr>
                                     </p:animEffect>
+                                    <p:audio>
+                                      <p:cMediaNode vol="80000">
+                                        <p:cTn id="1007" display="0">
+                                          <p:stCondLst>
+                                            <p:cond delay="0"/>
+                                          </p:stCondLst>
+                                          <p:endCondLst>
+                                            <p:cond evt="onStopAudio" delay="0">
+                                              <p:tgtEl>
+                                                <p:sldTgt/>
+                                              </p:tgtEl>
+                                            </p:cond>
+                                          </p:endCondLst>
+                                        </p:cTn>
+                                        <p:tgtEl>
+                                          <p:sndTgt r:embed="rIdSnd1" name="pop.wav"/>
+                                        </p:tgtEl>
+                                      </p:cMediaNode>
+                                    </p:audio>
                                   </p:childTnLst>
                                 </p:cTn>
                               </p:par>
@@ -8309,6 +9050,25 @@
                                         </p:tgtEl>
                                       </p:cBhvr>
                                     </p:animEffect>
+                                    <p:audio>
+                                      <p:cMediaNode vol="80000">
+                                        <p:cTn id="1008" display="0">
+                                          <p:stCondLst>
+                                            <p:cond delay="0"/>
+                                          </p:stCondLst>
+                                          <p:endCondLst>
+                                            <p:cond evt="onStopAudio" delay="0">
+                                              <p:tgtEl>
+                                                <p:sldTgt/>
+                                              </p:tgtEl>
+                                            </p:cond>
+                                          </p:endCondLst>
+                                        </p:cTn>
+                                        <p:tgtEl>
+                                          <p:sndTgt r:embed="rIdSnd2" name="ding.wav"/>
+                                        </p:tgtEl>
+                                      </p:cMediaNode>
+                                    </p:audio>
                                   </p:childTnLst>
                                 </p:cTn>
                               </p:par>
@@ -8362,6 +9122,25 @@
                                         </p:tgtEl>
                                       </p:cBhvr>
                                     </p:animEffect>
+                                    <p:audio>
+                                      <p:cMediaNode vol="80000">
+                                        <p:cTn id="1009" display="0">
+                                          <p:stCondLst>
+                                            <p:cond delay="0"/>
+                                          </p:stCondLst>
+                                          <p:endCondLst>
+                                            <p:cond evt="onStopAudio" delay="0">
+                                              <p:tgtEl>
+                                                <p:sldTgt/>
+                                              </p:tgtEl>
+                                            </p:cond>
+                                          </p:endCondLst>
+                                        </p:cTn>
+                                        <p:tgtEl>
+                                          <p:sndTgt r:embed="rIdSnd3" name="tick.wav"/>
+                                        </p:tgtEl>
+                                      </p:cMediaNode>
+                                    </p:audio>
                                   </p:childTnLst>
                                 </p:cTn>
                               </p:par>
@@ -8415,6 +9194,25 @@
                                         </p:tgtEl>
                                       </p:cBhvr>
                                     </p:animEffect>
+                                    <p:audio>
+                                      <p:cMediaNode vol="80000">
+                                        <p:cTn id="1010" display="0">
+                                          <p:stCondLst>
+                                            <p:cond delay="0"/>
+                                          </p:stCondLst>
+                                          <p:endCondLst>
+                                            <p:cond evt="onStopAudio" delay="0">
+                                              <p:tgtEl>
+                                                <p:sldTgt/>
+                                              </p:tgtEl>
+                                            </p:cond>
+                                          </p:endCondLst>
+                                        </p:cTn>
+                                        <p:tgtEl>
+                                          <p:sndTgt r:embed="rIdSnd4" name="win.wav"/>
+                                        </p:tgtEl>
+                                      </p:cMediaNode>
+                                    </p:audio>
                                   </p:childTnLst>
                                 </p:cTn>
                               </p:par>
@@ -9242,6 +10040,25 @@
                                         </p:tgtEl>
                                       </p:cBhvr>
                                     </p:animEffect>
+                                    <p:audio>
+                                      <p:cMediaNode vol="80000">
+                                        <p:cTn id="1001" display="0">
+                                          <p:stCondLst>
+                                            <p:cond delay="0"/>
+                                          </p:stCondLst>
+                                          <p:endCondLst>
+                                            <p:cond evt="onStopAudio" delay="0">
+                                              <p:tgtEl>
+                                                <p:sldTgt/>
+                                              </p:tgtEl>
+                                            </p:cond>
+                                          </p:endCondLst>
+                                        </p:cTn>
+                                        <p:tgtEl>
+                                          <p:sndTgt r:embed="rIdSnd1" name="pop.wav"/>
+                                        </p:tgtEl>
+                                      </p:cMediaNode>
+                                    </p:audio>
                                   </p:childTnLst>
                                 </p:cTn>
                               </p:par>
@@ -9295,6 +10112,25 @@
                                         </p:tgtEl>
                                       </p:cBhvr>
                                     </p:animEffect>
+                                    <p:audio>
+                                      <p:cMediaNode vol="80000">
+                                        <p:cTn id="1002" display="0">
+                                          <p:stCondLst>
+                                            <p:cond delay="0"/>
+                                          </p:stCondLst>
+                                          <p:endCondLst>
+                                            <p:cond evt="onStopAudio" delay="0">
+                                              <p:tgtEl>
+                                                <p:sldTgt/>
+                                              </p:tgtEl>
+                                            </p:cond>
+                                          </p:endCondLst>
+                                        </p:cTn>
+                                        <p:tgtEl>
+                                          <p:sndTgt r:embed="rIdSnd2" name="ding.wav"/>
+                                        </p:tgtEl>
+                                      </p:cMediaNode>
+                                    </p:audio>
                                   </p:childTnLst>
                                 </p:cTn>
                               </p:par>
@@ -9348,6 +10184,25 @@
                                         </p:tgtEl>
                                       </p:cBhvr>
                                     </p:animEffect>
+                                    <p:audio>
+                                      <p:cMediaNode vol="80000">
+                                        <p:cTn id="1003" display="0">
+                                          <p:stCondLst>
+                                            <p:cond delay="0"/>
+                                          </p:stCondLst>
+                                          <p:endCondLst>
+                                            <p:cond evt="onStopAudio" delay="0">
+                                              <p:tgtEl>
+                                                <p:sldTgt/>
+                                              </p:tgtEl>
+                                            </p:cond>
+                                          </p:endCondLst>
+                                        </p:cTn>
+                                        <p:tgtEl>
+                                          <p:sndTgt r:embed="rIdSnd3" name="tick.wav"/>
+                                        </p:tgtEl>
+                                      </p:cMediaNode>
+                                    </p:audio>
                                   </p:childTnLst>
                                 </p:cTn>
                               </p:par>
@@ -9401,6 +10256,25 @@
                                         </p:tgtEl>
                                       </p:cBhvr>
                                     </p:animEffect>
+                                    <p:audio>
+                                      <p:cMediaNode vol="80000">
+                                        <p:cTn id="1004" display="0">
+                                          <p:stCondLst>
+                                            <p:cond delay="0"/>
+                                          </p:stCondLst>
+                                          <p:endCondLst>
+                                            <p:cond evt="onStopAudio" delay="0">
+                                              <p:tgtEl>
+                                                <p:sldTgt/>
+                                              </p:tgtEl>
+                                            </p:cond>
+                                          </p:endCondLst>
+                                        </p:cTn>
+                                        <p:tgtEl>
+                                          <p:sndTgt r:embed="rIdSnd1" name="pop.wav"/>
+                                        </p:tgtEl>
+                                      </p:cMediaNode>
+                                    </p:audio>
                                   </p:childTnLst>
                                 </p:cTn>
                               </p:par>
@@ -9454,6 +10328,25 @@
                                         </p:tgtEl>
                                       </p:cBhvr>
                                     </p:animEffect>
+                                    <p:audio>
+                                      <p:cMediaNode vol="80000">
+                                        <p:cTn id="1005" display="0">
+                                          <p:stCondLst>
+                                            <p:cond delay="0"/>
+                                          </p:stCondLst>
+                                          <p:endCondLst>
+                                            <p:cond evt="onStopAudio" delay="0">
+                                              <p:tgtEl>
+                                                <p:sldTgt/>
+                                              </p:tgtEl>
+                                            </p:cond>
+                                          </p:endCondLst>
+                                        </p:cTn>
+                                        <p:tgtEl>
+                                          <p:sndTgt r:embed="rIdSnd2" name="ding.wav"/>
+                                        </p:tgtEl>
+                                      </p:cMediaNode>
+                                    </p:audio>
                                   </p:childTnLst>
                                 </p:cTn>
                               </p:par>
@@ -9507,6 +10400,25 @@
                                         </p:tgtEl>
                                       </p:cBhvr>
                                     </p:animEffect>
+                                    <p:audio>
+                                      <p:cMediaNode vol="80000">
+                                        <p:cTn id="1006" display="0">
+                                          <p:stCondLst>
+                                            <p:cond delay="0"/>
+                                          </p:stCondLst>
+                                          <p:endCondLst>
+                                            <p:cond evt="onStopAudio" delay="0">
+                                              <p:tgtEl>
+                                                <p:sldTgt/>
+                                              </p:tgtEl>
+                                            </p:cond>
+                                          </p:endCondLst>
+                                        </p:cTn>
+                                        <p:tgtEl>
+                                          <p:sndTgt r:embed="rIdSnd3" name="tick.wav"/>
+                                        </p:tgtEl>
+                                      </p:cMediaNode>
+                                    </p:audio>
                                   </p:childTnLst>
                                 </p:cTn>
                               </p:par>
@@ -9560,6 +10472,25 @@
                                         </p:tgtEl>
                                       </p:cBhvr>
                                     </p:animEffect>
+                                    <p:audio>
+                                      <p:cMediaNode vol="80000">
+                                        <p:cTn id="1007" display="0">
+                                          <p:stCondLst>
+                                            <p:cond delay="0"/>
+                                          </p:stCondLst>
+                                          <p:endCondLst>
+                                            <p:cond evt="onStopAudio" delay="0">
+                                              <p:tgtEl>
+                                                <p:sldTgt/>
+                                              </p:tgtEl>
+                                            </p:cond>
+                                          </p:endCondLst>
+                                        </p:cTn>
+                                        <p:tgtEl>
+                                          <p:sndTgt r:embed="rIdSnd1" name="pop.wav"/>
+                                        </p:tgtEl>
+                                      </p:cMediaNode>
+                                    </p:audio>
                                   </p:childTnLst>
                                 </p:cTn>
                               </p:par>
@@ -9613,6 +10544,25 @@
                                         </p:tgtEl>
                                       </p:cBhvr>
                                     </p:animEffect>
+                                    <p:audio>
+                                      <p:cMediaNode vol="80000">
+                                        <p:cTn id="1008" display="0">
+                                          <p:stCondLst>
+                                            <p:cond delay="0"/>
+                                          </p:stCondLst>
+                                          <p:endCondLst>
+                                            <p:cond evt="onStopAudio" delay="0">
+                                              <p:tgtEl>
+                                                <p:sldTgt/>
+                                              </p:tgtEl>
+                                            </p:cond>
+                                          </p:endCondLst>
+                                        </p:cTn>
+                                        <p:tgtEl>
+                                          <p:sndTgt r:embed="rIdSnd2" name="ding.wav"/>
+                                        </p:tgtEl>
+                                      </p:cMediaNode>
+                                    </p:audio>
                                   </p:childTnLst>
                                 </p:cTn>
                               </p:par>
@@ -9666,6 +10616,25 @@
                                         </p:tgtEl>
                                       </p:cBhvr>
                                     </p:animEffect>
+                                    <p:audio>
+                                      <p:cMediaNode vol="80000">
+                                        <p:cTn id="1009" display="0">
+                                          <p:stCondLst>
+                                            <p:cond delay="0"/>
+                                          </p:stCondLst>
+                                          <p:endCondLst>
+                                            <p:cond evt="onStopAudio" delay="0">
+                                              <p:tgtEl>
+                                                <p:sldTgt/>
+                                              </p:tgtEl>
+                                            </p:cond>
+                                          </p:endCondLst>
+                                        </p:cTn>
+                                        <p:tgtEl>
+                                          <p:sndTgt r:embed="rIdSnd3" name="tick.wav"/>
+                                        </p:tgtEl>
+                                      </p:cMediaNode>
+                                    </p:audio>
                                   </p:childTnLst>
                                 </p:cTn>
                               </p:par>
@@ -9719,6 +10688,25 @@
                                         </p:tgtEl>
                                       </p:cBhvr>
                                     </p:animEffect>
+                                    <p:audio>
+                                      <p:cMediaNode vol="80000">
+                                        <p:cTn id="1010" display="0">
+                                          <p:stCondLst>
+                                            <p:cond delay="0"/>
+                                          </p:stCondLst>
+                                          <p:endCondLst>
+                                            <p:cond evt="onStopAudio" delay="0">
+                                              <p:tgtEl>
+                                                <p:sldTgt/>
+                                              </p:tgtEl>
+                                            </p:cond>
+                                          </p:endCondLst>
+                                        </p:cTn>
+                                        <p:tgtEl>
+                                          <p:sndTgt r:embed="rIdSnd4" name="win.wav"/>
+                                        </p:tgtEl>
+                                      </p:cMediaNode>
+                                    </p:audio>
                                   </p:childTnLst>
                                 </p:cTn>
                               </p:par>
@@ -10546,6 +11534,25 @@
                                         </p:tgtEl>
                                       </p:cBhvr>
                                     </p:animEffect>
+                                    <p:audio>
+                                      <p:cMediaNode vol="80000">
+                                        <p:cTn id="1001" display="0">
+                                          <p:stCondLst>
+                                            <p:cond delay="0"/>
+                                          </p:stCondLst>
+                                          <p:endCondLst>
+                                            <p:cond evt="onStopAudio" delay="0">
+                                              <p:tgtEl>
+                                                <p:sldTgt/>
+                                              </p:tgtEl>
+                                            </p:cond>
+                                          </p:endCondLst>
+                                        </p:cTn>
+                                        <p:tgtEl>
+                                          <p:sndTgt r:embed="rIdSnd1" name="pop.wav"/>
+                                        </p:tgtEl>
+                                      </p:cMediaNode>
+                                    </p:audio>
                                   </p:childTnLst>
                                 </p:cTn>
                               </p:par>
@@ -10599,6 +11606,25 @@
                                         </p:tgtEl>
                                       </p:cBhvr>
                                     </p:animEffect>
+                                    <p:audio>
+                                      <p:cMediaNode vol="80000">
+                                        <p:cTn id="1002" display="0">
+                                          <p:stCondLst>
+                                            <p:cond delay="0"/>
+                                          </p:stCondLst>
+                                          <p:endCondLst>
+                                            <p:cond evt="onStopAudio" delay="0">
+                                              <p:tgtEl>
+                                                <p:sldTgt/>
+                                              </p:tgtEl>
+                                            </p:cond>
+                                          </p:endCondLst>
+                                        </p:cTn>
+                                        <p:tgtEl>
+                                          <p:sndTgt r:embed="rIdSnd2" name="ding.wav"/>
+                                        </p:tgtEl>
+                                      </p:cMediaNode>
+                                    </p:audio>
                                   </p:childTnLst>
                                 </p:cTn>
                               </p:par>
@@ -10652,6 +11678,25 @@
                                         </p:tgtEl>
                                       </p:cBhvr>
                                     </p:animEffect>
+                                    <p:audio>
+                                      <p:cMediaNode vol="80000">
+                                        <p:cTn id="1003" display="0">
+                                          <p:stCondLst>
+                                            <p:cond delay="0"/>
+                                          </p:stCondLst>
+                                          <p:endCondLst>
+                                            <p:cond evt="onStopAudio" delay="0">
+                                              <p:tgtEl>
+                                                <p:sldTgt/>
+                                              </p:tgtEl>
+                                            </p:cond>
+                                          </p:endCondLst>
+                                        </p:cTn>
+                                        <p:tgtEl>
+                                          <p:sndTgt r:embed="rIdSnd3" name="tick.wav"/>
+                                        </p:tgtEl>
+                                      </p:cMediaNode>
+                                    </p:audio>
                                   </p:childTnLst>
                                 </p:cTn>
                               </p:par>
@@ -10705,6 +11750,25 @@
                                         </p:tgtEl>
                                       </p:cBhvr>
                                     </p:animEffect>
+                                    <p:audio>
+                                      <p:cMediaNode vol="80000">
+                                        <p:cTn id="1004" display="0">
+                                          <p:stCondLst>
+                                            <p:cond delay="0"/>
+                                          </p:stCondLst>
+                                          <p:endCondLst>
+                                            <p:cond evt="onStopAudio" delay="0">
+                                              <p:tgtEl>
+                                                <p:sldTgt/>
+                                              </p:tgtEl>
+                                            </p:cond>
+                                          </p:endCondLst>
+                                        </p:cTn>
+                                        <p:tgtEl>
+                                          <p:sndTgt r:embed="rIdSnd1" name="pop.wav"/>
+                                        </p:tgtEl>
+                                      </p:cMediaNode>
+                                    </p:audio>
                                   </p:childTnLst>
                                 </p:cTn>
                               </p:par>
@@ -10758,6 +11822,25 @@
                                         </p:tgtEl>
                                       </p:cBhvr>
                                     </p:animEffect>
+                                    <p:audio>
+                                      <p:cMediaNode vol="80000">
+                                        <p:cTn id="1005" display="0">
+                                          <p:stCondLst>
+                                            <p:cond delay="0"/>
+                                          </p:stCondLst>
+                                          <p:endCondLst>
+                                            <p:cond evt="onStopAudio" delay="0">
+                                              <p:tgtEl>
+                                                <p:sldTgt/>
+                                              </p:tgtEl>
+                                            </p:cond>
+                                          </p:endCondLst>
+                                        </p:cTn>
+                                        <p:tgtEl>
+                                          <p:sndTgt r:embed="rIdSnd2" name="ding.wav"/>
+                                        </p:tgtEl>
+                                      </p:cMediaNode>
+                                    </p:audio>
                                   </p:childTnLst>
                                 </p:cTn>
                               </p:par>
@@ -10811,6 +11894,25 @@
                                         </p:tgtEl>
                                       </p:cBhvr>
                                     </p:animEffect>
+                                    <p:audio>
+                                      <p:cMediaNode vol="80000">
+                                        <p:cTn id="1006" display="0">
+                                          <p:stCondLst>
+                                            <p:cond delay="0"/>
+                                          </p:stCondLst>
+                                          <p:endCondLst>
+                                            <p:cond evt="onStopAudio" delay="0">
+                                              <p:tgtEl>
+                                                <p:sldTgt/>
+                                              </p:tgtEl>
+                                            </p:cond>
+                                          </p:endCondLst>
+                                        </p:cTn>
+                                        <p:tgtEl>
+                                          <p:sndTgt r:embed="rIdSnd3" name="tick.wav"/>
+                                        </p:tgtEl>
+                                      </p:cMediaNode>
+                                    </p:audio>
                                   </p:childTnLst>
                                 </p:cTn>
                               </p:par>
@@ -10864,6 +11966,25 @@
                                         </p:tgtEl>
                                       </p:cBhvr>
                                     </p:animEffect>
+                                    <p:audio>
+                                      <p:cMediaNode vol="80000">
+                                        <p:cTn id="1007" display="0">
+                                          <p:stCondLst>
+                                            <p:cond delay="0"/>
+                                          </p:stCondLst>
+                                          <p:endCondLst>
+                                            <p:cond evt="onStopAudio" delay="0">
+                                              <p:tgtEl>
+                                                <p:sldTgt/>
+                                              </p:tgtEl>
+                                            </p:cond>
+                                          </p:endCondLst>
+                                        </p:cTn>
+                                        <p:tgtEl>
+                                          <p:sndTgt r:embed="rIdSnd1" name="pop.wav"/>
+                                        </p:tgtEl>
+                                      </p:cMediaNode>
+                                    </p:audio>
                                   </p:childTnLst>
                                 </p:cTn>
                               </p:par>
@@ -10917,6 +12038,25 @@
                                         </p:tgtEl>
                                       </p:cBhvr>
                                     </p:animEffect>
+                                    <p:audio>
+                                      <p:cMediaNode vol="80000">
+                                        <p:cTn id="1008" display="0">
+                                          <p:stCondLst>
+                                            <p:cond delay="0"/>
+                                          </p:stCondLst>
+                                          <p:endCondLst>
+                                            <p:cond evt="onStopAudio" delay="0">
+                                              <p:tgtEl>
+                                                <p:sldTgt/>
+                                              </p:tgtEl>
+                                            </p:cond>
+                                          </p:endCondLst>
+                                        </p:cTn>
+                                        <p:tgtEl>
+                                          <p:sndTgt r:embed="rIdSnd2" name="ding.wav"/>
+                                        </p:tgtEl>
+                                      </p:cMediaNode>
+                                    </p:audio>
                                   </p:childTnLst>
                                 </p:cTn>
                               </p:par>
@@ -10970,6 +12110,25 @@
                                         </p:tgtEl>
                                       </p:cBhvr>
                                     </p:animEffect>
+                                    <p:audio>
+                                      <p:cMediaNode vol="80000">
+                                        <p:cTn id="1009" display="0">
+                                          <p:stCondLst>
+                                            <p:cond delay="0"/>
+                                          </p:stCondLst>
+                                          <p:endCondLst>
+                                            <p:cond evt="onStopAudio" delay="0">
+                                              <p:tgtEl>
+                                                <p:sldTgt/>
+                                              </p:tgtEl>
+                                            </p:cond>
+                                          </p:endCondLst>
+                                        </p:cTn>
+                                        <p:tgtEl>
+                                          <p:sndTgt r:embed="rIdSnd3" name="tick.wav"/>
+                                        </p:tgtEl>
+                                      </p:cMediaNode>
+                                    </p:audio>
                                   </p:childTnLst>
                                 </p:cTn>
                               </p:par>
@@ -11023,6 +12182,25 @@
                                         </p:tgtEl>
                                       </p:cBhvr>
                                     </p:animEffect>
+                                    <p:audio>
+                                      <p:cMediaNode vol="80000">
+                                        <p:cTn id="1010" display="0">
+                                          <p:stCondLst>
+                                            <p:cond delay="0"/>
+                                          </p:stCondLst>
+                                          <p:endCondLst>
+                                            <p:cond evt="onStopAudio" delay="0">
+                                              <p:tgtEl>
+                                                <p:sldTgt/>
+                                              </p:tgtEl>
+                                            </p:cond>
+                                          </p:endCondLst>
+                                        </p:cTn>
+                                        <p:tgtEl>
+                                          <p:sndTgt r:embed="rIdSnd4" name="win.wav"/>
+                                        </p:tgtEl>
+                                      </p:cMediaNode>
+                                    </p:audio>
                                   </p:childTnLst>
                                 </p:cTn>
                               </p:par>
@@ -11722,6 +12900,25 @@
                                         </p:tgtEl>
                                       </p:cBhvr>
                                     </p:animEffect>
+                                    <p:audio>
+                                      <p:cMediaNode vol="80000">
+                                        <p:cTn id="1001" display="0">
+                                          <p:stCondLst>
+                                            <p:cond delay="0"/>
+                                          </p:stCondLst>
+                                          <p:endCondLst>
+                                            <p:cond evt="onStopAudio" delay="0">
+                                              <p:tgtEl>
+                                                <p:sldTgt/>
+                                              </p:tgtEl>
+                                            </p:cond>
+                                          </p:endCondLst>
+                                        </p:cTn>
+                                        <p:tgtEl>
+                                          <p:sndTgt r:embed="rIdSnd1" name="pop.wav"/>
+                                        </p:tgtEl>
+                                      </p:cMediaNode>
+                                    </p:audio>
                                   </p:childTnLst>
                                 </p:cTn>
                               </p:par>
@@ -11775,6 +12972,25 @@
                                         </p:tgtEl>
                                       </p:cBhvr>
                                     </p:animEffect>
+                                    <p:audio>
+                                      <p:cMediaNode vol="80000">
+                                        <p:cTn id="1002" display="0">
+                                          <p:stCondLst>
+                                            <p:cond delay="0"/>
+                                          </p:stCondLst>
+                                          <p:endCondLst>
+                                            <p:cond evt="onStopAudio" delay="0">
+                                              <p:tgtEl>
+                                                <p:sldTgt/>
+                                              </p:tgtEl>
+                                            </p:cond>
+                                          </p:endCondLst>
+                                        </p:cTn>
+                                        <p:tgtEl>
+                                          <p:sndTgt r:embed="rIdSnd2" name="ding.wav"/>
+                                        </p:tgtEl>
+                                      </p:cMediaNode>
+                                    </p:audio>
                                   </p:childTnLst>
                                 </p:cTn>
                               </p:par>
@@ -11828,6 +13044,25 @@
                                         </p:tgtEl>
                                       </p:cBhvr>
                                     </p:animEffect>
+                                    <p:audio>
+                                      <p:cMediaNode vol="80000">
+                                        <p:cTn id="1003" display="0">
+                                          <p:stCondLst>
+                                            <p:cond delay="0"/>
+                                          </p:stCondLst>
+                                          <p:endCondLst>
+                                            <p:cond evt="onStopAudio" delay="0">
+                                              <p:tgtEl>
+                                                <p:sldTgt/>
+                                              </p:tgtEl>
+                                            </p:cond>
+                                          </p:endCondLst>
+                                        </p:cTn>
+                                        <p:tgtEl>
+                                          <p:sndTgt r:embed="rIdSnd3" name="tick.wav"/>
+                                        </p:tgtEl>
+                                      </p:cMediaNode>
+                                    </p:audio>
                                   </p:childTnLst>
                                 </p:cTn>
                               </p:par>
@@ -11881,6 +13116,25 @@
                                         </p:tgtEl>
                                       </p:cBhvr>
                                     </p:animEffect>
+                                    <p:audio>
+                                      <p:cMediaNode vol="80000">
+                                        <p:cTn id="1004" display="0">
+                                          <p:stCondLst>
+                                            <p:cond delay="0"/>
+                                          </p:stCondLst>
+                                          <p:endCondLst>
+                                            <p:cond evt="onStopAudio" delay="0">
+                                              <p:tgtEl>
+                                                <p:sldTgt/>
+                                              </p:tgtEl>
+                                            </p:cond>
+                                          </p:endCondLst>
+                                        </p:cTn>
+                                        <p:tgtEl>
+                                          <p:sndTgt r:embed="rIdSnd1" name="pop.wav"/>
+                                        </p:tgtEl>
+                                      </p:cMediaNode>
+                                    </p:audio>
                                   </p:childTnLst>
                                 </p:cTn>
                               </p:par>
@@ -11934,6 +13188,25 @@
                                         </p:tgtEl>
                                       </p:cBhvr>
                                     </p:animEffect>
+                                    <p:audio>
+                                      <p:cMediaNode vol="80000">
+                                        <p:cTn id="1005" display="0">
+                                          <p:stCondLst>
+                                            <p:cond delay="0"/>
+                                          </p:stCondLst>
+                                          <p:endCondLst>
+                                            <p:cond evt="onStopAudio" delay="0">
+                                              <p:tgtEl>
+                                                <p:sldTgt/>
+                                              </p:tgtEl>
+                                            </p:cond>
+                                          </p:endCondLst>
+                                        </p:cTn>
+                                        <p:tgtEl>
+                                          <p:sndTgt r:embed="rIdSnd2" name="ding.wav"/>
+                                        </p:tgtEl>
+                                      </p:cMediaNode>
+                                    </p:audio>
                                   </p:childTnLst>
                                 </p:cTn>
                               </p:par>
@@ -11987,6 +13260,25 @@
                                         </p:tgtEl>
                                       </p:cBhvr>
                                     </p:animEffect>
+                                    <p:audio>
+                                      <p:cMediaNode vol="80000">
+                                        <p:cTn id="1006" display="0">
+                                          <p:stCondLst>
+                                            <p:cond delay="0"/>
+                                          </p:stCondLst>
+                                          <p:endCondLst>
+                                            <p:cond evt="onStopAudio" delay="0">
+                                              <p:tgtEl>
+                                                <p:sldTgt/>
+                                              </p:tgtEl>
+                                            </p:cond>
+                                          </p:endCondLst>
+                                        </p:cTn>
+                                        <p:tgtEl>
+                                          <p:sndTgt r:embed="rIdSnd3" name="tick.wav"/>
+                                        </p:tgtEl>
+                                      </p:cMediaNode>
+                                    </p:audio>
                                   </p:childTnLst>
                                 </p:cTn>
                               </p:par>
@@ -12040,6 +13332,25 @@
                                         </p:tgtEl>
                                       </p:cBhvr>
                                     </p:animEffect>
+                                    <p:audio>
+                                      <p:cMediaNode vol="80000">
+                                        <p:cTn id="1007" display="0">
+                                          <p:stCondLst>
+                                            <p:cond delay="0"/>
+                                          </p:stCondLst>
+                                          <p:endCondLst>
+                                            <p:cond evt="onStopAudio" delay="0">
+                                              <p:tgtEl>
+                                                <p:sldTgt/>
+                                              </p:tgtEl>
+                                            </p:cond>
+                                          </p:endCondLst>
+                                        </p:cTn>
+                                        <p:tgtEl>
+                                          <p:sndTgt r:embed="rIdSnd4" name="win.wav"/>
+                                        </p:tgtEl>
+                                      </p:cMediaNode>
+                                    </p:audio>
                                   </p:childTnLst>
                                 </p:cTn>
                               </p:par>
@@ -12736,6 +14047,25 @@
                                         </p:tgtEl>
                                       </p:cBhvr>
                                     </p:animEffect>
+                                    <p:audio>
+                                      <p:cMediaNode vol="80000">
+                                        <p:cTn id="1001" display="0">
+                                          <p:stCondLst>
+                                            <p:cond delay="0"/>
+                                          </p:stCondLst>
+                                          <p:endCondLst>
+                                            <p:cond evt="onStopAudio" delay="0">
+                                              <p:tgtEl>
+                                                <p:sldTgt/>
+                                              </p:tgtEl>
+                                            </p:cond>
+                                          </p:endCondLst>
+                                        </p:cTn>
+                                        <p:tgtEl>
+                                          <p:sndTgt r:embed="rIdSnd1" name="pop.wav"/>
+                                        </p:tgtEl>
+                                      </p:cMediaNode>
+                                    </p:audio>
                                   </p:childTnLst>
                                 </p:cTn>
                               </p:par>
@@ -12789,6 +14119,25 @@
                                         </p:tgtEl>
                                       </p:cBhvr>
                                     </p:animEffect>
+                                    <p:audio>
+                                      <p:cMediaNode vol="80000">
+                                        <p:cTn id="1002" display="0">
+                                          <p:stCondLst>
+                                            <p:cond delay="0"/>
+                                          </p:stCondLst>
+                                          <p:endCondLst>
+                                            <p:cond evt="onStopAudio" delay="0">
+                                              <p:tgtEl>
+                                                <p:sldTgt/>
+                                              </p:tgtEl>
+                                            </p:cond>
+                                          </p:endCondLst>
+                                        </p:cTn>
+                                        <p:tgtEl>
+                                          <p:sndTgt r:embed="rIdSnd2" name="ding.wav"/>
+                                        </p:tgtEl>
+                                      </p:cMediaNode>
+                                    </p:audio>
                                   </p:childTnLst>
                                 </p:cTn>
                               </p:par>
@@ -12842,6 +14191,25 @@
                                         </p:tgtEl>
                                       </p:cBhvr>
                                     </p:animEffect>
+                                    <p:audio>
+                                      <p:cMediaNode vol="80000">
+                                        <p:cTn id="1003" display="0">
+                                          <p:stCondLst>
+                                            <p:cond delay="0"/>
+                                          </p:stCondLst>
+                                          <p:endCondLst>
+                                            <p:cond evt="onStopAudio" delay="0">
+                                              <p:tgtEl>
+                                                <p:sldTgt/>
+                                              </p:tgtEl>
+                                            </p:cond>
+                                          </p:endCondLst>
+                                        </p:cTn>
+                                        <p:tgtEl>
+                                          <p:sndTgt r:embed="rIdSnd3" name="tick.wav"/>
+                                        </p:tgtEl>
+                                      </p:cMediaNode>
+                                    </p:audio>
                                   </p:childTnLst>
                                 </p:cTn>
                               </p:par>
@@ -12895,6 +14263,25 @@
                                         </p:tgtEl>
                                       </p:cBhvr>
                                     </p:animEffect>
+                                    <p:audio>
+                                      <p:cMediaNode vol="80000">
+                                        <p:cTn id="1004" display="0">
+                                          <p:stCondLst>
+                                            <p:cond delay="0"/>
+                                          </p:stCondLst>
+                                          <p:endCondLst>
+                                            <p:cond evt="onStopAudio" delay="0">
+                                              <p:tgtEl>
+                                                <p:sldTgt/>
+                                              </p:tgtEl>
+                                            </p:cond>
+                                          </p:endCondLst>
+                                        </p:cTn>
+                                        <p:tgtEl>
+                                          <p:sndTgt r:embed="rIdSnd1" name="pop.wav"/>
+                                        </p:tgtEl>
+                                      </p:cMediaNode>
+                                    </p:audio>
                                   </p:childTnLst>
                                 </p:cTn>
                               </p:par>
@@ -12948,6 +14335,25 @@
                                         </p:tgtEl>
                                       </p:cBhvr>
                                     </p:animEffect>
+                                    <p:audio>
+                                      <p:cMediaNode vol="80000">
+                                        <p:cTn id="1005" display="0">
+                                          <p:stCondLst>
+                                            <p:cond delay="0"/>
+                                          </p:stCondLst>
+                                          <p:endCondLst>
+                                            <p:cond evt="onStopAudio" delay="0">
+                                              <p:tgtEl>
+                                                <p:sldTgt/>
+                                              </p:tgtEl>
+                                            </p:cond>
+                                          </p:endCondLst>
+                                        </p:cTn>
+                                        <p:tgtEl>
+                                          <p:sndTgt r:embed="rIdSnd2" name="ding.wav"/>
+                                        </p:tgtEl>
+                                      </p:cMediaNode>
+                                    </p:audio>
                                   </p:childTnLst>
                                 </p:cTn>
                               </p:par>
@@ -13001,6 +14407,25 @@
                                         </p:tgtEl>
                                       </p:cBhvr>
                                     </p:animEffect>
+                                    <p:audio>
+                                      <p:cMediaNode vol="80000">
+                                        <p:cTn id="1006" display="0">
+                                          <p:stCondLst>
+                                            <p:cond delay="0"/>
+                                          </p:stCondLst>
+                                          <p:endCondLst>
+                                            <p:cond evt="onStopAudio" delay="0">
+                                              <p:tgtEl>
+                                                <p:sldTgt/>
+                                              </p:tgtEl>
+                                            </p:cond>
+                                          </p:endCondLst>
+                                        </p:cTn>
+                                        <p:tgtEl>
+                                          <p:sndTgt r:embed="rIdSnd3" name="tick.wav"/>
+                                        </p:tgtEl>
+                                      </p:cMediaNode>
+                                    </p:audio>
                                   </p:childTnLst>
                                 </p:cTn>
                               </p:par>
@@ -13054,6 +14479,25 @@
                                         </p:tgtEl>
                                       </p:cBhvr>
                                     </p:animEffect>
+                                    <p:audio>
+                                      <p:cMediaNode vol="80000">
+                                        <p:cTn id="1007" display="0">
+                                          <p:stCondLst>
+                                            <p:cond delay="0"/>
+                                          </p:stCondLst>
+                                          <p:endCondLst>
+                                            <p:cond evt="onStopAudio" delay="0">
+                                              <p:tgtEl>
+                                                <p:sldTgt/>
+                                              </p:tgtEl>
+                                            </p:cond>
+                                          </p:endCondLst>
+                                        </p:cTn>
+                                        <p:tgtEl>
+                                          <p:sndTgt r:embed="rIdSnd4" name="win.wav"/>
+                                        </p:tgtEl>
+                                      </p:cMediaNode>
+                                    </p:audio>
                                   </p:childTnLst>
                                 </p:cTn>
                               </p:par>
@@ -13750,6 +15194,25 @@
                                         </p:tgtEl>
                                       </p:cBhvr>
                                     </p:animEffect>
+                                    <p:audio>
+                                      <p:cMediaNode vol="80000">
+                                        <p:cTn id="1001" display="0">
+                                          <p:stCondLst>
+                                            <p:cond delay="0"/>
+                                          </p:stCondLst>
+                                          <p:endCondLst>
+                                            <p:cond evt="onStopAudio" delay="0">
+                                              <p:tgtEl>
+                                                <p:sldTgt/>
+                                              </p:tgtEl>
+                                            </p:cond>
+                                          </p:endCondLst>
+                                        </p:cTn>
+                                        <p:tgtEl>
+                                          <p:sndTgt r:embed="rIdSnd1" name="pop.wav"/>
+                                        </p:tgtEl>
+                                      </p:cMediaNode>
+                                    </p:audio>
                                   </p:childTnLst>
                                 </p:cTn>
                               </p:par>
@@ -13803,6 +15266,25 @@
                                         </p:tgtEl>
                                       </p:cBhvr>
                                     </p:animEffect>
+                                    <p:audio>
+                                      <p:cMediaNode vol="80000">
+                                        <p:cTn id="1002" display="0">
+                                          <p:stCondLst>
+                                            <p:cond delay="0"/>
+                                          </p:stCondLst>
+                                          <p:endCondLst>
+                                            <p:cond evt="onStopAudio" delay="0">
+                                              <p:tgtEl>
+                                                <p:sldTgt/>
+                                              </p:tgtEl>
+                                            </p:cond>
+                                          </p:endCondLst>
+                                        </p:cTn>
+                                        <p:tgtEl>
+                                          <p:sndTgt r:embed="rIdSnd2" name="ding.wav"/>
+                                        </p:tgtEl>
+                                      </p:cMediaNode>
+                                    </p:audio>
                                   </p:childTnLst>
                                 </p:cTn>
                               </p:par>
@@ -13856,6 +15338,25 @@
                                         </p:tgtEl>
                                       </p:cBhvr>
                                     </p:animEffect>
+                                    <p:audio>
+                                      <p:cMediaNode vol="80000">
+                                        <p:cTn id="1003" display="0">
+                                          <p:stCondLst>
+                                            <p:cond delay="0"/>
+                                          </p:stCondLst>
+                                          <p:endCondLst>
+                                            <p:cond evt="onStopAudio" delay="0">
+                                              <p:tgtEl>
+                                                <p:sldTgt/>
+                                              </p:tgtEl>
+                                            </p:cond>
+                                          </p:endCondLst>
+                                        </p:cTn>
+                                        <p:tgtEl>
+                                          <p:sndTgt r:embed="rIdSnd3" name="tick.wav"/>
+                                        </p:tgtEl>
+                                      </p:cMediaNode>
+                                    </p:audio>
                                   </p:childTnLst>
                                 </p:cTn>
                               </p:par>
@@ -13909,6 +15410,25 @@
                                         </p:tgtEl>
                                       </p:cBhvr>
                                     </p:animEffect>
+                                    <p:audio>
+                                      <p:cMediaNode vol="80000">
+                                        <p:cTn id="1004" display="0">
+                                          <p:stCondLst>
+                                            <p:cond delay="0"/>
+                                          </p:stCondLst>
+                                          <p:endCondLst>
+                                            <p:cond evt="onStopAudio" delay="0">
+                                              <p:tgtEl>
+                                                <p:sldTgt/>
+                                              </p:tgtEl>
+                                            </p:cond>
+                                          </p:endCondLst>
+                                        </p:cTn>
+                                        <p:tgtEl>
+                                          <p:sndTgt r:embed="rIdSnd1" name="pop.wav"/>
+                                        </p:tgtEl>
+                                      </p:cMediaNode>
+                                    </p:audio>
                                   </p:childTnLst>
                                 </p:cTn>
                               </p:par>
@@ -13962,6 +15482,25 @@
                                         </p:tgtEl>
                                       </p:cBhvr>
                                     </p:animEffect>
+                                    <p:audio>
+                                      <p:cMediaNode vol="80000">
+                                        <p:cTn id="1005" display="0">
+                                          <p:stCondLst>
+                                            <p:cond delay="0"/>
+                                          </p:stCondLst>
+                                          <p:endCondLst>
+                                            <p:cond evt="onStopAudio" delay="0">
+                                              <p:tgtEl>
+                                                <p:sldTgt/>
+                                              </p:tgtEl>
+                                            </p:cond>
+                                          </p:endCondLst>
+                                        </p:cTn>
+                                        <p:tgtEl>
+                                          <p:sndTgt r:embed="rIdSnd2" name="ding.wav"/>
+                                        </p:tgtEl>
+                                      </p:cMediaNode>
+                                    </p:audio>
                                   </p:childTnLst>
                                 </p:cTn>
                               </p:par>
@@ -14015,6 +15554,25 @@
                                         </p:tgtEl>
                                       </p:cBhvr>
                                     </p:animEffect>
+                                    <p:audio>
+                                      <p:cMediaNode vol="80000">
+                                        <p:cTn id="1006" display="0">
+                                          <p:stCondLst>
+                                            <p:cond delay="0"/>
+                                          </p:stCondLst>
+                                          <p:endCondLst>
+                                            <p:cond evt="onStopAudio" delay="0">
+                                              <p:tgtEl>
+                                                <p:sldTgt/>
+                                              </p:tgtEl>
+                                            </p:cond>
+                                          </p:endCondLst>
+                                        </p:cTn>
+                                        <p:tgtEl>
+                                          <p:sndTgt r:embed="rIdSnd3" name="tick.wav"/>
+                                        </p:tgtEl>
+                                      </p:cMediaNode>
+                                    </p:audio>
                                   </p:childTnLst>
                                 </p:cTn>
                               </p:par>
@@ -14068,6 +15626,25 @@
                                         </p:tgtEl>
                                       </p:cBhvr>
                                     </p:animEffect>
+                                    <p:audio>
+                                      <p:cMediaNode vol="80000">
+                                        <p:cTn id="1007" display="0">
+                                          <p:stCondLst>
+                                            <p:cond delay="0"/>
+                                          </p:stCondLst>
+                                          <p:endCondLst>
+                                            <p:cond evt="onStopAudio" delay="0">
+                                              <p:tgtEl>
+                                                <p:sldTgt/>
+                                              </p:tgtEl>
+                                            </p:cond>
+                                          </p:endCondLst>
+                                        </p:cTn>
+                                        <p:tgtEl>
+                                          <p:sndTgt r:embed="rIdSnd4" name="win.wav"/>
+                                        </p:tgtEl>
+                                      </p:cMediaNode>
+                                    </p:audio>
                                   </p:childTnLst>
                                 </p:cTn>
                               </p:par>
@@ -14764,6 +16341,25 @@
                                         </p:tgtEl>
                                       </p:cBhvr>
                                     </p:animEffect>
+                                    <p:audio>
+                                      <p:cMediaNode vol="80000">
+                                        <p:cTn id="1001" display="0">
+                                          <p:stCondLst>
+                                            <p:cond delay="0"/>
+                                          </p:stCondLst>
+                                          <p:endCondLst>
+                                            <p:cond evt="onStopAudio" delay="0">
+                                              <p:tgtEl>
+                                                <p:sldTgt/>
+                                              </p:tgtEl>
+                                            </p:cond>
+                                          </p:endCondLst>
+                                        </p:cTn>
+                                        <p:tgtEl>
+                                          <p:sndTgt r:embed="rIdSnd1" name="pop.wav"/>
+                                        </p:tgtEl>
+                                      </p:cMediaNode>
+                                    </p:audio>
                                   </p:childTnLst>
                                 </p:cTn>
                               </p:par>
@@ -14817,6 +16413,25 @@
                                         </p:tgtEl>
                                       </p:cBhvr>
                                     </p:animEffect>
+                                    <p:audio>
+                                      <p:cMediaNode vol="80000">
+                                        <p:cTn id="1002" display="0">
+                                          <p:stCondLst>
+                                            <p:cond delay="0"/>
+                                          </p:stCondLst>
+                                          <p:endCondLst>
+                                            <p:cond evt="onStopAudio" delay="0">
+                                              <p:tgtEl>
+                                                <p:sldTgt/>
+                                              </p:tgtEl>
+                                            </p:cond>
+                                          </p:endCondLst>
+                                        </p:cTn>
+                                        <p:tgtEl>
+                                          <p:sndTgt r:embed="rIdSnd2" name="ding.wav"/>
+                                        </p:tgtEl>
+                                      </p:cMediaNode>
+                                    </p:audio>
                                   </p:childTnLst>
                                 </p:cTn>
                               </p:par>
@@ -14870,6 +16485,25 @@
                                         </p:tgtEl>
                                       </p:cBhvr>
                                     </p:animEffect>
+                                    <p:audio>
+                                      <p:cMediaNode vol="80000">
+                                        <p:cTn id="1003" display="0">
+                                          <p:stCondLst>
+                                            <p:cond delay="0"/>
+                                          </p:stCondLst>
+                                          <p:endCondLst>
+                                            <p:cond evt="onStopAudio" delay="0">
+                                              <p:tgtEl>
+                                                <p:sldTgt/>
+                                              </p:tgtEl>
+                                            </p:cond>
+                                          </p:endCondLst>
+                                        </p:cTn>
+                                        <p:tgtEl>
+                                          <p:sndTgt r:embed="rIdSnd3" name="tick.wav"/>
+                                        </p:tgtEl>
+                                      </p:cMediaNode>
+                                    </p:audio>
                                   </p:childTnLst>
                                 </p:cTn>
                               </p:par>
@@ -14923,6 +16557,25 @@
                                         </p:tgtEl>
                                       </p:cBhvr>
                                     </p:animEffect>
+                                    <p:audio>
+                                      <p:cMediaNode vol="80000">
+                                        <p:cTn id="1004" display="0">
+                                          <p:stCondLst>
+                                            <p:cond delay="0"/>
+                                          </p:stCondLst>
+                                          <p:endCondLst>
+                                            <p:cond evt="onStopAudio" delay="0">
+                                              <p:tgtEl>
+                                                <p:sldTgt/>
+                                              </p:tgtEl>
+                                            </p:cond>
+                                          </p:endCondLst>
+                                        </p:cTn>
+                                        <p:tgtEl>
+                                          <p:sndTgt r:embed="rIdSnd1" name="pop.wav"/>
+                                        </p:tgtEl>
+                                      </p:cMediaNode>
+                                    </p:audio>
                                   </p:childTnLst>
                                 </p:cTn>
                               </p:par>
@@ -14976,6 +16629,25 @@
                                         </p:tgtEl>
                                       </p:cBhvr>
                                     </p:animEffect>
+                                    <p:audio>
+                                      <p:cMediaNode vol="80000">
+                                        <p:cTn id="1005" display="0">
+                                          <p:stCondLst>
+                                            <p:cond delay="0"/>
+                                          </p:stCondLst>
+                                          <p:endCondLst>
+                                            <p:cond evt="onStopAudio" delay="0">
+                                              <p:tgtEl>
+                                                <p:sldTgt/>
+                                              </p:tgtEl>
+                                            </p:cond>
+                                          </p:endCondLst>
+                                        </p:cTn>
+                                        <p:tgtEl>
+                                          <p:sndTgt r:embed="rIdSnd2" name="ding.wav"/>
+                                        </p:tgtEl>
+                                      </p:cMediaNode>
+                                    </p:audio>
                                   </p:childTnLst>
                                 </p:cTn>
                               </p:par>
@@ -15029,6 +16701,25 @@
                                         </p:tgtEl>
                                       </p:cBhvr>
                                     </p:animEffect>
+                                    <p:audio>
+                                      <p:cMediaNode vol="80000">
+                                        <p:cTn id="1006" display="0">
+                                          <p:stCondLst>
+                                            <p:cond delay="0"/>
+                                          </p:stCondLst>
+                                          <p:endCondLst>
+                                            <p:cond evt="onStopAudio" delay="0">
+                                              <p:tgtEl>
+                                                <p:sldTgt/>
+                                              </p:tgtEl>
+                                            </p:cond>
+                                          </p:endCondLst>
+                                        </p:cTn>
+                                        <p:tgtEl>
+                                          <p:sndTgt r:embed="rIdSnd3" name="tick.wav"/>
+                                        </p:tgtEl>
+                                      </p:cMediaNode>
+                                    </p:audio>
                                   </p:childTnLst>
                                 </p:cTn>
                               </p:par>
@@ -15082,6 +16773,25 @@
                                         </p:tgtEl>
                                       </p:cBhvr>
                                     </p:animEffect>
+                                    <p:audio>
+                                      <p:cMediaNode vol="80000">
+                                        <p:cTn id="1007" display="0">
+                                          <p:stCondLst>
+                                            <p:cond delay="0"/>
+                                          </p:stCondLst>
+                                          <p:endCondLst>
+                                            <p:cond evt="onStopAudio" delay="0">
+                                              <p:tgtEl>
+                                                <p:sldTgt/>
+                                              </p:tgtEl>
+                                            </p:cond>
+                                          </p:endCondLst>
+                                        </p:cTn>
+                                        <p:tgtEl>
+                                          <p:sndTgt r:embed="rIdSnd4" name="win.wav"/>
+                                        </p:tgtEl>
+                                      </p:cMediaNode>
+                                    </p:audio>
                                   </p:childTnLst>
                                 </p:cTn>
                               </p:par>
@@ -15778,6 +17488,25 @@
                                         </p:tgtEl>
                                       </p:cBhvr>
                                     </p:animEffect>
+                                    <p:audio>
+                                      <p:cMediaNode vol="80000">
+                                        <p:cTn id="1001" display="0">
+                                          <p:stCondLst>
+                                            <p:cond delay="0"/>
+                                          </p:stCondLst>
+                                          <p:endCondLst>
+                                            <p:cond evt="onStopAudio" delay="0">
+                                              <p:tgtEl>
+                                                <p:sldTgt/>
+                                              </p:tgtEl>
+                                            </p:cond>
+                                          </p:endCondLst>
+                                        </p:cTn>
+                                        <p:tgtEl>
+                                          <p:sndTgt r:embed="rIdSnd1" name="pop.wav"/>
+                                        </p:tgtEl>
+                                      </p:cMediaNode>
+                                    </p:audio>
                                   </p:childTnLst>
                                 </p:cTn>
                               </p:par>
@@ -15831,6 +17560,25 @@
                                         </p:tgtEl>
                                       </p:cBhvr>
                                     </p:animEffect>
+                                    <p:audio>
+                                      <p:cMediaNode vol="80000">
+                                        <p:cTn id="1002" display="0">
+                                          <p:stCondLst>
+                                            <p:cond delay="0"/>
+                                          </p:stCondLst>
+                                          <p:endCondLst>
+                                            <p:cond evt="onStopAudio" delay="0">
+                                              <p:tgtEl>
+                                                <p:sldTgt/>
+                                              </p:tgtEl>
+                                            </p:cond>
+                                          </p:endCondLst>
+                                        </p:cTn>
+                                        <p:tgtEl>
+                                          <p:sndTgt r:embed="rIdSnd2" name="ding.wav"/>
+                                        </p:tgtEl>
+                                      </p:cMediaNode>
+                                    </p:audio>
                                   </p:childTnLst>
                                 </p:cTn>
                               </p:par>
@@ -15884,6 +17632,25 @@
                                         </p:tgtEl>
                                       </p:cBhvr>
                                     </p:animEffect>
+                                    <p:audio>
+                                      <p:cMediaNode vol="80000">
+                                        <p:cTn id="1003" display="0">
+                                          <p:stCondLst>
+                                            <p:cond delay="0"/>
+                                          </p:stCondLst>
+                                          <p:endCondLst>
+                                            <p:cond evt="onStopAudio" delay="0">
+                                              <p:tgtEl>
+                                                <p:sldTgt/>
+                                              </p:tgtEl>
+                                            </p:cond>
+                                          </p:endCondLst>
+                                        </p:cTn>
+                                        <p:tgtEl>
+                                          <p:sndTgt r:embed="rIdSnd3" name="tick.wav"/>
+                                        </p:tgtEl>
+                                      </p:cMediaNode>
+                                    </p:audio>
                                   </p:childTnLst>
                                 </p:cTn>
                               </p:par>
@@ -15937,6 +17704,25 @@
                                         </p:tgtEl>
                                       </p:cBhvr>
                                     </p:animEffect>
+                                    <p:audio>
+                                      <p:cMediaNode vol="80000">
+                                        <p:cTn id="1004" display="0">
+                                          <p:stCondLst>
+                                            <p:cond delay="0"/>
+                                          </p:stCondLst>
+                                          <p:endCondLst>
+                                            <p:cond evt="onStopAudio" delay="0">
+                                              <p:tgtEl>
+                                                <p:sldTgt/>
+                                              </p:tgtEl>
+                                            </p:cond>
+                                          </p:endCondLst>
+                                        </p:cTn>
+                                        <p:tgtEl>
+                                          <p:sndTgt r:embed="rIdSnd1" name="pop.wav"/>
+                                        </p:tgtEl>
+                                      </p:cMediaNode>
+                                    </p:audio>
                                   </p:childTnLst>
                                 </p:cTn>
                               </p:par>
@@ -15990,6 +17776,25 @@
                                         </p:tgtEl>
                                       </p:cBhvr>
                                     </p:animEffect>
+                                    <p:audio>
+                                      <p:cMediaNode vol="80000">
+                                        <p:cTn id="1005" display="0">
+                                          <p:stCondLst>
+                                            <p:cond delay="0"/>
+                                          </p:stCondLst>
+                                          <p:endCondLst>
+                                            <p:cond evt="onStopAudio" delay="0">
+                                              <p:tgtEl>
+                                                <p:sldTgt/>
+                                              </p:tgtEl>
+                                            </p:cond>
+                                          </p:endCondLst>
+                                        </p:cTn>
+                                        <p:tgtEl>
+                                          <p:sndTgt r:embed="rIdSnd2" name="ding.wav"/>
+                                        </p:tgtEl>
+                                      </p:cMediaNode>
+                                    </p:audio>
                                   </p:childTnLst>
                                 </p:cTn>
                               </p:par>
@@ -16043,6 +17848,25 @@
                                         </p:tgtEl>
                                       </p:cBhvr>
                                     </p:animEffect>
+                                    <p:audio>
+                                      <p:cMediaNode vol="80000">
+                                        <p:cTn id="1006" display="0">
+                                          <p:stCondLst>
+                                            <p:cond delay="0"/>
+                                          </p:stCondLst>
+                                          <p:endCondLst>
+                                            <p:cond evt="onStopAudio" delay="0">
+                                              <p:tgtEl>
+                                                <p:sldTgt/>
+                                              </p:tgtEl>
+                                            </p:cond>
+                                          </p:endCondLst>
+                                        </p:cTn>
+                                        <p:tgtEl>
+                                          <p:sndTgt r:embed="rIdSnd3" name="tick.wav"/>
+                                        </p:tgtEl>
+                                      </p:cMediaNode>
+                                    </p:audio>
                                   </p:childTnLst>
                                 </p:cTn>
                               </p:par>
@@ -16096,6 +17920,25 @@
                                         </p:tgtEl>
                                       </p:cBhvr>
                                     </p:animEffect>
+                                    <p:audio>
+                                      <p:cMediaNode vol="80000">
+                                        <p:cTn id="1007" display="0">
+                                          <p:stCondLst>
+                                            <p:cond delay="0"/>
+                                          </p:stCondLst>
+                                          <p:endCondLst>
+                                            <p:cond evt="onStopAudio" delay="0">
+                                              <p:tgtEl>
+                                                <p:sldTgt/>
+                                              </p:tgtEl>
+                                            </p:cond>
+                                          </p:endCondLst>
+                                        </p:cTn>
+                                        <p:tgtEl>
+                                          <p:sndTgt r:embed="rIdSnd4" name="win.wav"/>
+                                        </p:tgtEl>
+                                      </p:cMediaNode>
+                                    </p:audio>
                                   </p:childTnLst>
                                 </p:cTn>
                               </p:par>
@@ -16792,6 +18635,25 @@
                                         </p:tgtEl>
                                       </p:cBhvr>
                                     </p:animEffect>
+                                    <p:audio>
+                                      <p:cMediaNode vol="80000">
+                                        <p:cTn id="1001" display="0">
+                                          <p:stCondLst>
+                                            <p:cond delay="0"/>
+                                          </p:stCondLst>
+                                          <p:endCondLst>
+                                            <p:cond evt="onStopAudio" delay="0">
+                                              <p:tgtEl>
+                                                <p:sldTgt/>
+                                              </p:tgtEl>
+                                            </p:cond>
+                                          </p:endCondLst>
+                                        </p:cTn>
+                                        <p:tgtEl>
+                                          <p:sndTgt r:embed="rIdSnd1" name="pop.wav"/>
+                                        </p:tgtEl>
+                                      </p:cMediaNode>
+                                    </p:audio>
                                   </p:childTnLst>
                                 </p:cTn>
                               </p:par>
@@ -16845,6 +18707,25 @@
                                         </p:tgtEl>
                                       </p:cBhvr>
                                     </p:animEffect>
+                                    <p:audio>
+                                      <p:cMediaNode vol="80000">
+                                        <p:cTn id="1002" display="0">
+                                          <p:stCondLst>
+                                            <p:cond delay="0"/>
+                                          </p:stCondLst>
+                                          <p:endCondLst>
+                                            <p:cond evt="onStopAudio" delay="0">
+                                              <p:tgtEl>
+                                                <p:sldTgt/>
+                                              </p:tgtEl>
+                                            </p:cond>
+                                          </p:endCondLst>
+                                        </p:cTn>
+                                        <p:tgtEl>
+                                          <p:sndTgt r:embed="rIdSnd2" name="ding.wav"/>
+                                        </p:tgtEl>
+                                      </p:cMediaNode>
+                                    </p:audio>
                                   </p:childTnLst>
                                 </p:cTn>
                               </p:par>
@@ -16898,6 +18779,25 @@
                                         </p:tgtEl>
                                       </p:cBhvr>
                                     </p:animEffect>
+                                    <p:audio>
+                                      <p:cMediaNode vol="80000">
+                                        <p:cTn id="1003" display="0">
+                                          <p:stCondLst>
+                                            <p:cond delay="0"/>
+                                          </p:stCondLst>
+                                          <p:endCondLst>
+                                            <p:cond evt="onStopAudio" delay="0">
+                                              <p:tgtEl>
+                                                <p:sldTgt/>
+                                              </p:tgtEl>
+                                            </p:cond>
+                                          </p:endCondLst>
+                                        </p:cTn>
+                                        <p:tgtEl>
+                                          <p:sndTgt r:embed="rIdSnd3" name="tick.wav"/>
+                                        </p:tgtEl>
+                                      </p:cMediaNode>
+                                    </p:audio>
                                   </p:childTnLst>
                                 </p:cTn>
                               </p:par>
@@ -16951,6 +18851,25 @@
                                         </p:tgtEl>
                                       </p:cBhvr>
                                     </p:animEffect>
+                                    <p:audio>
+                                      <p:cMediaNode vol="80000">
+                                        <p:cTn id="1004" display="0">
+                                          <p:stCondLst>
+                                            <p:cond delay="0"/>
+                                          </p:stCondLst>
+                                          <p:endCondLst>
+                                            <p:cond evt="onStopAudio" delay="0">
+                                              <p:tgtEl>
+                                                <p:sldTgt/>
+                                              </p:tgtEl>
+                                            </p:cond>
+                                          </p:endCondLst>
+                                        </p:cTn>
+                                        <p:tgtEl>
+                                          <p:sndTgt r:embed="rIdSnd1" name="pop.wav"/>
+                                        </p:tgtEl>
+                                      </p:cMediaNode>
+                                    </p:audio>
                                   </p:childTnLst>
                                 </p:cTn>
                               </p:par>
@@ -17004,6 +18923,25 @@
                                         </p:tgtEl>
                                       </p:cBhvr>
                                     </p:animEffect>
+                                    <p:audio>
+                                      <p:cMediaNode vol="80000">
+                                        <p:cTn id="1005" display="0">
+                                          <p:stCondLst>
+                                            <p:cond delay="0"/>
+                                          </p:stCondLst>
+                                          <p:endCondLst>
+                                            <p:cond evt="onStopAudio" delay="0">
+                                              <p:tgtEl>
+                                                <p:sldTgt/>
+                                              </p:tgtEl>
+                                            </p:cond>
+                                          </p:endCondLst>
+                                        </p:cTn>
+                                        <p:tgtEl>
+                                          <p:sndTgt r:embed="rIdSnd2" name="ding.wav"/>
+                                        </p:tgtEl>
+                                      </p:cMediaNode>
+                                    </p:audio>
                                   </p:childTnLst>
                                 </p:cTn>
                               </p:par>
@@ -17057,6 +18995,25 @@
                                         </p:tgtEl>
                                       </p:cBhvr>
                                     </p:animEffect>
+                                    <p:audio>
+                                      <p:cMediaNode vol="80000">
+                                        <p:cTn id="1006" display="0">
+                                          <p:stCondLst>
+                                            <p:cond delay="0"/>
+                                          </p:stCondLst>
+                                          <p:endCondLst>
+                                            <p:cond evt="onStopAudio" delay="0">
+                                              <p:tgtEl>
+                                                <p:sldTgt/>
+                                              </p:tgtEl>
+                                            </p:cond>
+                                          </p:endCondLst>
+                                        </p:cTn>
+                                        <p:tgtEl>
+                                          <p:sndTgt r:embed="rIdSnd3" name="tick.wav"/>
+                                        </p:tgtEl>
+                                      </p:cMediaNode>
+                                    </p:audio>
                                   </p:childTnLst>
                                 </p:cTn>
                               </p:par>
@@ -17110,6 +19067,25 @@
                                         </p:tgtEl>
                                       </p:cBhvr>
                                     </p:animEffect>
+                                    <p:audio>
+                                      <p:cMediaNode vol="80000">
+                                        <p:cTn id="1007" display="0">
+                                          <p:stCondLst>
+                                            <p:cond delay="0"/>
+                                          </p:stCondLst>
+                                          <p:endCondLst>
+                                            <p:cond evt="onStopAudio" delay="0">
+                                              <p:tgtEl>
+                                                <p:sldTgt/>
+                                              </p:tgtEl>
+                                            </p:cond>
+                                          </p:endCondLst>
+                                        </p:cTn>
+                                        <p:tgtEl>
+                                          <p:sndTgt r:embed="rIdSnd4" name="win.wav"/>
+                                        </p:tgtEl>
+                                      </p:cMediaNode>
+                                    </p:audio>
                                   </p:childTnLst>
                                 </p:cTn>
                               </p:par>
@@ -17806,6 +19782,25 @@
                                         </p:tgtEl>
                                       </p:cBhvr>
                                     </p:animEffect>
+                                    <p:audio>
+                                      <p:cMediaNode vol="80000">
+                                        <p:cTn id="1001" display="0">
+                                          <p:stCondLst>
+                                            <p:cond delay="0"/>
+                                          </p:stCondLst>
+                                          <p:endCondLst>
+                                            <p:cond evt="onStopAudio" delay="0">
+                                              <p:tgtEl>
+                                                <p:sldTgt/>
+                                              </p:tgtEl>
+                                            </p:cond>
+                                          </p:endCondLst>
+                                        </p:cTn>
+                                        <p:tgtEl>
+                                          <p:sndTgt r:embed="rIdSnd1" name="pop.wav"/>
+                                        </p:tgtEl>
+                                      </p:cMediaNode>
+                                    </p:audio>
                                   </p:childTnLst>
                                 </p:cTn>
                               </p:par>
@@ -17859,6 +19854,25 @@
                                         </p:tgtEl>
                                       </p:cBhvr>
                                     </p:animEffect>
+                                    <p:audio>
+                                      <p:cMediaNode vol="80000">
+                                        <p:cTn id="1002" display="0">
+                                          <p:stCondLst>
+                                            <p:cond delay="0"/>
+                                          </p:stCondLst>
+                                          <p:endCondLst>
+                                            <p:cond evt="onStopAudio" delay="0">
+                                              <p:tgtEl>
+                                                <p:sldTgt/>
+                                              </p:tgtEl>
+                                            </p:cond>
+                                          </p:endCondLst>
+                                        </p:cTn>
+                                        <p:tgtEl>
+                                          <p:sndTgt r:embed="rIdSnd2" name="ding.wav"/>
+                                        </p:tgtEl>
+                                      </p:cMediaNode>
+                                    </p:audio>
                                   </p:childTnLst>
                                 </p:cTn>
                               </p:par>
@@ -17912,6 +19926,25 @@
                                         </p:tgtEl>
                                       </p:cBhvr>
                                     </p:animEffect>
+                                    <p:audio>
+                                      <p:cMediaNode vol="80000">
+                                        <p:cTn id="1003" display="0">
+                                          <p:stCondLst>
+                                            <p:cond delay="0"/>
+                                          </p:stCondLst>
+                                          <p:endCondLst>
+                                            <p:cond evt="onStopAudio" delay="0">
+                                              <p:tgtEl>
+                                                <p:sldTgt/>
+                                              </p:tgtEl>
+                                            </p:cond>
+                                          </p:endCondLst>
+                                        </p:cTn>
+                                        <p:tgtEl>
+                                          <p:sndTgt r:embed="rIdSnd3" name="tick.wav"/>
+                                        </p:tgtEl>
+                                      </p:cMediaNode>
+                                    </p:audio>
                                   </p:childTnLst>
                                 </p:cTn>
                               </p:par>
@@ -17965,6 +19998,25 @@
                                         </p:tgtEl>
                                       </p:cBhvr>
                                     </p:animEffect>
+                                    <p:audio>
+                                      <p:cMediaNode vol="80000">
+                                        <p:cTn id="1004" display="0">
+                                          <p:stCondLst>
+                                            <p:cond delay="0"/>
+                                          </p:stCondLst>
+                                          <p:endCondLst>
+                                            <p:cond evt="onStopAudio" delay="0">
+                                              <p:tgtEl>
+                                                <p:sldTgt/>
+                                              </p:tgtEl>
+                                            </p:cond>
+                                          </p:endCondLst>
+                                        </p:cTn>
+                                        <p:tgtEl>
+                                          <p:sndTgt r:embed="rIdSnd1" name="pop.wav"/>
+                                        </p:tgtEl>
+                                      </p:cMediaNode>
+                                    </p:audio>
                                   </p:childTnLst>
                                 </p:cTn>
                               </p:par>
@@ -18018,6 +20070,25 @@
                                         </p:tgtEl>
                                       </p:cBhvr>
                                     </p:animEffect>
+                                    <p:audio>
+                                      <p:cMediaNode vol="80000">
+                                        <p:cTn id="1005" display="0">
+                                          <p:stCondLst>
+                                            <p:cond delay="0"/>
+                                          </p:stCondLst>
+                                          <p:endCondLst>
+                                            <p:cond evt="onStopAudio" delay="0">
+                                              <p:tgtEl>
+                                                <p:sldTgt/>
+                                              </p:tgtEl>
+                                            </p:cond>
+                                          </p:endCondLst>
+                                        </p:cTn>
+                                        <p:tgtEl>
+                                          <p:sndTgt r:embed="rIdSnd2" name="ding.wav"/>
+                                        </p:tgtEl>
+                                      </p:cMediaNode>
+                                    </p:audio>
                                   </p:childTnLst>
                                 </p:cTn>
                               </p:par>
@@ -18071,6 +20142,25 @@
                                         </p:tgtEl>
                                       </p:cBhvr>
                                     </p:animEffect>
+                                    <p:audio>
+                                      <p:cMediaNode vol="80000">
+                                        <p:cTn id="1006" display="0">
+                                          <p:stCondLst>
+                                            <p:cond delay="0"/>
+                                          </p:stCondLst>
+                                          <p:endCondLst>
+                                            <p:cond evt="onStopAudio" delay="0">
+                                              <p:tgtEl>
+                                                <p:sldTgt/>
+                                              </p:tgtEl>
+                                            </p:cond>
+                                          </p:endCondLst>
+                                        </p:cTn>
+                                        <p:tgtEl>
+                                          <p:sndTgt r:embed="rIdSnd3" name="tick.wav"/>
+                                        </p:tgtEl>
+                                      </p:cMediaNode>
+                                    </p:audio>
                                   </p:childTnLst>
                                 </p:cTn>
                               </p:par>
@@ -18124,6 +20214,25 @@
                                         </p:tgtEl>
                                       </p:cBhvr>
                                     </p:animEffect>
+                                    <p:audio>
+                                      <p:cMediaNode vol="80000">
+                                        <p:cTn id="1007" display="0">
+                                          <p:stCondLst>
+                                            <p:cond delay="0"/>
+                                          </p:stCondLst>
+                                          <p:endCondLst>
+                                            <p:cond evt="onStopAudio" delay="0">
+                                              <p:tgtEl>
+                                                <p:sldTgt/>
+                                              </p:tgtEl>
+                                            </p:cond>
+                                          </p:endCondLst>
+                                        </p:cTn>
+                                        <p:tgtEl>
+                                          <p:sndTgt r:embed="rIdSnd4" name="win.wav"/>
+                                        </p:tgtEl>
+                                      </p:cMediaNode>
+                                    </p:audio>
                                   </p:childTnLst>
                                 </p:cTn>
                               </p:par>
@@ -18820,6 +20929,25 @@
                                         </p:tgtEl>
                                       </p:cBhvr>
                                     </p:animEffect>
+                                    <p:audio>
+                                      <p:cMediaNode vol="80000">
+                                        <p:cTn id="1001" display="0">
+                                          <p:stCondLst>
+                                            <p:cond delay="0"/>
+                                          </p:stCondLst>
+                                          <p:endCondLst>
+                                            <p:cond evt="onStopAudio" delay="0">
+                                              <p:tgtEl>
+                                                <p:sldTgt/>
+                                              </p:tgtEl>
+                                            </p:cond>
+                                          </p:endCondLst>
+                                        </p:cTn>
+                                        <p:tgtEl>
+                                          <p:sndTgt r:embed="rIdSnd1" name="pop.wav"/>
+                                        </p:tgtEl>
+                                      </p:cMediaNode>
+                                    </p:audio>
                                   </p:childTnLst>
                                 </p:cTn>
                               </p:par>
@@ -18873,6 +21001,25 @@
                                         </p:tgtEl>
                                       </p:cBhvr>
                                     </p:animEffect>
+                                    <p:audio>
+                                      <p:cMediaNode vol="80000">
+                                        <p:cTn id="1002" display="0">
+                                          <p:stCondLst>
+                                            <p:cond delay="0"/>
+                                          </p:stCondLst>
+                                          <p:endCondLst>
+                                            <p:cond evt="onStopAudio" delay="0">
+                                              <p:tgtEl>
+                                                <p:sldTgt/>
+                                              </p:tgtEl>
+                                            </p:cond>
+                                          </p:endCondLst>
+                                        </p:cTn>
+                                        <p:tgtEl>
+                                          <p:sndTgt r:embed="rIdSnd2" name="ding.wav"/>
+                                        </p:tgtEl>
+                                      </p:cMediaNode>
+                                    </p:audio>
                                   </p:childTnLst>
                                 </p:cTn>
                               </p:par>
@@ -18926,6 +21073,25 @@
                                         </p:tgtEl>
                                       </p:cBhvr>
                                     </p:animEffect>
+                                    <p:audio>
+                                      <p:cMediaNode vol="80000">
+                                        <p:cTn id="1003" display="0">
+                                          <p:stCondLst>
+                                            <p:cond delay="0"/>
+                                          </p:stCondLst>
+                                          <p:endCondLst>
+                                            <p:cond evt="onStopAudio" delay="0">
+                                              <p:tgtEl>
+                                                <p:sldTgt/>
+                                              </p:tgtEl>
+                                            </p:cond>
+                                          </p:endCondLst>
+                                        </p:cTn>
+                                        <p:tgtEl>
+                                          <p:sndTgt r:embed="rIdSnd3" name="tick.wav"/>
+                                        </p:tgtEl>
+                                      </p:cMediaNode>
+                                    </p:audio>
                                   </p:childTnLst>
                                 </p:cTn>
                               </p:par>
@@ -18979,6 +21145,25 @@
                                         </p:tgtEl>
                                       </p:cBhvr>
                                     </p:animEffect>
+                                    <p:audio>
+                                      <p:cMediaNode vol="80000">
+                                        <p:cTn id="1004" display="0">
+                                          <p:stCondLst>
+                                            <p:cond delay="0"/>
+                                          </p:stCondLst>
+                                          <p:endCondLst>
+                                            <p:cond evt="onStopAudio" delay="0">
+                                              <p:tgtEl>
+                                                <p:sldTgt/>
+                                              </p:tgtEl>
+                                            </p:cond>
+                                          </p:endCondLst>
+                                        </p:cTn>
+                                        <p:tgtEl>
+                                          <p:sndTgt r:embed="rIdSnd1" name="pop.wav"/>
+                                        </p:tgtEl>
+                                      </p:cMediaNode>
+                                    </p:audio>
                                   </p:childTnLst>
                                 </p:cTn>
                               </p:par>
@@ -19032,6 +21217,25 @@
                                         </p:tgtEl>
                                       </p:cBhvr>
                                     </p:animEffect>
+                                    <p:audio>
+                                      <p:cMediaNode vol="80000">
+                                        <p:cTn id="1005" display="0">
+                                          <p:stCondLst>
+                                            <p:cond delay="0"/>
+                                          </p:stCondLst>
+                                          <p:endCondLst>
+                                            <p:cond evt="onStopAudio" delay="0">
+                                              <p:tgtEl>
+                                                <p:sldTgt/>
+                                              </p:tgtEl>
+                                            </p:cond>
+                                          </p:endCondLst>
+                                        </p:cTn>
+                                        <p:tgtEl>
+                                          <p:sndTgt r:embed="rIdSnd2" name="ding.wav"/>
+                                        </p:tgtEl>
+                                      </p:cMediaNode>
+                                    </p:audio>
                                   </p:childTnLst>
                                 </p:cTn>
                               </p:par>
@@ -19085,6 +21289,25 @@
                                         </p:tgtEl>
                                       </p:cBhvr>
                                     </p:animEffect>
+                                    <p:audio>
+                                      <p:cMediaNode vol="80000">
+                                        <p:cTn id="1006" display="0">
+                                          <p:stCondLst>
+                                            <p:cond delay="0"/>
+                                          </p:stCondLst>
+                                          <p:endCondLst>
+                                            <p:cond evt="onStopAudio" delay="0">
+                                              <p:tgtEl>
+                                                <p:sldTgt/>
+                                              </p:tgtEl>
+                                            </p:cond>
+                                          </p:endCondLst>
+                                        </p:cTn>
+                                        <p:tgtEl>
+                                          <p:sndTgt r:embed="rIdSnd3" name="tick.wav"/>
+                                        </p:tgtEl>
+                                      </p:cMediaNode>
+                                    </p:audio>
                                   </p:childTnLst>
                                 </p:cTn>
                               </p:par>
@@ -19138,6 +21361,25 @@
                                         </p:tgtEl>
                                       </p:cBhvr>
                                     </p:animEffect>
+                                    <p:audio>
+                                      <p:cMediaNode vol="80000">
+                                        <p:cTn id="1007" display="0">
+                                          <p:stCondLst>
+                                            <p:cond delay="0"/>
+                                          </p:stCondLst>
+                                          <p:endCondLst>
+                                            <p:cond evt="onStopAudio" delay="0">
+                                              <p:tgtEl>
+                                                <p:sldTgt/>
+                                              </p:tgtEl>
+                                            </p:cond>
+                                          </p:endCondLst>
+                                        </p:cTn>
+                                        <p:tgtEl>
+                                          <p:sndTgt r:embed="rIdSnd4" name="win.wav"/>
+                                        </p:tgtEl>
+                                      </p:cMediaNode>
+                                    </p:audio>
                                   </p:childTnLst>
                                 </p:cTn>
                               </p:par>
@@ -19834,6 +22076,25 @@
                                         </p:tgtEl>
                                       </p:cBhvr>
                                     </p:animEffect>
+                                    <p:audio>
+                                      <p:cMediaNode vol="80000">
+                                        <p:cTn id="1001" display="0">
+                                          <p:stCondLst>
+                                            <p:cond delay="0"/>
+                                          </p:stCondLst>
+                                          <p:endCondLst>
+                                            <p:cond evt="onStopAudio" delay="0">
+                                              <p:tgtEl>
+                                                <p:sldTgt/>
+                                              </p:tgtEl>
+                                            </p:cond>
+                                          </p:endCondLst>
+                                        </p:cTn>
+                                        <p:tgtEl>
+                                          <p:sndTgt r:embed="rIdSnd1" name="pop.wav"/>
+                                        </p:tgtEl>
+                                      </p:cMediaNode>
+                                    </p:audio>
                                   </p:childTnLst>
                                 </p:cTn>
                               </p:par>
@@ -19887,6 +22148,25 @@
                                         </p:tgtEl>
                                       </p:cBhvr>
                                     </p:animEffect>
+                                    <p:audio>
+                                      <p:cMediaNode vol="80000">
+                                        <p:cTn id="1002" display="0">
+                                          <p:stCondLst>
+                                            <p:cond delay="0"/>
+                                          </p:stCondLst>
+                                          <p:endCondLst>
+                                            <p:cond evt="onStopAudio" delay="0">
+                                              <p:tgtEl>
+                                                <p:sldTgt/>
+                                              </p:tgtEl>
+                                            </p:cond>
+                                          </p:endCondLst>
+                                        </p:cTn>
+                                        <p:tgtEl>
+                                          <p:sndTgt r:embed="rIdSnd2" name="ding.wav"/>
+                                        </p:tgtEl>
+                                      </p:cMediaNode>
+                                    </p:audio>
                                   </p:childTnLst>
                                 </p:cTn>
                               </p:par>
@@ -19940,6 +22220,25 @@
                                         </p:tgtEl>
                                       </p:cBhvr>
                                     </p:animEffect>
+                                    <p:audio>
+                                      <p:cMediaNode vol="80000">
+                                        <p:cTn id="1003" display="0">
+                                          <p:stCondLst>
+                                            <p:cond delay="0"/>
+                                          </p:stCondLst>
+                                          <p:endCondLst>
+                                            <p:cond evt="onStopAudio" delay="0">
+                                              <p:tgtEl>
+                                                <p:sldTgt/>
+                                              </p:tgtEl>
+                                            </p:cond>
+                                          </p:endCondLst>
+                                        </p:cTn>
+                                        <p:tgtEl>
+                                          <p:sndTgt r:embed="rIdSnd3" name="tick.wav"/>
+                                        </p:tgtEl>
+                                      </p:cMediaNode>
+                                    </p:audio>
                                   </p:childTnLst>
                                 </p:cTn>
                               </p:par>
@@ -19993,6 +22292,25 @@
                                         </p:tgtEl>
                                       </p:cBhvr>
                                     </p:animEffect>
+                                    <p:audio>
+                                      <p:cMediaNode vol="80000">
+                                        <p:cTn id="1004" display="0">
+                                          <p:stCondLst>
+                                            <p:cond delay="0"/>
+                                          </p:stCondLst>
+                                          <p:endCondLst>
+                                            <p:cond evt="onStopAudio" delay="0">
+                                              <p:tgtEl>
+                                                <p:sldTgt/>
+                                              </p:tgtEl>
+                                            </p:cond>
+                                          </p:endCondLst>
+                                        </p:cTn>
+                                        <p:tgtEl>
+                                          <p:sndTgt r:embed="rIdSnd1" name="pop.wav"/>
+                                        </p:tgtEl>
+                                      </p:cMediaNode>
+                                    </p:audio>
                                   </p:childTnLst>
                                 </p:cTn>
                               </p:par>
@@ -20046,6 +22364,25 @@
                                         </p:tgtEl>
                                       </p:cBhvr>
                                     </p:animEffect>
+                                    <p:audio>
+                                      <p:cMediaNode vol="80000">
+                                        <p:cTn id="1005" display="0">
+                                          <p:stCondLst>
+                                            <p:cond delay="0"/>
+                                          </p:stCondLst>
+                                          <p:endCondLst>
+                                            <p:cond evt="onStopAudio" delay="0">
+                                              <p:tgtEl>
+                                                <p:sldTgt/>
+                                              </p:tgtEl>
+                                            </p:cond>
+                                          </p:endCondLst>
+                                        </p:cTn>
+                                        <p:tgtEl>
+                                          <p:sndTgt r:embed="rIdSnd2" name="ding.wav"/>
+                                        </p:tgtEl>
+                                      </p:cMediaNode>
+                                    </p:audio>
                                   </p:childTnLst>
                                 </p:cTn>
                               </p:par>
@@ -20099,6 +22436,25 @@
                                         </p:tgtEl>
                                       </p:cBhvr>
                                     </p:animEffect>
+                                    <p:audio>
+                                      <p:cMediaNode vol="80000">
+                                        <p:cTn id="1006" display="0">
+                                          <p:stCondLst>
+                                            <p:cond delay="0"/>
+                                          </p:stCondLst>
+                                          <p:endCondLst>
+                                            <p:cond evt="onStopAudio" delay="0">
+                                              <p:tgtEl>
+                                                <p:sldTgt/>
+                                              </p:tgtEl>
+                                            </p:cond>
+                                          </p:endCondLst>
+                                        </p:cTn>
+                                        <p:tgtEl>
+                                          <p:sndTgt r:embed="rIdSnd3" name="tick.wav"/>
+                                        </p:tgtEl>
+                                      </p:cMediaNode>
+                                    </p:audio>
                                   </p:childTnLst>
                                 </p:cTn>
                               </p:par>
@@ -20152,6 +22508,25 @@
                                         </p:tgtEl>
                                       </p:cBhvr>
                                     </p:animEffect>
+                                    <p:audio>
+                                      <p:cMediaNode vol="80000">
+                                        <p:cTn id="1007" display="0">
+                                          <p:stCondLst>
+                                            <p:cond delay="0"/>
+                                          </p:stCondLst>
+                                          <p:endCondLst>
+                                            <p:cond evt="onStopAudio" delay="0">
+                                              <p:tgtEl>
+                                                <p:sldTgt/>
+                                              </p:tgtEl>
+                                            </p:cond>
+                                          </p:endCondLst>
+                                        </p:cTn>
+                                        <p:tgtEl>
+                                          <p:sndTgt r:embed="rIdSnd4" name="win.wav"/>
+                                        </p:tgtEl>
+                                      </p:cMediaNode>
+                                    </p:audio>
                                   </p:childTnLst>
                                 </p:cTn>
                               </p:par>
@@ -20848,6 +23223,25 @@
                                         </p:tgtEl>
                                       </p:cBhvr>
                                     </p:animEffect>
+                                    <p:audio>
+                                      <p:cMediaNode vol="80000">
+                                        <p:cTn id="1001" display="0">
+                                          <p:stCondLst>
+                                            <p:cond delay="0"/>
+                                          </p:stCondLst>
+                                          <p:endCondLst>
+                                            <p:cond evt="onStopAudio" delay="0">
+                                              <p:tgtEl>
+                                                <p:sldTgt/>
+                                              </p:tgtEl>
+                                            </p:cond>
+                                          </p:endCondLst>
+                                        </p:cTn>
+                                        <p:tgtEl>
+                                          <p:sndTgt r:embed="rIdSnd1" name="pop.wav"/>
+                                        </p:tgtEl>
+                                      </p:cMediaNode>
+                                    </p:audio>
                                   </p:childTnLst>
                                 </p:cTn>
                               </p:par>
@@ -20901,6 +23295,25 @@
                                         </p:tgtEl>
                                       </p:cBhvr>
                                     </p:animEffect>
+                                    <p:audio>
+                                      <p:cMediaNode vol="80000">
+                                        <p:cTn id="1002" display="0">
+                                          <p:stCondLst>
+                                            <p:cond delay="0"/>
+                                          </p:stCondLst>
+                                          <p:endCondLst>
+                                            <p:cond evt="onStopAudio" delay="0">
+                                              <p:tgtEl>
+                                                <p:sldTgt/>
+                                              </p:tgtEl>
+                                            </p:cond>
+                                          </p:endCondLst>
+                                        </p:cTn>
+                                        <p:tgtEl>
+                                          <p:sndTgt r:embed="rIdSnd2" name="ding.wav"/>
+                                        </p:tgtEl>
+                                      </p:cMediaNode>
+                                    </p:audio>
                                   </p:childTnLst>
                                 </p:cTn>
                               </p:par>
@@ -20954,6 +23367,25 @@
                                         </p:tgtEl>
                                       </p:cBhvr>
                                     </p:animEffect>
+                                    <p:audio>
+                                      <p:cMediaNode vol="80000">
+                                        <p:cTn id="1003" display="0">
+                                          <p:stCondLst>
+                                            <p:cond delay="0"/>
+                                          </p:stCondLst>
+                                          <p:endCondLst>
+                                            <p:cond evt="onStopAudio" delay="0">
+                                              <p:tgtEl>
+                                                <p:sldTgt/>
+                                              </p:tgtEl>
+                                            </p:cond>
+                                          </p:endCondLst>
+                                        </p:cTn>
+                                        <p:tgtEl>
+                                          <p:sndTgt r:embed="rIdSnd3" name="tick.wav"/>
+                                        </p:tgtEl>
+                                      </p:cMediaNode>
+                                    </p:audio>
                                   </p:childTnLst>
                                 </p:cTn>
                               </p:par>
@@ -21007,6 +23439,25 @@
                                         </p:tgtEl>
                                       </p:cBhvr>
                                     </p:animEffect>
+                                    <p:audio>
+                                      <p:cMediaNode vol="80000">
+                                        <p:cTn id="1004" display="0">
+                                          <p:stCondLst>
+                                            <p:cond delay="0"/>
+                                          </p:stCondLst>
+                                          <p:endCondLst>
+                                            <p:cond evt="onStopAudio" delay="0">
+                                              <p:tgtEl>
+                                                <p:sldTgt/>
+                                              </p:tgtEl>
+                                            </p:cond>
+                                          </p:endCondLst>
+                                        </p:cTn>
+                                        <p:tgtEl>
+                                          <p:sndTgt r:embed="rIdSnd1" name="pop.wav"/>
+                                        </p:tgtEl>
+                                      </p:cMediaNode>
+                                    </p:audio>
                                   </p:childTnLst>
                                 </p:cTn>
                               </p:par>
@@ -21060,6 +23511,25 @@
                                         </p:tgtEl>
                                       </p:cBhvr>
                                     </p:animEffect>
+                                    <p:audio>
+                                      <p:cMediaNode vol="80000">
+                                        <p:cTn id="1005" display="0">
+                                          <p:stCondLst>
+                                            <p:cond delay="0"/>
+                                          </p:stCondLst>
+                                          <p:endCondLst>
+                                            <p:cond evt="onStopAudio" delay="0">
+                                              <p:tgtEl>
+                                                <p:sldTgt/>
+                                              </p:tgtEl>
+                                            </p:cond>
+                                          </p:endCondLst>
+                                        </p:cTn>
+                                        <p:tgtEl>
+                                          <p:sndTgt r:embed="rIdSnd2" name="ding.wav"/>
+                                        </p:tgtEl>
+                                      </p:cMediaNode>
+                                    </p:audio>
                                   </p:childTnLst>
                                 </p:cTn>
                               </p:par>
@@ -21113,6 +23583,25 @@
                                         </p:tgtEl>
                                       </p:cBhvr>
                                     </p:animEffect>
+                                    <p:audio>
+                                      <p:cMediaNode vol="80000">
+                                        <p:cTn id="1006" display="0">
+                                          <p:stCondLst>
+                                            <p:cond delay="0"/>
+                                          </p:stCondLst>
+                                          <p:endCondLst>
+                                            <p:cond evt="onStopAudio" delay="0">
+                                              <p:tgtEl>
+                                                <p:sldTgt/>
+                                              </p:tgtEl>
+                                            </p:cond>
+                                          </p:endCondLst>
+                                        </p:cTn>
+                                        <p:tgtEl>
+                                          <p:sndTgt r:embed="rIdSnd3" name="tick.wav"/>
+                                        </p:tgtEl>
+                                      </p:cMediaNode>
+                                    </p:audio>
                                   </p:childTnLst>
                                 </p:cTn>
                               </p:par>
@@ -21166,6 +23655,25 @@
                                         </p:tgtEl>
                                       </p:cBhvr>
                                     </p:animEffect>
+                                    <p:audio>
+                                      <p:cMediaNode vol="80000">
+                                        <p:cTn id="1007" display="0">
+                                          <p:stCondLst>
+                                            <p:cond delay="0"/>
+                                          </p:stCondLst>
+                                          <p:endCondLst>
+                                            <p:cond evt="onStopAudio" delay="0">
+                                              <p:tgtEl>
+                                                <p:sldTgt/>
+                                              </p:tgtEl>
+                                            </p:cond>
+                                          </p:endCondLst>
+                                        </p:cTn>
+                                        <p:tgtEl>
+                                          <p:sndTgt r:embed="rIdSnd4" name="win.wav"/>
+                                        </p:tgtEl>
+                                      </p:cMediaNode>
+                                    </p:audio>
                                   </p:childTnLst>
                                 </p:cTn>
                               </p:par>
@@ -21862,6 +24370,25 @@
                                         </p:tgtEl>
                                       </p:cBhvr>
                                     </p:animEffect>
+                                    <p:audio>
+                                      <p:cMediaNode vol="80000">
+                                        <p:cTn id="1001" display="0">
+                                          <p:stCondLst>
+                                            <p:cond delay="0"/>
+                                          </p:stCondLst>
+                                          <p:endCondLst>
+                                            <p:cond evt="onStopAudio" delay="0">
+                                              <p:tgtEl>
+                                                <p:sldTgt/>
+                                              </p:tgtEl>
+                                            </p:cond>
+                                          </p:endCondLst>
+                                        </p:cTn>
+                                        <p:tgtEl>
+                                          <p:sndTgt r:embed="rIdSnd1" name="pop.wav"/>
+                                        </p:tgtEl>
+                                      </p:cMediaNode>
+                                    </p:audio>
                                   </p:childTnLst>
                                 </p:cTn>
                               </p:par>
@@ -21915,6 +24442,25 @@
                                         </p:tgtEl>
                                       </p:cBhvr>
                                     </p:animEffect>
+                                    <p:audio>
+                                      <p:cMediaNode vol="80000">
+                                        <p:cTn id="1002" display="0">
+                                          <p:stCondLst>
+                                            <p:cond delay="0"/>
+                                          </p:stCondLst>
+                                          <p:endCondLst>
+                                            <p:cond evt="onStopAudio" delay="0">
+                                              <p:tgtEl>
+                                                <p:sldTgt/>
+                                              </p:tgtEl>
+                                            </p:cond>
+                                          </p:endCondLst>
+                                        </p:cTn>
+                                        <p:tgtEl>
+                                          <p:sndTgt r:embed="rIdSnd2" name="ding.wav"/>
+                                        </p:tgtEl>
+                                      </p:cMediaNode>
+                                    </p:audio>
                                   </p:childTnLst>
                                 </p:cTn>
                               </p:par>
@@ -21968,6 +24514,25 @@
                                         </p:tgtEl>
                                       </p:cBhvr>
                                     </p:animEffect>
+                                    <p:audio>
+                                      <p:cMediaNode vol="80000">
+                                        <p:cTn id="1003" display="0">
+                                          <p:stCondLst>
+                                            <p:cond delay="0"/>
+                                          </p:stCondLst>
+                                          <p:endCondLst>
+                                            <p:cond evt="onStopAudio" delay="0">
+                                              <p:tgtEl>
+                                                <p:sldTgt/>
+                                              </p:tgtEl>
+                                            </p:cond>
+                                          </p:endCondLst>
+                                        </p:cTn>
+                                        <p:tgtEl>
+                                          <p:sndTgt r:embed="rIdSnd3" name="tick.wav"/>
+                                        </p:tgtEl>
+                                      </p:cMediaNode>
+                                    </p:audio>
                                   </p:childTnLst>
                                 </p:cTn>
                               </p:par>
@@ -22021,6 +24586,25 @@
                                         </p:tgtEl>
                                       </p:cBhvr>
                                     </p:animEffect>
+                                    <p:audio>
+                                      <p:cMediaNode vol="80000">
+                                        <p:cTn id="1004" display="0">
+                                          <p:stCondLst>
+                                            <p:cond delay="0"/>
+                                          </p:stCondLst>
+                                          <p:endCondLst>
+                                            <p:cond evt="onStopAudio" delay="0">
+                                              <p:tgtEl>
+                                                <p:sldTgt/>
+                                              </p:tgtEl>
+                                            </p:cond>
+                                          </p:endCondLst>
+                                        </p:cTn>
+                                        <p:tgtEl>
+                                          <p:sndTgt r:embed="rIdSnd1" name="pop.wav"/>
+                                        </p:tgtEl>
+                                      </p:cMediaNode>
+                                    </p:audio>
                                   </p:childTnLst>
                                 </p:cTn>
                               </p:par>
@@ -22074,6 +24658,25 @@
                                         </p:tgtEl>
                                       </p:cBhvr>
                                     </p:animEffect>
+                                    <p:audio>
+                                      <p:cMediaNode vol="80000">
+                                        <p:cTn id="1005" display="0">
+                                          <p:stCondLst>
+                                            <p:cond delay="0"/>
+                                          </p:stCondLst>
+                                          <p:endCondLst>
+                                            <p:cond evt="onStopAudio" delay="0">
+                                              <p:tgtEl>
+                                                <p:sldTgt/>
+                                              </p:tgtEl>
+                                            </p:cond>
+                                          </p:endCondLst>
+                                        </p:cTn>
+                                        <p:tgtEl>
+                                          <p:sndTgt r:embed="rIdSnd2" name="ding.wav"/>
+                                        </p:tgtEl>
+                                      </p:cMediaNode>
+                                    </p:audio>
                                   </p:childTnLst>
                                 </p:cTn>
                               </p:par>
@@ -22127,6 +24730,25 @@
                                         </p:tgtEl>
                                       </p:cBhvr>
                                     </p:animEffect>
+                                    <p:audio>
+                                      <p:cMediaNode vol="80000">
+                                        <p:cTn id="1006" display="0">
+                                          <p:stCondLst>
+                                            <p:cond delay="0"/>
+                                          </p:stCondLst>
+                                          <p:endCondLst>
+                                            <p:cond evt="onStopAudio" delay="0">
+                                              <p:tgtEl>
+                                                <p:sldTgt/>
+                                              </p:tgtEl>
+                                            </p:cond>
+                                          </p:endCondLst>
+                                        </p:cTn>
+                                        <p:tgtEl>
+                                          <p:sndTgt r:embed="rIdSnd3" name="tick.wav"/>
+                                        </p:tgtEl>
+                                      </p:cMediaNode>
+                                    </p:audio>
                                   </p:childTnLst>
                                 </p:cTn>
                               </p:par>
@@ -22180,6 +24802,25 @@
                                         </p:tgtEl>
                                       </p:cBhvr>
                                     </p:animEffect>
+                                    <p:audio>
+                                      <p:cMediaNode vol="80000">
+                                        <p:cTn id="1007" display="0">
+                                          <p:stCondLst>
+                                            <p:cond delay="0"/>
+                                          </p:stCondLst>
+                                          <p:endCondLst>
+                                            <p:cond evt="onStopAudio" delay="0">
+                                              <p:tgtEl>
+                                                <p:sldTgt/>
+                                              </p:tgtEl>
+                                            </p:cond>
+                                          </p:endCondLst>
+                                        </p:cTn>
+                                        <p:tgtEl>
+                                          <p:sndTgt r:embed="rIdSnd4" name="win.wav"/>
+                                        </p:tgtEl>
+                                      </p:cMediaNode>
+                                    </p:audio>
                                   </p:childTnLst>
                                 </p:cTn>
                               </p:par>
@@ -22876,6 +25517,25 @@
                                         </p:tgtEl>
                                       </p:cBhvr>
                                     </p:animEffect>
+                                    <p:audio>
+                                      <p:cMediaNode vol="80000">
+                                        <p:cTn id="1001" display="0">
+                                          <p:stCondLst>
+                                            <p:cond delay="0"/>
+                                          </p:stCondLst>
+                                          <p:endCondLst>
+                                            <p:cond evt="onStopAudio" delay="0">
+                                              <p:tgtEl>
+                                                <p:sldTgt/>
+                                              </p:tgtEl>
+                                            </p:cond>
+                                          </p:endCondLst>
+                                        </p:cTn>
+                                        <p:tgtEl>
+                                          <p:sndTgt r:embed="rIdSnd1" name="pop.wav"/>
+                                        </p:tgtEl>
+                                      </p:cMediaNode>
+                                    </p:audio>
                                   </p:childTnLst>
                                 </p:cTn>
                               </p:par>
@@ -22929,6 +25589,25 @@
                                         </p:tgtEl>
                                       </p:cBhvr>
                                     </p:animEffect>
+                                    <p:audio>
+                                      <p:cMediaNode vol="80000">
+                                        <p:cTn id="1002" display="0">
+                                          <p:stCondLst>
+                                            <p:cond delay="0"/>
+                                          </p:stCondLst>
+                                          <p:endCondLst>
+                                            <p:cond evt="onStopAudio" delay="0">
+                                              <p:tgtEl>
+                                                <p:sldTgt/>
+                                              </p:tgtEl>
+                                            </p:cond>
+                                          </p:endCondLst>
+                                        </p:cTn>
+                                        <p:tgtEl>
+                                          <p:sndTgt r:embed="rIdSnd2" name="ding.wav"/>
+                                        </p:tgtEl>
+                                      </p:cMediaNode>
+                                    </p:audio>
                                   </p:childTnLst>
                                 </p:cTn>
                               </p:par>
@@ -22982,6 +25661,25 @@
                                         </p:tgtEl>
                                       </p:cBhvr>
                                     </p:animEffect>
+                                    <p:audio>
+                                      <p:cMediaNode vol="80000">
+                                        <p:cTn id="1003" display="0">
+                                          <p:stCondLst>
+                                            <p:cond delay="0"/>
+                                          </p:stCondLst>
+                                          <p:endCondLst>
+                                            <p:cond evt="onStopAudio" delay="0">
+                                              <p:tgtEl>
+                                                <p:sldTgt/>
+                                              </p:tgtEl>
+                                            </p:cond>
+                                          </p:endCondLst>
+                                        </p:cTn>
+                                        <p:tgtEl>
+                                          <p:sndTgt r:embed="rIdSnd3" name="tick.wav"/>
+                                        </p:tgtEl>
+                                      </p:cMediaNode>
+                                    </p:audio>
                                   </p:childTnLst>
                                 </p:cTn>
                               </p:par>
@@ -23035,6 +25733,25 @@
                                         </p:tgtEl>
                                       </p:cBhvr>
                                     </p:animEffect>
+                                    <p:audio>
+                                      <p:cMediaNode vol="80000">
+                                        <p:cTn id="1004" display="0">
+                                          <p:stCondLst>
+                                            <p:cond delay="0"/>
+                                          </p:stCondLst>
+                                          <p:endCondLst>
+                                            <p:cond evt="onStopAudio" delay="0">
+                                              <p:tgtEl>
+                                                <p:sldTgt/>
+                                              </p:tgtEl>
+                                            </p:cond>
+                                          </p:endCondLst>
+                                        </p:cTn>
+                                        <p:tgtEl>
+                                          <p:sndTgt r:embed="rIdSnd1" name="pop.wav"/>
+                                        </p:tgtEl>
+                                      </p:cMediaNode>
+                                    </p:audio>
                                   </p:childTnLst>
                                 </p:cTn>
                               </p:par>
@@ -23088,6 +25805,25 @@
                                         </p:tgtEl>
                                       </p:cBhvr>
                                     </p:animEffect>
+                                    <p:audio>
+                                      <p:cMediaNode vol="80000">
+                                        <p:cTn id="1005" display="0">
+                                          <p:stCondLst>
+                                            <p:cond delay="0"/>
+                                          </p:stCondLst>
+                                          <p:endCondLst>
+                                            <p:cond evt="onStopAudio" delay="0">
+                                              <p:tgtEl>
+                                                <p:sldTgt/>
+                                              </p:tgtEl>
+                                            </p:cond>
+                                          </p:endCondLst>
+                                        </p:cTn>
+                                        <p:tgtEl>
+                                          <p:sndTgt r:embed="rIdSnd2" name="ding.wav"/>
+                                        </p:tgtEl>
+                                      </p:cMediaNode>
+                                    </p:audio>
                                   </p:childTnLst>
                                 </p:cTn>
                               </p:par>
@@ -23141,6 +25877,25 @@
                                         </p:tgtEl>
                                       </p:cBhvr>
                                     </p:animEffect>
+                                    <p:audio>
+                                      <p:cMediaNode vol="80000">
+                                        <p:cTn id="1006" display="0">
+                                          <p:stCondLst>
+                                            <p:cond delay="0"/>
+                                          </p:stCondLst>
+                                          <p:endCondLst>
+                                            <p:cond evt="onStopAudio" delay="0">
+                                              <p:tgtEl>
+                                                <p:sldTgt/>
+                                              </p:tgtEl>
+                                            </p:cond>
+                                          </p:endCondLst>
+                                        </p:cTn>
+                                        <p:tgtEl>
+                                          <p:sndTgt r:embed="rIdSnd3" name="tick.wav"/>
+                                        </p:tgtEl>
+                                      </p:cMediaNode>
+                                    </p:audio>
                                   </p:childTnLst>
                                 </p:cTn>
                               </p:par>
@@ -23194,6 +25949,25 @@
                                         </p:tgtEl>
                                       </p:cBhvr>
                                     </p:animEffect>
+                                    <p:audio>
+                                      <p:cMediaNode vol="80000">
+                                        <p:cTn id="1007" display="0">
+                                          <p:stCondLst>
+                                            <p:cond delay="0"/>
+                                          </p:stCondLst>
+                                          <p:endCondLst>
+                                            <p:cond evt="onStopAudio" delay="0">
+                                              <p:tgtEl>
+                                                <p:sldTgt/>
+                                              </p:tgtEl>
+                                            </p:cond>
+                                          </p:endCondLst>
+                                        </p:cTn>
+                                        <p:tgtEl>
+                                          <p:sndTgt r:embed="rIdSnd4" name="win.wav"/>
+                                        </p:tgtEl>
+                                      </p:cMediaNode>
+                                    </p:audio>
                                   </p:childTnLst>
                                 </p:cTn>
                               </p:par>
@@ -23890,6 +26664,25 @@
                                         </p:tgtEl>
                                       </p:cBhvr>
                                     </p:animEffect>
+                                    <p:audio>
+                                      <p:cMediaNode vol="80000">
+                                        <p:cTn id="1001" display="0">
+                                          <p:stCondLst>
+                                            <p:cond delay="0"/>
+                                          </p:stCondLst>
+                                          <p:endCondLst>
+                                            <p:cond evt="onStopAudio" delay="0">
+                                              <p:tgtEl>
+                                                <p:sldTgt/>
+                                              </p:tgtEl>
+                                            </p:cond>
+                                          </p:endCondLst>
+                                        </p:cTn>
+                                        <p:tgtEl>
+                                          <p:sndTgt r:embed="rIdSnd1" name="pop.wav"/>
+                                        </p:tgtEl>
+                                      </p:cMediaNode>
+                                    </p:audio>
                                   </p:childTnLst>
                                 </p:cTn>
                               </p:par>
@@ -23943,6 +26736,25 @@
                                         </p:tgtEl>
                                       </p:cBhvr>
                                     </p:animEffect>
+                                    <p:audio>
+                                      <p:cMediaNode vol="80000">
+                                        <p:cTn id="1002" display="0">
+                                          <p:stCondLst>
+                                            <p:cond delay="0"/>
+                                          </p:stCondLst>
+                                          <p:endCondLst>
+                                            <p:cond evt="onStopAudio" delay="0">
+                                              <p:tgtEl>
+                                                <p:sldTgt/>
+                                              </p:tgtEl>
+                                            </p:cond>
+                                          </p:endCondLst>
+                                        </p:cTn>
+                                        <p:tgtEl>
+                                          <p:sndTgt r:embed="rIdSnd2" name="ding.wav"/>
+                                        </p:tgtEl>
+                                      </p:cMediaNode>
+                                    </p:audio>
                                   </p:childTnLst>
                                 </p:cTn>
                               </p:par>
@@ -23996,6 +26808,25 @@
                                         </p:tgtEl>
                                       </p:cBhvr>
                                     </p:animEffect>
+                                    <p:audio>
+                                      <p:cMediaNode vol="80000">
+                                        <p:cTn id="1003" display="0">
+                                          <p:stCondLst>
+                                            <p:cond delay="0"/>
+                                          </p:stCondLst>
+                                          <p:endCondLst>
+                                            <p:cond evt="onStopAudio" delay="0">
+                                              <p:tgtEl>
+                                                <p:sldTgt/>
+                                              </p:tgtEl>
+                                            </p:cond>
+                                          </p:endCondLst>
+                                        </p:cTn>
+                                        <p:tgtEl>
+                                          <p:sndTgt r:embed="rIdSnd3" name="tick.wav"/>
+                                        </p:tgtEl>
+                                      </p:cMediaNode>
+                                    </p:audio>
                                   </p:childTnLst>
                                 </p:cTn>
                               </p:par>
@@ -24049,6 +26880,25 @@
                                         </p:tgtEl>
                                       </p:cBhvr>
                                     </p:animEffect>
+                                    <p:audio>
+                                      <p:cMediaNode vol="80000">
+                                        <p:cTn id="1004" display="0">
+                                          <p:stCondLst>
+                                            <p:cond delay="0"/>
+                                          </p:stCondLst>
+                                          <p:endCondLst>
+                                            <p:cond evt="onStopAudio" delay="0">
+                                              <p:tgtEl>
+                                                <p:sldTgt/>
+                                              </p:tgtEl>
+                                            </p:cond>
+                                          </p:endCondLst>
+                                        </p:cTn>
+                                        <p:tgtEl>
+                                          <p:sndTgt r:embed="rIdSnd1" name="pop.wav"/>
+                                        </p:tgtEl>
+                                      </p:cMediaNode>
+                                    </p:audio>
                                   </p:childTnLst>
                                 </p:cTn>
                               </p:par>
@@ -24102,6 +26952,25 @@
                                         </p:tgtEl>
                                       </p:cBhvr>
                                     </p:animEffect>
+                                    <p:audio>
+                                      <p:cMediaNode vol="80000">
+                                        <p:cTn id="1005" display="0">
+                                          <p:stCondLst>
+                                            <p:cond delay="0"/>
+                                          </p:stCondLst>
+                                          <p:endCondLst>
+                                            <p:cond evt="onStopAudio" delay="0">
+                                              <p:tgtEl>
+                                                <p:sldTgt/>
+                                              </p:tgtEl>
+                                            </p:cond>
+                                          </p:endCondLst>
+                                        </p:cTn>
+                                        <p:tgtEl>
+                                          <p:sndTgt r:embed="rIdSnd2" name="ding.wav"/>
+                                        </p:tgtEl>
+                                      </p:cMediaNode>
+                                    </p:audio>
                                   </p:childTnLst>
                                 </p:cTn>
                               </p:par>
@@ -24155,6 +27024,25 @@
                                         </p:tgtEl>
                                       </p:cBhvr>
                                     </p:animEffect>
+                                    <p:audio>
+                                      <p:cMediaNode vol="80000">
+                                        <p:cTn id="1006" display="0">
+                                          <p:stCondLst>
+                                            <p:cond delay="0"/>
+                                          </p:stCondLst>
+                                          <p:endCondLst>
+                                            <p:cond evt="onStopAudio" delay="0">
+                                              <p:tgtEl>
+                                                <p:sldTgt/>
+                                              </p:tgtEl>
+                                            </p:cond>
+                                          </p:endCondLst>
+                                        </p:cTn>
+                                        <p:tgtEl>
+                                          <p:sndTgt r:embed="rIdSnd3" name="tick.wav"/>
+                                        </p:tgtEl>
+                                      </p:cMediaNode>
+                                    </p:audio>
                                   </p:childTnLst>
                                 </p:cTn>
                               </p:par>
@@ -24208,6 +27096,25 @@
                                         </p:tgtEl>
                                       </p:cBhvr>
                                     </p:animEffect>
+                                    <p:audio>
+                                      <p:cMediaNode vol="80000">
+                                        <p:cTn id="1007" display="0">
+                                          <p:stCondLst>
+                                            <p:cond delay="0"/>
+                                          </p:stCondLst>
+                                          <p:endCondLst>
+                                            <p:cond evt="onStopAudio" delay="0">
+                                              <p:tgtEl>
+                                                <p:sldTgt/>
+                                              </p:tgtEl>
+                                            </p:cond>
+                                          </p:endCondLst>
+                                        </p:cTn>
+                                        <p:tgtEl>
+                                          <p:sndTgt r:embed="rIdSnd4" name="win.wav"/>
+                                        </p:tgtEl>
+                                      </p:cMediaNode>
+                                    </p:audio>
                                   </p:childTnLst>
                                 </p:cTn>
                               </p:par>
@@ -24904,6 +27811,25 @@
                                         </p:tgtEl>
                                       </p:cBhvr>
                                     </p:animEffect>
+                                    <p:audio>
+                                      <p:cMediaNode vol="80000">
+                                        <p:cTn id="1001" display="0">
+                                          <p:stCondLst>
+                                            <p:cond delay="0"/>
+                                          </p:stCondLst>
+                                          <p:endCondLst>
+                                            <p:cond evt="onStopAudio" delay="0">
+                                              <p:tgtEl>
+                                                <p:sldTgt/>
+                                              </p:tgtEl>
+                                            </p:cond>
+                                          </p:endCondLst>
+                                        </p:cTn>
+                                        <p:tgtEl>
+                                          <p:sndTgt r:embed="rIdSnd1" name="pop.wav"/>
+                                        </p:tgtEl>
+                                      </p:cMediaNode>
+                                    </p:audio>
                                   </p:childTnLst>
                                 </p:cTn>
                               </p:par>
@@ -24957,6 +27883,25 @@
                                         </p:tgtEl>
                                       </p:cBhvr>
                                     </p:animEffect>
+                                    <p:audio>
+                                      <p:cMediaNode vol="80000">
+                                        <p:cTn id="1002" display="0">
+                                          <p:stCondLst>
+                                            <p:cond delay="0"/>
+                                          </p:stCondLst>
+                                          <p:endCondLst>
+                                            <p:cond evt="onStopAudio" delay="0">
+                                              <p:tgtEl>
+                                                <p:sldTgt/>
+                                              </p:tgtEl>
+                                            </p:cond>
+                                          </p:endCondLst>
+                                        </p:cTn>
+                                        <p:tgtEl>
+                                          <p:sndTgt r:embed="rIdSnd2" name="ding.wav"/>
+                                        </p:tgtEl>
+                                      </p:cMediaNode>
+                                    </p:audio>
                                   </p:childTnLst>
                                 </p:cTn>
                               </p:par>
@@ -25010,6 +27955,25 @@
                                         </p:tgtEl>
                                       </p:cBhvr>
                                     </p:animEffect>
+                                    <p:audio>
+                                      <p:cMediaNode vol="80000">
+                                        <p:cTn id="1003" display="0">
+                                          <p:stCondLst>
+                                            <p:cond delay="0"/>
+                                          </p:stCondLst>
+                                          <p:endCondLst>
+                                            <p:cond evt="onStopAudio" delay="0">
+                                              <p:tgtEl>
+                                                <p:sldTgt/>
+                                              </p:tgtEl>
+                                            </p:cond>
+                                          </p:endCondLst>
+                                        </p:cTn>
+                                        <p:tgtEl>
+                                          <p:sndTgt r:embed="rIdSnd3" name="tick.wav"/>
+                                        </p:tgtEl>
+                                      </p:cMediaNode>
+                                    </p:audio>
                                   </p:childTnLst>
                                 </p:cTn>
                               </p:par>
@@ -25063,6 +28027,25 @@
                                         </p:tgtEl>
                                       </p:cBhvr>
                                     </p:animEffect>
+                                    <p:audio>
+                                      <p:cMediaNode vol="80000">
+                                        <p:cTn id="1004" display="0">
+                                          <p:stCondLst>
+                                            <p:cond delay="0"/>
+                                          </p:stCondLst>
+                                          <p:endCondLst>
+                                            <p:cond evt="onStopAudio" delay="0">
+                                              <p:tgtEl>
+                                                <p:sldTgt/>
+                                              </p:tgtEl>
+                                            </p:cond>
+                                          </p:endCondLst>
+                                        </p:cTn>
+                                        <p:tgtEl>
+                                          <p:sndTgt r:embed="rIdSnd1" name="pop.wav"/>
+                                        </p:tgtEl>
+                                      </p:cMediaNode>
+                                    </p:audio>
                                   </p:childTnLst>
                                 </p:cTn>
                               </p:par>
@@ -25116,6 +28099,25 @@
                                         </p:tgtEl>
                                       </p:cBhvr>
                                     </p:animEffect>
+                                    <p:audio>
+                                      <p:cMediaNode vol="80000">
+                                        <p:cTn id="1005" display="0">
+                                          <p:stCondLst>
+                                            <p:cond delay="0"/>
+                                          </p:stCondLst>
+                                          <p:endCondLst>
+                                            <p:cond evt="onStopAudio" delay="0">
+                                              <p:tgtEl>
+                                                <p:sldTgt/>
+                                              </p:tgtEl>
+                                            </p:cond>
+                                          </p:endCondLst>
+                                        </p:cTn>
+                                        <p:tgtEl>
+                                          <p:sndTgt r:embed="rIdSnd2" name="ding.wav"/>
+                                        </p:tgtEl>
+                                      </p:cMediaNode>
+                                    </p:audio>
                                   </p:childTnLst>
                                 </p:cTn>
                               </p:par>
@@ -25169,6 +28171,25 @@
                                         </p:tgtEl>
                                       </p:cBhvr>
                                     </p:animEffect>
+                                    <p:audio>
+                                      <p:cMediaNode vol="80000">
+                                        <p:cTn id="1006" display="0">
+                                          <p:stCondLst>
+                                            <p:cond delay="0"/>
+                                          </p:stCondLst>
+                                          <p:endCondLst>
+                                            <p:cond evt="onStopAudio" delay="0">
+                                              <p:tgtEl>
+                                                <p:sldTgt/>
+                                              </p:tgtEl>
+                                            </p:cond>
+                                          </p:endCondLst>
+                                        </p:cTn>
+                                        <p:tgtEl>
+                                          <p:sndTgt r:embed="rIdSnd3" name="tick.wav"/>
+                                        </p:tgtEl>
+                                      </p:cMediaNode>
+                                    </p:audio>
                                   </p:childTnLst>
                                 </p:cTn>
                               </p:par>
@@ -25222,6 +28243,25 @@
                                         </p:tgtEl>
                                       </p:cBhvr>
                                     </p:animEffect>
+                                    <p:audio>
+                                      <p:cMediaNode vol="80000">
+                                        <p:cTn id="1007" display="0">
+                                          <p:stCondLst>
+                                            <p:cond delay="0"/>
+                                          </p:stCondLst>
+                                          <p:endCondLst>
+                                            <p:cond evt="onStopAudio" delay="0">
+                                              <p:tgtEl>
+                                                <p:sldTgt/>
+                                              </p:tgtEl>
+                                            </p:cond>
+                                          </p:endCondLst>
+                                        </p:cTn>
+                                        <p:tgtEl>
+                                          <p:sndTgt r:embed="rIdSnd4" name="win.wav"/>
+                                        </p:tgtEl>
+                                      </p:cMediaNode>
+                                    </p:audio>
                                   </p:childTnLst>
                                 </p:cTn>
                               </p:par>
@@ -26046,6 +29086,25 @@
                                         </p:tgtEl>
                                       </p:cBhvr>
                                     </p:animEffect>
+                                    <p:audio>
+                                      <p:cMediaNode vol="80000">
+                                        <p:cTn id="1001" display="0">
+                                          <p:stCondLst>
+                                            <p:cond delay="0"/>
+                                          </p:stCondLst>
+                                          <p:endCondLst>
+                                            <p:cond evt="onStopAudio" delay="0">
+                                              <p:tgtEl>
+                                                <p:sldTgt/>
+                                              </p:tgtEl>
+                                            </p:cond>
+                                          </p:endCondLst>
+                                        </p:cTn>
+                                        <p:tgtEl>
+                                          <p:sndTgt r:embed="rIdSnd1" name="pop.wav"/>
+                                        </p:tgtEl>
+                                      </p:cMediaNode>
+                                    </p:audio>
                                   </p:childTnLst>
                                 </p:cTn>
                               </p:par>
@@ -26099,6 +29158,25 @@
                                         </p:tgtEl>
                                       </p:cBhvr>
                                     </p:animEffect>
+                                    <p:audio>
+                                      <p:cMediaNode vol="80000">
+                                        <p:cTn id="1002" display="0">
+                                          <p:stCondLst>
+                                            <p:cond delay="0"/>
+                                          </p:stCondLst>
+                                          <p:endCondLst>
+                                            <p:cond evt="onStopAudio" delay="0">
+                                              <p:tgtEl>
+                                                <p:sldTgt/>
+                                              </p:tgtEl>
+                                            </p:cond>
+                                          </p:endCondLst>
+                                        </p:cTn>
+                                        <p:tgtEl>
+                                          <p:sndTgt r:embed="rIdSnd2" name="ding.wav"/>
+                                        </p:tgtEl>
+                                      </p:cMediaNode>
+                                    </p:audio>
                                   </p:childTnLst>
                                 </p:cTn>
                               </p:par>
@@ -26152,6 +29230,25 @@
                                         </p:tgtEl>
                                       </p:cBhvr>
                                     </p:animEffect>
+                                    <p:audio>
+                                      <p:cMediaNode vol="80000">
+                                        <p:cTn id="1003" display="0">
+                                          <p:stCondLst>
+                                            <p:cond delay="0"/>
+                                          </p:stCondLst>
+                                          <p:endCondLst>
+                                            <p:cond evt="onStopAudio" delay="0">
+                                              <p:tgtEl>
+                                                <p:sldTgt/>
+                                              </p:tgtEl>
+                                            </p:cond>
+                                          </p:endCondLst>
+                                        </p:cTn>
+                                        <p:tgtEl>
+                                          <p:sndTgt r:embed="rIdSnd3" name="tick.wav"/>
+                                        </p:tgtEl>
+                                      </p:cMediaNode>
+                                    </p:audio>
                                   </p:childTnLst>
                                 </p:cTn>
                               </p:par>
@@ -26205,6 +29302,25 @@
                                         </p:tgtEl>
                                       </p:cBhvr>
                                     </p:animEffect>
+                                    <p:audio>
+                                      <p:cMediaNode vol="80000">
+                                        <p:cTn id="1004" display="0">
+                                          <p:stCondLst>
+                                            <p:cond delay="0"/>
+                                          </p:stCondLst>
+                                          <p:endCondLst>
+                                            <p:cond evt="onStopAudio" delay="0">
+                                              <p:tgtEl>
+                                                <p:sldTgt/>
+                                              </p:tgtEl>
+                                            </p:cond>
+                                          </p:endCondLst>
+                                        </p:cTn>
+                                        <p:tgtEl>
+                                          <p:sndTgt r:embed="rIdSnd1" name="pop.wav"/>
+                                        </p:tgtEl>
+                                      </p:cMediaNode>
+                                    </p:audio>
                                   </p:childTnLst>
                                 </p:cTn>
                               </p:par>
@@ -26258,6 +29374,25 @@
                                         </p:tgtEl>
                                       </p:cBhvr>
                                     </p:animEffect>
+                                    <p:audio>
+                                      <p:cMediaNode vol="80000">
+                                        <p:cTn id="1005" display="0">
+                                          <p:stCondLst>
+                                            <p:cond delay="0"/>
+                                          </p:stCondLst>
+                                          <p:endCondLst>
+                                            <p:cond evt="onStopAudio" delay="0">
+                                              <p:tgtEl>
+                                                <p:sldTgt/>
+                                              </p:tgtEl>
+                                            </p:cond>
+                                          </p:endCondLst>
+                                        </p:cTn>
+                                        <p:tgtEl>
+                                          <p:sndTgt r:embed="rIdSnd2" name="ding.wav"/>
+                                        </p:tgtEl>
+                                      </p:cMediaNode>
+                                    </p:audio>
                                   </p:childTnLst>
                                 </p:cTn>
                               </p:par>
@@ -26311,6 +29446,25 @@
                                         </p:tgtEl>
                                       </p:cBhvr>
                                     </p:animEffect>
+                                    <p:audio>
+                                      <p:cMediaNode vol="80000">
+                                        <p:cTn id="1006" display="0">
+                                          <p:stCondLst>
+                                            <p:cond delay="0"/>
+                                          </p:stCondLst>
+                                          <p:endCondLst>
+                                            <p:cond evt="onStopAudio" delay="0">
+                                              <p:tgtEl>
+                                                <p:sldTgt/>
+                                              </p:tgtEl>
+                                            </p:cond>
+                                          </p:endCondLst>
+                                        </p:cTn>
+                                        <p:tgtEl>
+                                          <p:sndTgt r:embed="rIdSnd3" name="tick.wav"/>
+                                        </p:tgtEl>
+                                      </p:cMediaNode>
+                                    </p:audio>
                                   </p:childTnLst>
                                 </p:cTn>
                               </p:par>
@@ -26364,6 +29518,25 @@
                                         </p:tgtEl>
                                       </p:cBhvr>
                                     </p:animEffect>
+                                    <p:audio>
+                                      <p:cMediaNode vol="80000">
+                                        <p:cTn id="1007" display="0">
+                                          <p:stCondLst>
+                                            <p:cond delay="0"/>
+                                          </p:stCondLst>
+                                          <p:endCondLst>
+                                            <p:cond evt="onStopAudio" delay="0">
+                                              <p:tgtEl>
+                                                <p:sldTgt/>
+                                              </p:tgtEl>
+                                            </p:cond>
+                                          </p:endCondLst>
+                                        </p:cTn>
+                                        <p:tgtEl>
+                                          <p:sndTgt r:embed="rIdSnd1" name="pop.wav"/>
+                                        </p:tgtEl>
+                                      </p:cMediaNode>
+                                    </p:audio>
                                   </p:childTnLst>
                                 </p:cTn>
                               </p:par>
@@ -26417,6 +29590,25 @@
                                         </p:tgtEl>
                                       </p:cBhvr>
                                     </p:animEffect>
+                                    <p:audio>
+                                      <p:cMediaNode vol="80000">
+                                        <p:cTn id="1008" display="0">
+                                          <p:stCondLst>
+                                            <p:cond delay="0"/>
+                                          </p:stCondLst>
+                                          <p:endCondLst>
+                                            <p:cond evt="onStopAudio" delay="0">
+                                              <p:tgtEl>
+                                                <p:sldTgt/>
+                                              </p:tgtEl>
+                                            </p:cond>
+                                          </p:endCondLst>
+                                        </p:cTn>
+                                        <p:tgtEl>
+                                          <p:sndTgt r:embed="rIdSnd2" name="ding.wav"/>
+                                        </p:tgtEl>
+                                      </p:cMediaNode>
+                                    </p:audio>
                                   </p:childTnLst>
                                 </p:cTn>
                               </p:par>
@@ -26470,6 +29662,25 @@
                                         </p:tgtEl>
                                       </p:cBhvr>
                                     </p:animEffect>
+                                    <p:audio>
+                                      <p:cMediaNode vol="80000">
+                                        <p:cTn id="1009" display="0">
+                                          <p:stCondLst>
+                                            <p:cond delay="0"/>
+                                          </p:stCondLst>
+                                          <p:endCondLst>
+                                            <p:cond evt="onStopAudio" delay="0">
+                                              <p:tgtEl>
+                                                <p:sldTgt/>
+                                              </p:tgtEl>
+                                            </p:cond>
+                                          </p:endCondLst>
+                                        </p:cTn>
+                                        <p:tgtEl>
+                                          <p:sndTgt r:embed="rIdSnd3" name="tick.wav"/>
+                                        </p:tgtEl>
+                                      </p:cMediaNode>
+                                    </p:audio>
                                   </p:childTnLst>
                                 </p:cTn>
                               </p:par>
@@ -26523,6 +29734,25 @@
                                         </p:tgtEl>
                                       </p:cBhvr>
                                     </p:animEffect>
+                                    <p:audio>
+                                      <p:cMediaNode vol="80000">
+                                        <p:cTn id="1010" display="0">
+                                          <p:stCondLst>
+                                            <p:cond delay="0"/>
+                                          </p:stCondLst>
+                                          <p:endCondLst>
+                                            <p:cond evt="onStopAudio" delay="0">
+                                              <p:tgtEl>
+                                                <p:sldTgt/>
+                                              </p:tgtEl>
+                                            </p:cond>
+                                          </p:endCondLst>
+                                        </p:cTn>
+                                        <p:tgtEl>
+                                          <p:sndTgt r:embed="rIdSnd4" name="win.wav"/>
+                                        </p:tgtEl>
+                                      </p:cMediaNode>
+                                    </p:audio>
                                   </p:childTnLst>
                                 </p:cTn>
                               </p:par>

--- a/all-letters-kasrah/16-waw.pptx
+++ b/all-letters-kasrah/16-waw.pptx
@@ -3169,7 +3169,7 @@
                                           </p:endCondLst>
                                         </p:cTn>
                                         <p:tgtEl>
-                                          <p:sndTgt r:embed="rIdSnd1" name="pop.wav"/>
+                                          <p:sndTgt r:embed="rIdSnd1" name="pluck1.wav"/>
                                         </p:tgtEl>
                                       </p:cMediaNode>
                                     </p:audio>
@@ -3241,7 +3241,7 @@
                                           </p:endCondLst>
                                         </p:cTn>
                                         <p:tgtEl>
-                                          <p:sndTgt r:embed="rIdSnd2" name="ding.wav"/>
+                                          <p:sndTgt r:embed="rIdSnd2" name="bell1.wav"/>
                                         </p:tgtEl>
                                       </p:cMediaNode>
                                     </p:audio>
@@ -4079,7 +4079,7 @@
                                           </p:endCondLst>
                                         </p:cTn>
                                         <p:tgtEl>
-                                          <p:sndTgt r:embed="rIdSnd1" name="pop.wav"/>
+                                          <p:sndTgt r:embed="rIdSnd1" name="pluck1.wav"/>
                                         </p:tgtEl>
                                       </p:cMediaNode>
                                     </p:audio>
@@ -4151,7 +4151,7 @@
                                           </p:endCondLst>
                                         </p:cTn>
                                         <p:tgtEl>
-                                          <p:sndTgt r:embed="rIdSnd2" name="ding.wav"/>
+                                          <p:sndTgt r:embed="rIdSnd2" name="bell1.wav"/>
                                         </p:tgtEl>
                                       </p:cMediaNode>
                                     </p:audio>
@@ -4223,7 +4223,7 @@
                                           </p:endCondLst>
                                         </p:cTn>
                                         <p:tgtEl>
-                                          <p:sndTgt r:embed="rIdSnd3" name="tick.wav"/>
+                                          <p:sndTgt r:embed="rIdSnd3" name="bloop.wav"/>
                                         </p:tgtEl>
                                       </p:cMediaNode>
                                     </p:audio>
@@ -4295,7 +4295,7 @@
                                           </p:endCondLst>
                                         </p:cTn>
                                         <p:tgtEl>
-                                          <p:sndTgt r:embed="rIdSnd1" name="pop.wav"/>
+                                          <p:sndTgt r:embed="rIdSnd4" name="pluck2.wav"/>
                                         </p:tgtEl>
                                       </p:cMediaNode>
                                     </p:audio>
@@ -4367,7 +4367,7 @@
                                           </p:endCondLst>
                                         </p:cTn>
                                         <p:tgtEl>
-                                          <p:sndTgt r:embed="rIdSnd2" name="ding.wav"/>
+                                          <p:sndTgt r:embed="rIdSnd5" name="bell2.wav"/>
                                         </p:tgtEl>
                                       </p:cMediaNode>
                                     </p:audio>
@@ -4439,7 +4439,7 @@
                                           </p:endCondLst>
                                         </p:cTn>
                                         <p:tgtEl>
-                                          <p:sndTgt r:embed="rIdSnd3" name="tick.wav"/>
+                                          <p:sndTgt r:embed="rIdSnd3" name="bloop.wav"/>
                                         </p:tgtEl>
                                       </p:cMediaNode>
                                     </p:audio>
@@ -4511,7 +4511,7 @@
                                           </p:endCondLst>
                                         </p:cTn>
                                         <p:tgtEl>
-                                          <p:sndTgt r:embed="rIdSnd1" name="pop.wav"/>
+                                          <p:sndTgt r:embed="rIdSnd6" name="pluck3.wav"/>
                                         </p:tgtEl>
                                       </p:cMediaNode>
                                     </p:audio>
@@ -4583,7 +4583,7 @@
                                           </p:endCondLst>
                                         </p:cTn>
                                         <p:tgtEl>
-                                          <p:sndTgt r:embed="rIdSnd2" name="ding.wav"/>
+                                          <p:sndTgt r:embed="rIdSnd7" name="bell3.wav"/>
                                         </p:tgtEl>
                                       </p:cMediaNode>
                                     </p:audio>
@@ -4655,7 +4655,7 @@
                                           </p:endCondLst>
                                         </p:cTn>
                                         <p:tgtEl>
-                                          <p:sndTgt r:embed="rIdSnd3" name="tick.wav"/>
+                                          <p:sndTgt r:embed="rIdSnd8" name="whoosh.wav"/>
                                         </p:tgtEl>
                                       </p:cMediaNode>
                                     </p:audio>
@@ -4727,7 +4727,7 @@
                                           </p:endCondLst>
                                         </p:cTn>
                                         <p:tgtEl>
-                                          <p:sndTgt r:embed="rIdSnd4" name="win.wav"/>
+                                          <p:sndTgt r:embed="rIdSnd9" name="win.wav"/>
                                         </p:tgtEl>
                                       </p:cMediaNode>
                                     </p:audio>
@@ -5573,7 +5573,7 @@
                                           </p:endCondLst>
                                         </p:cTn>
                                         <p:tgtEl>
-                                          <p:sndTgt r:embed="rIdSnd1" name="pop.wav"/>
+                                          <p:sndTgt r:embed="rIdSnd1" name="pluck1.wav"/>
                                         </p:tgtEl>
                                       </p:cMediaNode>
                                     </p:audio>
@@ -5645,7 +5645,7 @@
                                           </p:endCondLst>
                                         </p:cTn>
                                         <p:tgtEl>
-                                          <p:sndTgt r:embed="rIdSnd2" name="ding.wav"/>
+                                          <p:sndTgt r:embed="rIdSnd2" name="bell1.wav"/>
                                         </p:tgtEl>
                                       </p:cMediaNode>
                                     </p:audio>
@@ -5717,7 +5717,7 @@
                                           </p:endCondLst>
                                         </p:cTn>
                                         <p:tgtEl>
-                                          <p:sndTgt r:embed="rIdSnd3" name="tick.wav"/>
+                                          <p:sndTgt r:embed="rIdSnd3" name="bloop.wav"/>
                                         </p:tgtEl>
                                       </p:cMediaNode>
                                     </p:audio>
@@ -5789,7 +5789,7 @@
                                           </p:endCondLst>
                                         </p:cTn>
                                         <p:tgtEl>
-                                          <p:sndTgt r:embed="rIdSnd1" name="pop.wav"/>
+                                          <p:sndTgt r:embed="rIdSnd4" name="pluck2.wav"/>
                                         </p:tgtEl>
                                       </p:cMediaNode>
                                     </p:audio>
@@ -5861,7 +5861,7 @@
                                           </p:endCondLst>
                                         </p:cTn>
                                         <p:tgtEl>
-                                          <p:sndTgt r:embed="rIdSnd2" name="ding.wav"/>
+                                          <p:sndTgt r:embed="rIdSnd5" name="bell2.wav"/>
                                         </p:tgtEl>
                                       </p:cMediaNode>
                                     </p:audio>
@@ -5933,7 +5933,7 @@
                                           </p:endCondLst>
                                         </p:cTn>
                                         <p:tgtEl>
-                                          <p:sndTgt r:embed="rIdSnd3" name="tick.wav"/>
+                                          <p:sndTgt r:embed="rIdSnd3" name="bloop.wav"/>
                                         </p:tgtEl>
                                       </p:cMediaNode>
                                     </p:audio>
@@ -6005,7 +6005,7 @@
                                           </p:endCondLst>
                                         </p:cTn>
                                         <p:tgtEl>
-                                          <p:sndTgt r:embed="rIdSnd1" name="pop.wav"/>
+                                          <p:sndTgt r:embed="rIdSnd6" name="pluck3.wav"/>
                                         </p:tgtEl>
                                       </p:cMediaNode>
                                     </p:audio>
@@ -6077,7 +6077,7 @@
                                           </p:endCondLst>
                                         </p:cTn>
                                         <p:tgtEl>
-                                          <p:sndTgt r:embed="rIdSnd2" name="ding.wav"/>
+                                          <p:sndTgt r:embed="rIdSnd7" name="bell3.wav"/>
                                         </p:tgtEl>
                                       </p:cMediaNode>
                                     </p:audio>
@@ -6149,7 +6149,7 @@
                                           </p:endCondLst>
                                         </p:cTn>
                                         <p:tgtEl>
-                                          <p:sndTgt r:embed="rIdSnd3" name="tick.wav"/>
+                                          <p:sndTgt r:embed="rIdSnd8" name="whoosh.wav"/>
                                         </p:tgtEl>
                                       </p:cMediaNode>
                                     </p:audio>
@@ -6221,7 +6221,7 @@
                                           </p:endCondLst>
                                         </p:cTn>
                                         <p:tgtEl>
-                                          <p:sndTgt r:embed="rIdSnd4" name="win.wav"/>
+                                          <p:sndTgt r:embed="rIdSnd9" name="win.wav"/>
                                         </p:tgtEl>
                                       </p:cMediaNode>
                                     </p:audio>
@@ -7067,7 +7067,7 @@
                                           </p:endCondLst>
                                         </p:cTn>
                                         <p:tgtEl>
-                                          <p:sndTgt r:embed="rIdSnd1" name="pop.wav"/>
+                                          <p:sndTgt r:embed="rIdSnd1" name="pluck1.wav"/>
                                         </p:tgtEl>
                                       </p:cMediaNode>
                                     </p:audio>
@@ -7139,7 +7139,7 @@
                                           </p:endCondLst>
                                         </p:cTn>
                                         <p:tgtEl>
-                                          <p:sndTgt r:embed="rIdSnd2" name="ding.wav"/>
+                                          <p:sndTgt r:embed="rIdSnd2" name="bell1.wav"/>
                                         </p:tgtEl>
                                       </p:cMediaNode>
                                     </p:audio>
@@ -7211,7 +7211,7 @@
                                           </p:endCondLst>
                                         </p:cTn>
                                         <p:tgtEl>
-                                          <p:sndTgt r:embed="rIdSnd3" name="tick.wav"/>
+                                          <p:sndTgt r:embed="rIdSnd3" name="bloop.wav"/>
                                         </p:tgtEl>
                                       </p:cMediaNode>
                                     </p:audio>
@@ -7283,7 +7283,7 @@
                                           </p:endCondLst>
                                         </p:cTn>
                                         <p:tgtEl>
-                                          <p:sndTgt r:embed="rIdSnd1" name="pop.wav"/>
+                                          <p:sndTgt r:embed="rIdSnd4" name="pluck2.wav"/>
                                         </p:tgtEl>
                                       </p:cMediaNode>
                                     </p:audio>
@@ -7355,7 +7355,7 @@
                                           </p:endCondLst>
                                         </p:cTn>
                                         <p:tgtEl>
-                                          <p:sndTgt r:embed="rIdSnd2" name="ding.wav"/>
+                                          <p:sndTgt r:embed="rIdSnd5" name="bell2.wav"/>
                                         </p:tgtEl>
                                       </p:cMediaNode>
                                     </p:audio>
@@ -7427,7 +7427,7 @@
                                           </p:endCondLst>
                                         </p:cTn>
                                         <p:tgtEl>
-                                          <p:sndTgt r:embed="rIdSnd3" name="tick.wav"/>
+                                          <p:sndTgt r:embed="rIdSnd3" name="bloop.wav"/>
                                         </p:tgtEl>
                                       </p:cMediaNode>
                                     </p:audio>
@@ -7499,7 +7499,7 @@
                                           </p:endCondLst>
                                         </p:cTn>
                                         <p:tgtEl>
-                                          <p:sndTgt r:embed="rIdSnd1" name="pop.wav"/>
+                                          <p:sndTgt r:embed="rIdSnd6" name="pluck3.wav"/>
                                         </p:tgtEl>
                                       </p:cMediaNode>
                                     </p:audio>
@@ -7571,7 +7571,7 @@
                                           </p:endCondLst>
                                         </p:cTn>
                                         <p:tgtEl>
-                                          <p:sndTgt r:embed="rIdSnd2" name="ding.wav"/>
+                                          <p:sndTgt r:embed="rIdSnd7" name="bell3.wav"/>
                                         </p:tgtEl>
                                       </p:cMediaNode>
                                     </p:audio>
@@ -7643,7 +7643,7 @@
                                           </p:endCondLst>
                                         </p:cTn>
                                         <p:tgtEl>
-                                          <p:sndTgt r:embed="rIdSnd3" name="tick.wav"/>
+                                          <p:sndTgt r:embed="rIdSnd8" name="whoosh.wav"/>
                                         </p:tgtEl>
                                       </p:cMediaNode>
                                     </p:audio>
@@ -7715,7 +7715,7 @@
                                           </p:endCondLst>
                                         </p:cTn>
                                         <p:tgtEl>
-                                          <p:sndTgt r:embed="rIdSnd4" name="win.wav"/>
+                                          <p:sndTgt r:embed="rIdSnd9" name="win.wav"/>
                                         </p:tgtEl>
                                       </p:cMediaNode>
                                     </p:audio>
@@ -8561,7 +8561,7 @@
                                           </p:endCondLst>
                                         </p:cTn>
                                         <p:tgtEl>
-                                          <p:sndTgt r:embed="rIdSnd1" name="pop.wav"/>
+                                          <p:sndTgt r:embed="rIdSnd1" name="pluck1.wav"/>
                                         </p:tgtEl>
                                       </p:cMediaNode>
                                     </p:audio>
@@ -8633,7 +8633,7 @@
                                           </p:endCondLst>
                                         </p:cTn>
                                         <p:tgtEl>
-                                          <p:sndTgt r:embed="rIdSnd2" name="ding.wav"/>
+                                          <p:sndTgt r:embed="rIdSnd2" name="bell1.wav"/>
                                         </p:tgtEl>
                                       </p:cMediaNode>
                                     </p:audio>
@@ -8705,7 +8705,7 @@
                                           </p:endCondLst>
                                         </p:cTn>
                                         <p:tgtEl>
-                                          <p:sndTgt r:embed="rIdSnd3" name="tick.wav"/>
+                                          <p:sndTgt r:embed="rIdSnd3" name="bloop.wav"/>
                                         </p:tgtEl>
                                       </p:cMediaNode>
                                     </p:audio>
@@ -8777,7 +8777,7 @@
                                           </p:endCondLst>
                                         </p:cTn>
                                         <p:tgtEl>
-                                          <p:sndTgt r:embed="rIdSnd1" name="pop.wav"/>
+                                          <p:sndTgt r:embed="rIdSnd4" name="pluck2.wav"/>
                                         </p:tgtEl>
                                       </p:cMediaNode>
                                     </p:audio>
@@ -8849,7 +8849,7 @@
                                           </p:endCondLst>
                                         </p:cTn>
                                         <p:tgtEl>
-                                          <p:sndTgt r:embed="rIdSnd2" name="ding.wav"/>
+                                          <p:sndTgt r:embed="rIdSnd5" name="bell2.wav"/>
                                         </p:tgtEl>
                                       </p:cMediaNode>
                                     </p:audio>
@@ -8921,7 +8921,7 @@
                                           </p:endCondLst>
                                         </p:cTn>
                                         <p:tgtEl>
-                                          <p:sndTgt r:embed="rIdSnd3" name="tick.wav"/>
+                                          <p:sndTgt r:embed="rIdSnd3" name="bloop.wav"/>
                                         </p:tgtEl>
                                       </p:cMediaNode>
                                     </p:audio>
@@ -8993,7 +8993,7 @@
                                           </p:endCondLst>
                                         </p:cTn>
                                         <p:tgtEl>
-                                          <p:sndTgt r:embed="rIdSnd1" name="pop.wav"/>
+                                          <p:sndTgt r:embed="rIdSnd6" name="pluck3.wav"/>
                                         </p:tgtEl>
                                       </p:cMediaNode>
                                     </p:audio>
@@ -9065,7 +9065,7 @@
                                           </p:endCondLst>
                                         </p:cTn>
                                         <p:tgtEl>
-                                          <p:sndTgt r:embed="rIdSnd2" name="ding.wav"/>
+                                          <p:sndTgt r:embed="rIdSnd7" name="bell3.wav"/>
                                         </p:tgtEl>
                                       </p:cMediaNode>
                                     </p:audio>
@@ -9137,7 +9137,7 @@
                                           </p:endCondLst>
                                         </p:cTn>
                                         <p:tgtEl>
-                                          <p:sndTgt r:embed="rIdSnd3" name="tick.wav"/>
+                                          <p:sndTgt r:embed="rIdSnd8" name="whoosh.wav"/>
                                         </p:tgtEl>
                                       </p:cMediaNode>
                                     </p:audio>
@@ -9209,7 +9209,7 @@
                                           </p:endCondLst>
                                         </p:cTn>
                                         <p:tgtEl>
-                                          <p:sndTgt r:embed="rIdSnd4" name="win.wav"/>
+                                          <p:sndTgt r:embed="rIdSnd9" name="win.wav"/>
                                         </p:tgtEl>
                                       </p:cMediaNode>
                                     </p:audio>
@@ -10055,7 +10055,7 @@
                                           </p:endCondLst>
                                         </p:cTn>
                                         <p:tgtEl>
-                                          <p:sndTgt r:embed="rIdSnd1" name="pop.wav"/>
+                                          <p:sndTgt r:embed="rIdSnd1" name="pluck1.wav"/>
                                         </p:tgtEl>
                                       </p:cMediaNode>
                                     </p:audio>
@@ -10127,7 +10127,7 @@
                                           </p:endCondLst>
                                         </p:cTn>
                                         <p:tgtEl>
-                                          <p:sndTgt r:embed="rIdSnd2" name="ding.wav"/>
+                                          <p:sndTgt r:embed="rIdSnd2" name="bell1.wav"/>
                                         </p:tgtEl>
                                       </p:cMediaNode>
                                     </p:audio>
@@ -10199,7 +10199,7 @@
                                           </p:endCondLst>
                                         </p:cTn>
                                         <p:tgtEl>
-                                          <p:sndTgt r:embed="rIdSnd3" name="tick.wav"/>
+                                          <p:sndTgt r:embed="rIdSnd3" name="bloop.wav"/>
                                         </p:tgtEl>
                                       </p:cMediaNode>
                                     </p:audio>
@@ -10271,7 +10271,7 @@
                                           </p:endCondLst>
                                         </p:cTn>
                                         <p:tgtEl>
-                                          <p:sndTgt r:embed="rIdSnd1" name="pop.wav"/>
+                                          <p:sndTgt r:embed="rIdSnd4" name="pluck2.wav"/>
                                         </p:tgtEl>
                                       </p:cMediaNode>
                                     </p:audio>
@@ -10343,7 +10343,7 @@
                                           </p:endCondLst>
                                         </p:cTn>
                                         <p:tgtEl>
-                                          <p:sndTgt r:embed="rIdSnd2" name="ding.wav"/>
+                                          <p:sndTgt r:embed="rIdSnd5" name="bell2.wav"/>
                                         </p:tgtEl>
                                       </p:cMediaNode>
                                     </p:audio>
@@ -10415,7 +10415,7 @@
                                           </p:endCondLst>
                                         </p:cTn>
                                         <p:tgtEl>
-                                          <p:sndTgt r:embed="rIdSnd3" name="tick.wav"/>
+                                          <p:sndTgt r:embed="rIdSnd3" name="bloop.wav"/>
                                         </p:tgtEl>
                                       </p:cMediaNode>
                                     </p:audio>
@@ -10487,7 +10487,7 @@
                                           </p:endCondLst>
                                         </p:cTn>
                                         <p:tgtEl>
-                                          <p:sndTgt r:embed="rIdSnd1" name="pop.wav"/>
+                                          <p:sndTgt r:embed="rIdSnd6" name="pluck3.wav"/>
                                         </p:tgtEl>
                                       </p:cMediaNode>
                                     </p:audio>
@@ -10559,7 +10559,7 @@
                                           </p:endCondLst>
                                         </p:cTn>
                                         <p:tgtEl>
-                                          <p:sndTgt r:embed="rIdSnd2" name="ding.wav"/>
+                                          <p:sndTgt r:embed="rIdSnd7" name="bell3.wav"/>
                                         </p:tgtEl>
                                       </p:cMediaNode>
                                     </p:audio>
@@ -10631,7 +10631,7 @@
                                           </p:endCondLst>
                                         </p:cTn>
                                         <p:tgtEl>
-                                          <p:sndTgt r:embed="rIdSnd3" name="tick.wav"/>
+                                          <p:sndTgt r:embed="rIdSnd8" name="whoosh.wav"/>
                                         </p:tgtEl>
                                       </p:cMediaNode>
                                     </p:audio>
@@ -10703,7 +10703,7 @@
                                           </p:endCondLst>
                                         </p:cTn>
                                         <p:tgtEl>
-                                          <p:sndTgt r:embed="rIdSnd4" name="win.wav"/>
+                                          <p:sndTgt r:embed="rIdSnd9" name="win.wav"/>
                                         </p:tgtEl>
                                       </p:cMediaNode>
                                     </p:audio>
@@ -11549,7 +11549,7 @@
                                           </p:endCondLst>
                                         </p:cTn>
                                         <p:tgtEl>
-                                          <p:sndTgt r:embed="rIdSnd1" name="pop.wav"/>
+                                          <p:sndTgt r:embed="rIdSnd1" name="pluck1.wav"/>
                                         </p:tgtEl>
                                       </p:cMediaNode>
                                     </p:audio>
@@ -11621,7 +11621,7 @@
                                           </p:endCondLst>
                                         </p:cTn>
                                         <p:tgtEl>
-                                          <p:sndTgt r:embed="rIdSnd2" name="ding.wav"/>
+                                          <p:sndTgt r:embed="rIdSnd2" name="bell1.wav"/>
                                         </p:tgtEl>
                                       </p:cMediaNode>
                                     </p:audio>
@@ -11693,7 +11693,7 @@
                                           </p:endCondLst>
                                         </p:cTn>
                                         <p:tgtEl>
-                                          <p:sndTgt r:embed="rIdSnd3" name="tick.wav"/>
+                                          <p:sndTgt r:embed="rIdSnd3" name="bloop.wav"/>
                                         </p:tgtEl>
                                       </p:cMediaNode>
                                     </p:audio>
@@ -11765,7 +11765,7 @@
                                           </p:endCondLst>
                                         </p:cTn>
                                         <p:tgtEl>
-                                          <p:sndTgt r:embed="rIdSnd1" name="pop.wav"/>
+                                          <p:sndTgt r:embed="rIdSnd4" name="pluck2.wav"/>
                                         </p:tgtEl>
                                       </p:cMediaNode>
                                     </p:audio>
@@ -11837,7 +11837,7 @@
                                           </p:endCondLst>
                                         </p:cTn>
                                         <p:tgtEl>
-                                          <p:sndTgt r:embed="rIdSnd2" name="ding.wav"/>
+                                          <p:sndTgt r:embed="rIdSnd5" name="bell2.wav"/>
                                         </p:tgtEl>
                                       </p:cMediaNode>
                                     </p:audio>
@@ -11909,7 +11909,7 @@
                                           </p:endCondLst>
                                         </p:cTn>
                                         <p:tgtEl>
-                                          <p:sndTgt r:embed="rIdSnd3" name="tick.wav"/>
+                                          <p:sndTgt r:embed="rIdSnd3" name="bloop.wav"/>
                                         </p:tgtEl>
                                       </p:cMediaNode>
                                     </p:audio>
@@ -11981,7 +11981,7 @@
                                           </p:endCondLst>
                                         </p:cTn>
                                         <p:tgtEl>
-                                          <p:sndTgt r:embed="rIdSnd1" name="pop.wav"/>
+                                          <p:sndTgt r:embed="rIdSnd6" name="pluck3.wav"/>
                                         </p:tgtEl>
                                       </p:cMediaNode>
                                     </p:audio>
@@ -12053,7 +12053,7 @@
                                           </p:endCondLst>
                                         </p:cTn>
                                         <p:tgtEl>
-                                          <p:sndTgt r:embed="rIdSnd2" name="ding.wav"/>
+                                          <p:sndTgt r:embed="rIdSnd7" name="bell3.wav"/>
                                         </p:tgtEl>
                                       </p:cMediaNode>
                                     </p:audio>
@@ -12125,7 +12125,7 @@
                                           </p:endCondLst>
                                         </p:cTn>
                                         <p:tgtEl>
-                                          <p:sndTgt r:embed="rIdSnd3" name="tick.wav"/>
+                                          <p:sndTgt r:embed="rIdSnd8" name="whoosh.wav"/>
                                         </p:tgtEl>
                                       </p:cMediaNode>
                                     </p:audio>
@@ -12197,7 +12197,7 @@
                                           </p:endCondLst>
                                         </p:cTn>
                                         <p:tgtEl>
-                                          <p:sndTgt r:embed="rIdSnd4" name="win.wav"/>
+                                          <p:sndTgt r:embed="rIdSnd9" name="win.wav"/>
                                         </p:tgtEl>
                                       </p:cMediaNode>
                                     </p:audio>
@@ -12915,7 +12915,7 @@
                                           </p:endCondLst>
                                         </p:cTn>
                                         <p:tgtEl>
-                                          <p:sndTgt r:embed="rIdSnd1" name="pop.wav"/>
+                                          <p:sndTgt r:embed="rIdSnd1" name="pluck1.wav"/>
                                         </p:tgtEl>
                                       </p:cMediaNode>
                                     </p:audio>
@@ -12987,7 +12987,7 @@
                                           </p:endCondLst>
                                         </p:cTn>
                                         <p:tgtEl>
-                                          <p:sndTgt r:embed="rIdSnd2" name="ding.wav"/>
+                                          <p:sndTgt r:embed="rIdSnd2" name="bell1.wav"/>
                                         </p:tgtEl>
                                       </p:cMediaNode>
                                     </p:audio>
@@ -13059,7 +13059,7 @@
                                           </p:endCondLst>
                                         </p:cTn>
                                         <p:tgtEl>
-                                          <p:sndTgt r:embed="rIdSnd3" name="tick.wav"/>
+                                          <p:sndTgt r:embed="rIdSnd3" name="bloop.wav"/>
                                         </p:tgtEl>
                                       </p:cMediaNode>
                                     </p:audio>
@@ -13131,7 +13131,7 @@
                                           </p:endCondLst>
                                         </p:cTn>
                                         <p:tgtEl>
-                                          <p:sndTgt r:embed="rIdSnd1" name="pop.wav"/>
+                                          <p:sndTgt r:embed="rIdSnd4" name="pluck2.wav"/>
                                         </p:tgtEl>
                                       </p:cMediaNode>
                                     </p:audio>
@@ -13203,7 +13203,7 @@
                                           </p:endCondLst>
                                         </p:cTn>
                                         <p:tgtEl>
-                                          <p:sndTgt r:embed="rIdSnd2" name="ding.wav"/>
+                                          <p:sndTgt r:embed="rIdSnd5" name="bell2.wav"/>
                                         </p:tgtEl>
                                       </p:cMediaNode>
                                     </p:audio>
@@ -13275,7 +13275,7 @@
                                           </p:endCondLst>
                                         </p:cTn>
                                         <p:tgtEl>
-                                          <p:sndTgt r:embed="rIdSnd3" name="tick.wav"/>
+                                          <p:sndTgt r:embed="rIdSnd6" name="whoosh.wav"/>
                                         </p:tgtEl>
                                       </p:cMediaNode>
                                     </p:audio>
@@ -13347,7 +13347,7 @@
                                           </p:endCondLst>
                                         </p:cTn>
                                         <p:tgtEl>
-                                          <p:sndTgt r:embed="rIdSnd4" name="win.wav"/>
+                                          <p:sndTgt r:embed="rIdSnd7" name="win.wav"/>
                                         </p:tgtEl>
                                       </p:cMediaNode>
                                     </p:audio>
@@ -14062,7 +14062,7 @@
                                           </p:endCondLst>
                                         </p:cTn>
                                         <p:tgtEl>
-                                          <p:sndTgt r:embed="rIdSnd1" name="pop.wav"/>
+                                          <p:sndTgt r:embed="rIdSnd1" name="pluck1.wav"/>
                                         </p:tgtEl>
                                       </p:cMediaNode>
                                     </p:audio>
@@ -14134,7 +14134,7 @@
                                           </p:endCondLst>
                                         </p:cTn>
                                         <p:tgtEl>
-                                          <p:sndTgt r:embed="rIdSnd2" name="ding.wav"/>
+                                          <p:sndTgt r:embed="rIdSnd2" name="bell1.wav"/>
                                         </p:tgtEl>
                                       </p:cMediaNode>
                                     </p:audio>
@@ -14206,7 +14206,7 @@
                                           </p:endCondLst>
                                         </p:cTn>
                                         <p:tgtEl>
-                                          <p:sndTgt r:embed="rIdSnd3" name="tick.wav"/>
+                                          <p:sndTgt r:embed="rIdSnd3" name="bloop.wav"/>
                                         </p:tgtEl>
                                       </p:cMediaNode>
                                     </p:audio>
@@ -14278,7 +14278,7 @@
                                           </p:endCondLst>
                                         </p:cTn>
                                         <p:tgtEl>
-                                          <p:sndTgt r:embed="rIdSnd1" name="pop.wav"/>
+                                          <p:sndTgt r:embed="rIdSnd4" name="pluck2.wav"/>
                                         </p:tgtEl>
                                       </p:cMediaNode>
                                     </p:audio>
@@ -14350,7 +14350,7 @@
                                           </p:endCondLst>
                                         </p:cTn>
                                         <p:tgtEl>
-                                          <p:sndTgt r:embed="rIdSnd2" name="ding.wav"/>
+                                          <p:sndTgt r:embed="rIdSnd5" name="bell2.wav"/>
                                         </p:tgtEl>
                                       </p:cMediaNode>
                                     </p:audio>
@@ -14422,7 +14422,7 @@
                                           </p:endCondLst>
                                         </p:cTn>
                                         <p:tgtEl>
-                                          <p:sndTgt r:embed="rIdSnd3" name="tick.wav"/>
+                                          <p:sndTgt r:embed="rIdSnd6" name="whoosh.wav"/>
                                         </p:tgtEl>
                                       </p:cMediaNode>
                                     </p:audio>
@@ -14494,7 +14494,7 @@
                                           </p:endCondLst>
                                         </p:cTn>
                                         <p:tgtEl>
-                                          <p:sndTgt r:embed="rIdSnd4" name="win.wav"/>
+                                          <p:sndTgt r:embed="rIdSnd7" name="win.wav"/>
                                         </p:tgtEl>
                                       </p:cMediaNode>
                                     </p:audio>
@@ -15209,7 +15209,7 @@
                                           </p:endCondLst>
                                         </p:cTn>
                                         <p:tgtEl>
-                                          <p:sndTgt r:embed="rIdSnd1" name="pop.wav"/>
+                                          <p:sndTgt r:embed="rIdSnd1" name="pluck1.wav"/>
                                         </p:tgtEl>
                                       </p:cMediaNode>
                                     </p:audio>
@@ -15281,7 +15281,7 @@
                                           </p:endCondLst>
                                         </p:cTn>
                                         <p:tgtEl>
-                                          <p:sndTgt r:embed="rIdSnd2" name="ding.wav"/>
+                                          <p:sndTgt r:embed="rIdSnd2" name="bell1.wav"/>
                                         </p:tgtEl>
                                       </p:cMediaNode>
                                     </p:audio>
@@ -15353,7 +15353,7 @@
                                           </p:endCondLst>
                                         </p:cTn>
                                         <p:tgtEl>
-                                          <p:sndTgt r:embed="rIdSnd3" name="tick.wav"/>
+                                          <p:sndTgt r:embed="rIdSnd3" name="bloop.wav"/>
                                         </p:tgtEl>
                                       </p:cMediaNode>
                                     </p:audio>
@@ -15425,7 +15425,7 @@
                                           </p:endCondLst>
                                         </p:cTn>
                                         <p:tgtEl>
-                                          <p:sndTgt r:embed="rIdSnd1" name="pop.wav"/>
+                                          <p:sndTgt r:embed="rIdSnd4" name="pluck2.wav"/>
                                         </p:tgtEl>
                                       </p:cMediaNode>
                                     </p:audio>
@@ -15497,7 +15497,7 @@
                                           </p:endCondLst>
                                         </p:cTn>
                                         <p:tgtEl>
-                                          <p:sndTgt r:embed="rIdSnd2" name="ding.wav"/>
+                                          <p:sndTgt r:embed="rIdSnd5" name="bell2.wav"/>
                                         </p:tgtEl>
                                       </p:cMediaNode>
                                     </p:audio>
@@ -15569,7 +15569,7 @@
                                           </p:endCondLst>
                                         </p:cTn>
                                         <p:tgtEl>
-                                          <p:sndTgt r:embed="rIdSnd3" name="tick.wav"/>
+                                          <p:sndTgt r:embed="rIdSnd6" name="whoosh.wav"/>
                                         </p:tgtEl>
                                       </p:cMediaNode>
                                     </p:audio>
@@ -15641,7 +15641,7 @@
                                           </p:endCondLst>
                                         </p:cTn>
                                         <p:tgtEl>
-                                          <p:sndTgt r:embed="rIdSnd4" name="win.wav"/>
+                                          <p:sndTgt r:embed="rIdSnd7" name="win.wav"/>
                                         </p:tgtEl>
                                       </p:cMediaNode>
                                     </p:audio>
@@ -16356,7 +16356,7 @@
                                           </p:endCondLst>
                                         </p:cTn>
                                         <p:tgtEl>
-                                          <p:sndTgt r:embed="rIdSnd1" name="pop.wav"/>
+                                          <p:sndTgt r:embed="rIdSnd1" name="pluck1.wav"/>
                                         </p:tgtEl>
                                       </p:cMediaNode>
                                     </p:audio>
@@ -16428,7 +16428,7 @@
                                           </p:endCondLst>
                                         </p:cTn>
                                         <p:tgtEl>
-                                          <p:sndTgt r:embed="rIdSnd2" name="ding.wav"/>
+                                          <p:sndTgt r:embed="rIdSnd2" name="bell1.wav"/>
                                         </p:tgtEl>
                                       </p:cMediaNode>
                                     </p:audio>
@@ -16500,7 +16500,7 @@
                                           </p:endCondLst>
                                         </p:cTn>
                                         <p:tgtEl>
-                                          <p:sndTgt r:embed="rIdSnd3" name="tick.wav"/>
+                                          <p:sndTgt r:embed="rIdSnd3" name="bloop.wav"/>
                                         </p:tgtEl>
                                       </p:cMediaNode>
                                     </p:audio>
@@ -16572,7 +16572,7 @@
                                           </p:endCondLst>
                                         </p:cTn>
                                         <p:tgtEl>
-                                          <p:sndTgt r:embed="rIdSnd1" name="pop.wav"/>
+                                          <p:sndTgt r:embed="rIdSnd4" name="pluck2.wav"/>
                                         </p:tgtEl>
                                       </p:cMediaNode>
                                     </p:audio>
@@ -16644,7 +16644,7 @@
                                           </p:endCondLst>
                                         </p:cTn>
                                         <p:tgtEl>
-                                          <p:sndTgt r:embed="rIdSnd2" name="ding.wav"/>
+                                          <p:sndTgt r:embed="rIdSnd5" name="bell2.wav"/>
                                         </p:tgtEl>
                                       </p:cMediaNode>
                                     </p:audio>
@@ -16716,7 +16716,7 @@
                                           </p:endCondLst>
                                         </p:cTn>
                                         <p:tgtEl>
-                                          <p:sndTgt r:embed="rIdSnd3" name="tick.wav"/>
+                                          <p:sndTgt r:embed="rIdSnd6" name="whoosh.wav"/>
                                         </p:tgtEl>
                                       </p:cMediaNode>
                                     </p:audio>
@@ -16788,7 +16788,7 @@
                                           </p:endCondLst>
                                         </p:cTn>
                                         <p:tgtEl>
-                                          <p:sndTgt r:embed="rIdSnd4" name="win.wav"/>
+                                          <p:sndTgt r:embed="rIdSnd7" name="win.wav"/>
                                         </p:tgtEl>
                                       </p:cMediaNode>
                                     </p:audio>
@@ -17503,7 +17503,7 @@
                                           </p:endCondLst>
                                         </p:cTn>
                                         <p:tgtEl>
-                                          <p:sndTgt r:embed="rIdSnd1" name="pop.wav"/>
+                                          <p:sndTgt r:embed="rIdSnd1" name="pluck1.wav"/>
                                         </p:tgtEl>
                                       </p:cMediaNode>
                                     </p:audio>
@@ -17575,7 +17575,7 @@
                                           </p:endCondLst>
                                         </p:cTn>
                                         <p:tgtEl>
-                                          <p:sndTgt r:embed="rIdSnd2" name="ding.wav"/>
+                                          <p:sndTgt r:embed="rIdSnd2" name="bell1.wav"/>
                                         </p:tgtEl>
                                       </p:cMediaNode>
                                     </p:audio>
@@ -17647,7 +17647,7 @@
                                           </p:endCondLst>
                                         </p:cTn>
                                         <p:tgtEl>
-                                          <p:sndTgt r:embed="rIdSnd3" name="tick.wav"/>
+                                          <p:sndTgt r:embed="rIdSnd3" name="bloop.wav"/>
                                         </p:tgtEl>
                                       </p:cMediaNode>
                                     </p:audio>
@@ -17719,7 +17719,7 @@
                                           </p:endCondLst>
                                         </p:cTn>
                                         <p:tgtEl>
-                                          <p:sndTgt r:embed="rIdSnd1" name="pop.wav"/>
+                                          <p:sndTgt r:embed="rIdSnd4" name="pluck2.wav"/>
                                         </p:tgtEl>
                                       </p:cMediaNode>
                                     </p:audio>
@@ -17791,7 +17791,7 @@
                                           </p:endCondLst>
                                         </p:cTn>
                                         <p:tgtEl>
-                                          <p:sndTgt r:embed="rIdSnd2" name="ding.wav"/>
+                                          <p:sndTgt r:embed="rIdSnd5" name="bell2.wav"/>
                                         </p:tgtEl>
                                       </p:cMediaNode>
                                     </p:audio>
@@ -17863,7 +17863,7 @@
                                           </p:endCondLst>
                                         </p:cTn>
                                         <p:tgtEl>
-                                          <p:sndTgt r:embed="rIdSnd3" name="tick.wav"/>
+                                          <p:sndTgt r:embed="rIdSnd6" name="whoosh.wav"/>
                                         </p:tgtEl>
                                       </p:cMediaNode>
                                     </p:audio>
@@ -17935,7 +17935,7 @@
                                           </p:endCondLst>
                                         </p:cTn>
                                         <p:tgtEl>
-                                          <p:sndTgt r:embed="rIdSnd4" name="win.wav"/>
+                                          <p:sndTgt r:embed="rIdSnd7" name="win.wav"/>
                                         </p:tgtEl>
                                       </p:cMediaNode>
                                     </p:audio>
@@ -18650,7 +18650,7 @@
                                           </p:endCondLst>
                                         </p:cTn>
                                         <p:tgtEl>
-                                          <p:sndTgt r:embed="rIdSnd1" name="pop.wav"/>
+                                          <p:sndTgt r:embed="rIdSnd1" name="pluck1.wav"/>
                                         </p:tgtEl>
                                       </p:cMediaNode>
                                     </p:audio>
@@ -18722,7 +18722,7 @@
                                           </p:endCondLst>
                                         </p:cTn>
                                         <p:tgtEl>
-                                          <p:sndTgt r:embed="rIdSnd2" name="ding.wav"/>
+                                          <p:sndTgt r:embed="rIdSnd2" name="bell1.wav"/>
                                         </p:tgtEl>
                                       </p:cMediaNode>
                                     </p:audio>
@@ -18794,7 +18794,7 @@
                                           </p:endCondLst>
                                         </p:cTn>
                                         <p:tgtEl>
-                                          <p:sndTgt r:embed="rIdSnd3" name="tick.wav"/>
+                                          <p:sndTgt r:embed="rIdSnd3" name="bloop.wav"/>
                                         </p:tgtEl>
                                       </p:cMediaNode>
                                     </p:audio>
@@ -18866,7 +18866,7 @@
                                           </p:endCondLst>
                                         </p:cTn>
                                         <p:tgtEl>
-                                          <p:sndTgt r:embed="rIdSnd1" name="pop.wav"/>
+                                          <p:sndTgt r:embed="rIdSnd4" name="pluck2.wav"/>
                                         </p:tgtEl>
                                       </p:cMediaNode>
                                     </p:audio>
@@ -18938,7 +18938,7 @@
                                           </p:endCondLst>
                                         </p:cTn>
                                         <p:tgtEl>
-                                          <p:sndTgt r:embed="rIdSnd2" name="ding.wav"/>
+                                          <p:sndTgt r:embed="rIdSnd5" name="bell2.wav"/>
                                         </p:tgtEl>
                                       </p:cMediaNode>
                                     </p:audio>
@@ -19010,7 +19010,7 @@
                                           </p:endCondLst>
                                         </p:cTn>
                                         <p:tgtEl>
-                                          <p:sndTgt r:embed="rIdSnd3" name="tick.wav"/>
+                                          <p:sndTgt r:embed="rIdSnd6" name="whoosh.wav"/>
                                         </p:tgtEl>
                                       </p:cMediaNode>
                                     </p:audio>
@@ -19082,7 +19082,7 @@
                                           </p:endCondLst>
                                         </p:cTn>
                                         <p:tgtEl>
-                                          <p:sndTgt r:embed="rIdSnd4" name="win.wav"/>
+                                          <p:sndTgt r:embed="rIdSnd7" name="win.wav"/>
                                         </p:tgtEl>
                                       </p:cMediaNode>
                                     </p:audio>
@@ -19797,7 +19797,7 @@
                                           </p:endCondLst>
                                         </p:cTn>
                                         <p:tgtEl>
-                                          <p:sndTgt r:embed="rIdSnd1" name="pop.wav"/>
+                                          <p:sndTgt r:embed="rIdSnd1" name="pluck1.wav"/>
                                         </p:tgtEl>
                                       </p:cMediaNode>
                                     </p:audio>
@@ -19869,7 +19869,7 @@
                                           </p:endCondLst>
                                         </p:cTn>
                                         <p:tgtEl>
-                                          <p:sndTgt r:embed="rIdSnd2" name="ding.wav"/>
+                                          <p:sndTgt r:embed="rIdSnd2" name="bell1.wav"/>
                                         </p:tgtEl>
                                       </p:cMediaNode>
                                     </p:audio>
@@ -19941,7 +19941,7 @@
                                           </p:endCondLst>
                                         </p:cTn>
                                         <p:tgtEl>
-                                          <p:sndTgt r:embed="rIdSnd3" name="tick.wav"/>
+                                          <p:sndTgt r:embed="rIdSnd3" name="bloop.wav"/>
                                         </p:tgtEl>
                                       </p:cMediaNode>
                                     </p:audio>
@@ -20013,7 +20013,7 @@
                                           </p:endCondLst>
                                         </p:cTn>
                                         <p:tgtEl>
-                                          <p:sndTgt r:embed="rIdSnd1" name="pop.wav"/>
+                                          <p:sndTgt r:embed="rIdSnd4" name="pluck2.wav"/>
                                         </p:tgtEl>
                                       </p:cMediaNode>
                                     </p:audio>
@@ -20085,7 +20085,7 @@
                                           </p:endCondLst>
                                         </p:cTn>
                                         <p:tgtEl>
-                                          <p:sndTgt r:embed="rIdSnd2" name="ding.wav"/>
+                                          <p:sndTgt r:embed="rIdSnd5" name="bell2.wav"/>
                                         </p:tgtEl>
                                       </p:cMediaNode>
                                     </p:audio>
@@ -20157,7 +20157,7 @@
                                           </p:endCondLst>
                                         </p:cTn>
                                         <p:tgtEl>
-                                          <p:sndTgt r:embed="rIdSnd3" name="tick.wav"/>
+                                          <p:sndTgt r:embed="rIdSnd6" name="whoosh.wav"/>
                                         </p:tgtEl>
                                       </p:cMediaNode>
                                     </p:audio>
@@ -20229,7 +20229,7 @@
                                           </p:endCondLst>
                                         </p:cTn>
                                         <p:tgtEl>
-                                          <p:sndTgt r:embed="rIdSnd4" name="win.wav"/>
+                                          <p:sndTgt r:embed="rIdSnd7" name="win.wav"/>
                                         </p:tgtEl>
                                       </p:cMediaNode>
                                     </p:audio>
@@ -20944,7 +20944,7 @@
                                           </p:endCondLst>
                                         </p:cTn>
                                         <p:tgtEl>
-                                          <p:sndTgt r:embed="rIdSnd1" name="pop.wav"/>
+                                          <p:sndTgt r:embed="rIdSnd1" name="pluck1.wav"/>
                                         </p:tgtEl>
                                       </p:cMediaNode>
                                     </p:audio>
@@ -21016,7 +21016,7 @@
                                           </p:endCondLst>
                                         </p:cTn>
                                         <p:tgtEl>
-                                          <p:sndTgt r:embed="rIdSnd2" name="ding.wav"/>
+                                          <p:sndTgt r:embed="rIdSnd2" name="bell1.wav"/>
                                         </p:tgtEl>
                                       </p:cMediaNode>
                                     </p:audio>
@@ -21088,7 +21088,7 @@
                                           </p:endCondLst>
                                         </p:cTn>
                                         <p:tgtEl>
-                                          <p:sndTgt r:embed="rIdSnd3" name="tick.wav"/>
+                                          <p:sndTgt r:embed="rIdSnd3" name="bloop.wav"/>
                                         </p:tgtEl>
                                       </p:cMediaNode>
                                     </p:audio>
@@ -21160,7 +21160,7 @@
                                           </p:endCondLst>
                                         </p:cTn>
                                         <p:tgtEl>
-                                          <p:sndTgt r:embed="rIdSnd1" name="pop.wav"/>
+                                          <p:sndTgt r:embed="rIdSnd4" name="pluck2.wav"/>
                                         </p:tgtEl>
                                       </p:cMediaNode>
                                     </p:audio>
@@ -21232,7 +21232,7 @@
                                           </p:endCondLst>
                                         </p:cTn>
                                         <p:tgtEl>
-                                          <p:sndTgt r:embed="rIdSnd2" name="ding.wav"/>
+                                          <p:sndTgt r:embed="rIdSnd5" name="bell2.wav"/>
                                         </p:tgtEl>
                                       </p:cMediaNode>
                                     </p:audio>
@@ -21304,7 +21304,7 @@
                                           </p:endCondLst>
                                         </p:cTn>
                                         <p:tgtEl>
-                                          <p:sndTgt r:embed="rIdSnd3" name="tick.wav"/>
+                                          <p:sndTgt r:embed="rIdSnd6" name="whoosh.wav"/>
                                         </p:tgtEl>
                                       </p:cMediaNode>
                                     </p:audio>
@@ -21376,7 +21376,7 @@
                                           </p:endCondLst>
                                         </p:cTn>
                                         <p:tgtEl>
-                                          <p:sndTgt r:embed="rIdSnd4" name="win.wav"/>
+                                          <p:sndTgt r:embed="rIdSnd7" name="win.wav"/>
                                         </p:tgtEl>
                                       </p:cMediaNode>
                                     </p:audio>
@@ -22091,7 +22091,7 @@
                                           </p:endCondLst>
                                         </p:cTn>
                                         <p:tgtEl>
-                                          <p:sndTgt r:embed="rIdSnd1" name="pop.wav"/>
+                                          <p:sndTgt r:embed="rIdSnd1" name="pluck1.wav"/>
                                         </p:tgtEl>
                                       </p:cMediaNode>
                                     </p:audio>
@@ -22163,7 +22163,7 @@
                                           </p:endCondLst>
                                         </p:cTn>
                                         <p:tgtEl>
-                                          <p:sndTgt r:embed="rIdSnd2" name="ding.wav"/>
+                                          <p:sndTgt r:embed="rIdSnd2" name="bell1.wav"/>
                                         </p:tgtEl>
                                       </p:cMediaNode>
                                     </p:audio>
@@ -22235,7 +22235,7 @@
                                           </p:endCondLst>
                                         </p:cTn>
                                         <p:tgtEl>
-                                          <p:sndTgt r:embed="rIdSnd3" name="tick.wav"/>
+                                          <p:sndTgt r:embed="rIdSnd3" name="bloop.wav"/>
                                         </p:tgtEl>
                                       </p:cMediaNode>
                                     </p:audio>
@@ -22307,7 +22307,7 @@
                                           </p:endCondLst>
                                         </p:cTn>
                                         <p:tgtEl>
-                                          <p:sndTgt r:embed="rIdSnd1" name="pop.wav"/>
+                                          <p:sndTgt r:embed="rIdSnd4" name="pluck2.wav"/>
                                         </p:tgtEl>
                                       </p:cMediaNode>
                                     </p:audio>
@@ -22379,7 +22379,7 @@
                                           </p:endCondLst>
                                         </p:cTn>
                                         <p:tgtEl>
-                                          <p:sndTgt r:embed="rIdSnd2" name="ding.wav"/>
+                                          <p:sndTgt r:embed="rIdSnd5" name="bell2.wav"/>
                                         </p:tgtEl>
                                       </p:cMediaNode>
                                     </p:audio>
@@ -22451,7 +22451,7 @@
                                           </p:endCondLst>
                                         </p:cTn>
                                         <p:tgtEl>
-                                          <p:sndTgt r:embed="rIdSnd3" name="tick.wav"/>
+                                          <p:sndTgt r:embed="rIdSnd6" name="whoosh.wav"/>
                                         </p:tgtEl>
                                       </p:cMediaNode>
                                     </p:audio>
@@ -22523,7 +22523,7 @@
                                           </p:endCondLst>
                                         </p:cTn>
                                         <p:tgtEl>
-                                          <p:sndTgt r:embed="rIdSnd4" name="win.wav"/>
+                                          <p:sndTgt r:embed="rIdSnd7" name="win.wav"/>
                                         </p:tgtEl>
                                       </p:cMediaNode>
                                     </p:audio>
@@ -23238,7 +23238,7 @@
                                           </p:endCondLst>
                                         </p:cTn>
                                         <p:tgtEl>
-                                          <p:sndTgt r:embed="rIdSnd1" name="pop.wav"/>
+                                          <p:sndTgt r:embed="rIdSnd1" name="pluck1.wav"/>
                                         </p:tgtEl>
                                       </p:cMediaNode>
                                     </p:audio>
@@ -23310,7 +23310,7 @@
                                           </p:endCondLst>
                                         </p:cTn>
                                         <p:tgtEl>
-                                          <p:sndTgt r:embed="rIdSnd2" name="ding.wav"/>
+                                          <p:sndTgt r:embed="rIdSnd2" name="bell1.wav"/>
                                         </p:tgtEl>
                                       </p:cMediaNode>
                                     </p:audio>
@@ -23382,7 +23382,7 @@
                                           </p:endCondLst>
                                         </p:cTn>
                                         <p:tgtEl>
-                                          <p:sndTgt r:embed="rIdSnd3" name="tick.wav"/>
+                                          <p:sndTgt r:embed="rIdSnd3" name="bloop.wav"/>
                                         </p:tgtEl>
                                       </p:cMediaNode>
                                     </p:audio>
@@ -23454,7 +23454,7 @@
                                           </p:endCondLst>
                                         </p:cTn>
                                         <p:tgtEl>
-                                          <p:sndTgt r:embed="rIdSnd1" name="pop.wav"/>
+                                          <p:sndTgt r:embed="rIdSnd4" name="pluck2.wav"/>
                                         </p:tgtEl>
                                       </p:cMediaNode>
                                     </p:audio>
@@ -23526,7 +23526,7 @@
                                           </p:endCondLst>
                                         </p:cTn>
                                         <p:tgtEl>
-                                          <p:sndTgt r:embed="rIdSnd2" name="ding.wav"/>
+                                          <p:sndTgt r:embed="rIdSnd5" name="bell2.wav"/>
                                         </p:tgtEl>
                                       </p:cMediaNode>
                                     </p:audio>
@@ -23598,7 +23598,7 @@
                                           </p:endCondLst>
                                         </p:cTn>
                                         <p:tgtEl>
-                                          <p:sndTgt r:embed="rIdSnd3" name="tick.wav"/>
+                                          <p:sndTgt r:embed="rIdSnd6" name="whoosh.wav"/>
                                         </p:tgtEl>
                                       </p:cMediaNode>
                                     </p:audio>
@@ -23670,7 +23670,7 @@
                                           </p:endCondLst>
                                         </p:cTn>
                                         <p:tgtEl>
-                                          <p:sndTgt r:embed="rIdSnd4" name="win.wav"/>
+                                          <p:sndTgt r:embed="rIdSnd7" name="win.wav"/>
                                         </p:tgtEl>
                                       </p:cMediaNode>
                                     </p:audio>
@@ -24385,7 +24385,7 @@
                                           </p:endCondLst>
                                         </p:cTn>
                                         <p:tgtEl>
-                                          <p:sndTgt r:embed="rIdSnd1" name="pop.wav"/>
+                                          <p:sndTgt r:embed="rIdSnd1" name="pluck1.wav"/>
                                         </p:tgtEl>
                                       </p:cMediaNode>
                                     </p:audio>
@@ -24457,7 +24457,7 @@
                                           </p:endCondLst>
                                         </p:cTn>
                                         <p:tgtEl>
-                                          <p:sndTgt r:embed="rIdSnd2" name="ding.wav"/>
+                                          <p:sndTgt r:embed="rIdSnd2" name="bell1.wav"/>
                                         </p:tgtEl>
                                       </p:cMediaNode>
                                     </p:audio>
@@ -24529,7 +24529,7 @@
                                           </p:endCondLst>
                                         </p:cTn>
                                         <p:tgtEl>
-                                          <p:sndTgt r:embed="rIdSnd3" name="tick.wav"/>
+                                          <p:sndTgt r:embed="rIdSnd3" name="bloop.wav"/>
                                         </p:tgtEl>
                                       </p:cMediaNode>
                                     </p:audio>
@@ -24601,7 +24601,7 @@
                                           </p:endCondLst>
                                         </p:cTn>
                                         <p:tgtEl>
-                                          <p:sndTgt r:embed="rIdSnd1" name="pop.wav"/>
+                                          <p:sndTgt r:embed="rIdSnd4" name="pluck2.wav"/>
                                         </p:tgtEl>
                                       </p:cMediaNode>
                                     </p:audio>
@@ -24673,7 +24673,7 @@
                                           </p:endCondLst>
                                         </p:cTn>
                                         <p:tgtEl>
-                                          <p:sndTgt r:embed="rIdSnd2" name="ding.wav"/>
+                                          <p:sndTgt r:embed="rIdSnd5" name="bell2.wav"/>
                                         </p:tgtEl>
                                       </p:cMediaNode>
                                     </p:audio>
@@ -24745,7 +24745,7 @@
                                           </p:endCondLst>
                                         </p:cTn>
                                         <p:tgtEl>
-                                          <p:sndTgt r:embed="rIdSnd3" name="tick.wav"/>
+                                          <p:sndTgt r:embed="rIdSnd6" name="whoosh.wav"/>
                                         </p:tgtEl>
                                       </p:cMediaNode>
                                     </p:audio>
@@ -24817,7 +24817,7 @@
                                           </p:endCondLst>
                                         </p:cTn>
                                         <p:tgtEl>
-                                          <p:sndTgt r:embed="rIdSnd4" name="win.wav"/>
+                                          <p:sndTgt r:embed="rIdSnd7" name="win.wav"/>
                                         </p:tgtEl>
                                       </p:cMediaNode>
                                     </p:audio>
@@ -25532,7 +25532,7 @@
                                           </p:endCondLst>
                                         </p:cTn>
                                         <p:tgtEl>
-                                          <p:sndTgt r:embed="rIdSnd1" name="pop.wav"/>
+                                          <p:sndTgt r:embed="rIdSnd1" name="pluck1.wav"/>
                                         </p:tgtEl>
                                       </p:cMediaNode>
                                     </p:audio>
@@ -25604,7 +25604,7 @@
                                           </p:endCondLst>
                                         </p:cTn>
                                         <p:tgtEl>
-                                          <p:sndTgt r:embed="rIdSnd2" name="ding.wav"/>
+                                          <p:sndTgt r:embed="rIdSnd2" name="bell1.wav"/>
                                         </p:tgtEl>
                                       </p:cMediaNode>
                                     </p:audio>
@@ -25676,7 +25676,7 @@
                                           </p:endCondLst>
                                         </p:cTn>
                                         <p:tgtEl>
-                                          <p:sndTgt r:embed="rIdSnd3" name="tick.wav"/>
+                                          <p:sndTgt r:embed="rIdSnd3" name="bloop.wav"/>
                                         </p:tgtEl>
                                       </p:cMediaNode>
                                     </p:audio>
@@ -25748,7 +25748,7 @@
                                           </p:endCondLst>
                                         </p:cTn>
                                         <p:tgtEl>
-                                          <p:sndTgt r:embed="rIdSnd1" name="pop.wav"/>
+                                          <p:sndTgt r:embed="rIdSnd4" name="pluck2.wav"/>
                                         </p:tgtEl>
                                       </p:cMediaNode>
                                     </p:audio>
@@ -25820,7 +25820,7 @@
                                           </p:endCondLst>
                                         </p:cTn>
                                         <p:tgtEl>
-                                          <p:sndTgt r:embed="rIdSnd2" name="ding.wav"/>
+                                          <p:sndTgt r:embed="rIdSnd5" name="bell2.wav"/>
                                         </p:tgtEl>
                                       </p:cMediaNode>
                                     </p:audio>
@@ -25892,7 +25892,7 @@
                                           </p:endCondLst>
                                         </p:cTn>
                                         <p:tgtEl>
-                                          <p:sndTgt r:embed="rIdSnd3" name="tick.wav"/>
+                                          <p:sndTgt r:embed="rIdSnd6" name="whoosh.wav"/>
                                         </p:tgtEl>
                                       </p:cMediaNode>
                                     </p:audio>
@@ -25964,7 +25964,7 @@
                                           </p:endCondLst>
                                         </p:cTn>
                                         <p:tgtEl>
-                                          <p:sndTgt r:embed="rIdSnd4" name="win.wav"/>
+                                          <p:sndTgt r:embed="rIdSnd7" name="win.wav"/>
                                         </p:tgtEl>
                                       </p:cMediaNode>
                                     </p:audio>
@@ -26679,7 +26679,7 @@
                                           </p:endCondLst>
                                         </p:cTn>
                                         <p:tgtEl>
-                                          <p:sndTgt r:embed="rIdSnd1" name="pop.wav"/>
+                                          <p:sndTgt r:embed="rIdSnd1" name="pluck1.wav"/>
                                         </p:tgtEl>
                                       </p:cMediaNode>
                                     </p:audio>
@@ -26751,7 +26751,7 @@
                                           </p:endCondLst>
                                         </p:cTn>
                                         <p:tgtEl>
-                                          <p:sndTgt r:embed="rIdSnd2" name="ding.wav"/>
+                                          <p:sndTgt r:embed="rIdSnd2" name="bell1.wav"/>
                                         </p:tgtEl>
                                       </p:cMediaNode>
                                     </p:audio>
@@ -26823,7 +26823,7 @@
                                           </p:endCondLst>
                                         </p:cTn>
                                         <p:tgtEl>
-                                          <p:sndTgt r:embed="rIdSnd3" name="tick.wav"/>
+                                          <p:sndTgt r:embed="rIdSnd3" name="bloop.wav"/>
                                         </p:tgtEl>
                                       </p:cMediaNode>
                                     </p:audio>
@@ -26895,7 +26895,7 @@
                                           </p:endCondLst>
                                         </p:cTn>
                                         <p:tgtEl>
-                                          <p:sndTgt r:embed="rIdSnd1" name="pop.wav"/>
+                                          <p:sndTgt r:embed="rIdSnd4" name="pluck2.wav"/>
                                         </p:tgtEl>
                                       </p:cMediaNode>
                                     </p:audio>
@@ -26967,7 +26967,7 @@
                                           </p:endCondLst>
                                         </p:cTn>
                                         <p:tgtEl>
-                                          <p:sndTgt r:embed="rIdSnd2" name="ding.wav"/>
+                                          <p:sndTgt r:embed="rIdSnd5" name="bell2.wav"/>
                                         </p:tgtEl>
                                       </p:cMediaNode>
                                     </p:audio>
@@ -27039,7 +27039,7 @@
                                           </p:endCondLst>
                                         </p:cTn>
                                         <p:tgtEl>
-                                          <p:sndTgt r:embed="rIdSnd3" name="tick.wav"/>
+                                          <p:sndTgt r:embed="rIdSnd6" name="whoosh.wav"/>
                                         </p:tgtEl>
                                       </p:cMediaNode>
                                     </p:audio>
@@ -27111,7 +27111,7 @@
                                           </p:endCondLst>
                                         </p:cTn>
                                         <p:tgtEl>
-                                          <p:sndTgt r:embed="rIdSnd4" name="win.wav"/>
+                                          <p:sndTgt r:embed="rIdSnd7" name="win.wav"/>
                                         </p:tgtEl>
                                       </p:cMediaNode>
                                     </p:audio>
@@ -27826,7 +27826,7 @@
                                           </p:endCondLst>
                                         </p:cTn>
                                         <p:tgtEl>
-                                          <p:sndTgt r:embed="rIdSnd1" name="pop.wav"/>
+                                          <p:sndTgt r:embed="rIdSnd1" name="pluck1.wav"/>
                                         </p:tgtEl>
                                       </p:cMediaNode>
                                     </p:audio>
@@ -27898,7 +27898,7 @@
                                           </p:endCondLst>
                                         </p:cTn>
                                         <p:tgtEl>
-                                          <p:sndTgt r:embed="rIdSnd2" name="ding.wav"/>
+                                          <p:sndTgt r:embed="rIdSnd2" name="bell1.wav"/>
                                         </p:tgtEl>
                                       </p:cMediaNode>
                                     </p:audio>
@@ -27970,7 +27970,7 @@
                                           </p:endCondLst>
                                         </p:cTn>
                                         <p:tgtEl>
-                                          <p:sndTgt r:embed="rIdSnd3" name="tick.wav"/>
+                                          <p:sndTgt r:embed="rIdSnd3" name="bloop.wav"/>
                                         </p:tgtEl>
                                       </p:cMediaNode>
                                     </p:audio>
@@ -28042,7 +28042,7 @@
                                           </p:endCondLst>
                                         </p:cTn>
                                         <p:tgtEl>
-                                          <p:sndTgt r:embed="rIdSnd1" name="pop.wav"/>
+                                          <p:sndTgt r:embed="rIdSnd4" name="pluck2.wav"/>
                                         </p:tgtEl>
                                       </p:cMediaNode>
                                     </p:audio>
@@ -28114,7 +28114,7 @@
                                           </p:endCondLst>
                                         </p:cTn>
                                         <p:tgtEl>
-                                          <p:sndTgt r:embed="rIdSnd2" name="ding.wav"/>
+                                          <p:sndTgt r:embed="rIdSnd5" name="bell2.wav"/>
                                         </p:tgtEl>
                                       </p:cMediaNode>
                                     </p:audio>
@@ -28186,7 +28186,7 @@
                                           </p:endCondLst>
                                         </p:cTn>
                                         <p:tgtEl>
-                                          <p:sndTgt r:embed="rIdSnd3" name="tick.wav"/>
+                                          <p:sndTgt r:embed="rIdSnd6" name="whoosh.wav"/>
                                         </p:tgtEl>
                                       </p:cMediaNode>
                                     </p:audio>
@@ -28258,7 +28258,7 @@
                                           </p:endCondLst>
                                         </p:cTn>
                                         <p:tgtEl>
-                                          <p:sndTgt r:embed="rIdSnd4" name="win.wav"/>
+                                          <p:sndTgt r:embed="rIdSnd7" name="win.wav"/>
                                         </p:tgtEl>
                                       </p:cMediaNode>
                                     </p:audio>
@@ -29101,7 +29101,7 @@
                                           </p:endCondLst>
                                         </p:cTn>
                                         <p:tgtEl>
-                                          <p:sndTgt r:embed="rIdSnd1" name="pop.wav"/>
+                                          <p:sndTgt r:embed="rIdSnd1" name="pluck1.wav"/>
                                         </p:tgtEl>
                                       </p:cMediaNode>
                                     </p:audio>
@@ -29173,7 +29173,7 @@
                                           </p:endCondLst>
                                         </p:cTn>
                                         <p:tgtEl>
-                                          <p:sndTgt r:embed="rIdSnd2" name="ding.wav"/>
+                                          <p:sndTgt r:embed="rIdSnd2" name="bell1.wav"/>
                                         </p:tgtEl>
                                       </p:cMediaNode>
                                     </p:audio>
@@ -29245,7 +29245,7 @@
                                           </p:endCondLst>
                                         </p:cTn>
                                         <p:tgtEl>
-                                          <p:sndTgt r:embed="rIdSnd3" name="tick.wav"/>
+                                          <p:sndTgt r:embed="rIdSnd3" name="bloop.wav"/>
                                         </p:tgtEl>
                                       </p:cMediaNode>
                                     </p:audio>
@@ -29317,7 +29317,7 @@
                                           </p:endCondLst>
                                         </p:cTn>
                                         <p:tgtEl>
-                                          <p:sndTgt r:embed="rIdSnd1" name="pop.wav"/>
+                                          <p:sndTgt r:embed="rIdSnd4" name="pluck2.wav"/>
                                         </p:tgtEl>
                                       </p:cMediaNode>
                                     </p:audio>
@@ -29389,7 +29389,7 @@
                                           </p:endCondLst>
                                         </p:cTn>
                                         <p:tgtEl>
-                                          <p:sndTgt r:embed="rIdSnd2" name="ding.wav"/>
+                                          <p:sndTgt r:embed="rIdSnd5" name="bell2.wav"/>
                                         </p:tgtEl>
                                       </p:cMediaNode>
                                     </p:audio>
@@ -29461,7 +29461,7 @@
                                           </p:endCondLst>
                                         </p:cTn>
                                         <p:tgtEl>
-                                          <p:sndTgt r:embed="rIdSnd3" name="tick.wav"/>
+                                          <p:sndTgt r:embed="rIdSnd3" name="bloop.wav"/>
                                         </p:tgtEl>
                                       </p:cMediaNode>
                                     </p:audio>
@@ -29533,7 +29533,7 @@
                                           </p:endCondLst>
                                         </p:cTn>
                                         <p:tgtEl>
-                                          <p:sndTgt r:embed="rIdSnd1" name="pop.wav"/>
+                                          <p:sndTgt r:embed="rIdSnd6" name="pluck3.wav"/>
                                         </p:tgtEl>
                                       </p:cMediaNode>
                                     </p:audio>
@@ -29605,7 +29605,7 @@
                                           </p:endCondLst>
                                         </p:cTn>
                                         <p:tgtEl>
-                                          <p:sndTgt r:embed="rIdSnd2" name="ding.wav"/>
+                                          <p:sndTgt r:embed="rIdSnd7" name="bell3.wav"/>
                                         </p:tgtEl>
                                       </p:cMediaNode>
                                     </p:audio>
@@ -29677,7 +29677,7 @@
                                           </p:endCondLst>
                                         </p:cTn>
                                         <p:tgtEl>
-                                          <p:sndTgt r:embed="rIdSnd3" name="tick.wav"/>
+                                          <p:sndTgt r:embed="rIdSnd8" name="whoosh.wav"/>
                                         </p:tgtEl>
                                       </p:cMediaNode>
                                     </p:audio>
@@ -29749,7 +29749,7 @@
                                           </p:endCondLst>
                                         </p:cTn>
                                         <p:tgtEl>
-                                          <p:sndTgt r:embed="rIdSnd4" name="win.wav"/>
+                                          <p:sndTgt r:embed="rIdSnd9" name="win.wav"/>
                                         </p:tgtEl>
                                       </p:cMediaNode>
                                     </p:audio>
